--- a/presentation/how_to_test_your_code.pptx
+++ b/presentation/how_to_test_your_code.pptx
@@ -34,9 +34,11 @@
     <p:sldId id="283" r:id="rId28"/>
     <p:sldId id="297" r:id="rId29"/>
     <p:sldId id="298" r:id="rId30"/>
-    <p:sldId id="299" r:id="rId31"/>
-    <p:sldId id="285" r:id="rId32"/>
-    <p:sldId id="290" r:id="rId33"/>
+    <p:sldId id="300" r:id="rId31"/>
+    <p:sldId id="299" r:id="rId32"/>
+    <p:sldId id="301" r:id="rId33"/>
+    <p:sldId id="285" r:id="rId34"/>
+    <p:sldId id="290" r:id="rId35"/>
   </p:sldIdLst>
   <p:sldSz cx="12192000" cy="6858000"/>
   <p:notesSz cx="6858000" cy="9144000"/>
@@ -200,7 +202,7 @@
           <a:p>
             <a:fld id="{FCA6FE47-71D2-8C4F-A2E7-0757E18BE1F0}" type="datetimeFigureOut">
               <a:rPr lang="en-US" smtClean="0"/>
-              <a:t>10/3/26</a:t>
+              <a:t>10/7/26</a:t>
             </a:fld>
             <a:endParaRPr lang="en-US"/>
           </a:p>
@@ -398,7 +400,7 @@
           <a:p>
             <a:fld id="{FCA6FE47-71D2-8C4F-A2E7-0757E18BE1F0}" type="datetimeFigureOut">
               <a:rPr lang="en-US" smtClean="0"/>
-              <a:t>10/3/26</a:t>
+              <a:t>10/7/26</a:t>
             </a:fld>
             <a:endParaRPr lang="en-US"/>
           </a:p>
@@ -606,7 +608,7 @@
           <a:p>
             <a:fld id="{FCA6FE47-71D2-8C4F-A2E7-0757E18BE1F0}" type="datetimeFigureOut">
               <a:rPr lang="en-US" smtClean="0"/>
-              <a:t>10/3/26</a:t>
+              <a:t>10/7/26</a:t>
             </a:fld>
             <a:endParaRPr lang="en-US"/>
           </a:p>
@@ -804,7 +806,7 @@
           <a:p>
             <a:fld id="{FCA6FE47-71D2-8C4F-A2E7-0757E18BE1F0}" type="datetimeFigureOut">
               <a:rPr lang="en-US" smtClean="0"/>
-              <a:t>10/3/26</a:t>
+              <a:t>10/7/26</a:t>
             </a:fld>
             <a:endParaRPr lang="en-US"/>
           </a:p>
@@ -1079,7 +1081,7 @@
           <a:p>
             <a:fld id="{FCA6FE47-71D2-8C4F-A2E7-0757E18BE1F0}" type="datetimeFigureOut">
               <a:rPr lang="en-US" smtClean="0"/>
-              <a:t>10/3/26</a:t>
+              <a:t>10/7/26</a:t>
             </a:fld>
             <a:endParaRPr lang="en-US"/>
           </a:p>
@@ -1344,7 +1346,7 @@
           <a:p>
             <a:fld id="{FCA6FE47-71D2-8C4F-A2E7-0757E18BE1F0}" type="datetimeFigureOut">
               <a:rPr lang="en-US" smtClean="0"/>
-              <a:t>10/3/26</a:t>
+              <a:t>10/7/26</a:t>
             </a:fld>
             <a:endParaRPr lang="en-US"/>
           </a:p>
@@ -1756,7 +1758,7 @@
           <a:p>
             <a:fld id="{FCA6FE47-71D2-8C4F-A2E7-0757E18BE1F0}" type="datetimeFigureOut">
               <a:rPr lang="en-US" smtClean="0"/>
-              <a:t>10/3/26</a:t>
+              <a:t>10/7/26</a:t>
             </a:fld>
             <a:endParaRPr lang="en-US"/>
           </a:p>
@@ -1897,7 +1899,7 @@
           <a:p>
             <a:fld id="{FCA6FE47-71D2-8C4F-A2E7-0757E18BE1F0}" type="datetimeFigureOut">
               <a:rPr lang="en-US" smtClean="0"/>
-              <a:t>10/3/26</a:t>
+              <a:t>10/7/26</a:t>
             </a:fld>
             <a:endParaRPr lang="en-US"/>
           </a:p>
@@ -2010,7 +2012,7 @@
           <a:p>
             <a:fld id="{FCA6FE47-71D2-8C4F-A2E7-0757E18BE1F0}" type="datetimeFigureOut">
               <a:rPr lang="en-US" smtClean="0"/>
-              <a:t>10/3/26</a:t>
+              <a:t>10/7/26</a:t>
             </a:fld>
             <a:endParaRPr lang="en-US"/>
           </a:p>
@@ -2321,7 +2323,7 @@
           <a:p>
             <a:fld id="{FCA6FE47-71D2-8C4F-A2E7-0757E18BE1F0}" type="datetimeFigureOut">
               <a:rPr lang="en-US" smtClean="0"/>
-              <a:t>10/3/26</a:t>
+              <a:t>10/7/26</a:t>
             </a:fld>
             <a:endParaRPr lang="en-US"/>
           </a:p>
@@ -2609,7 +2611,7 @@
           <a:p>
             <a:fld id="{FCA6FE47-71D2-8C4F-A2E7-0757E18BE1F0}" type="datetimeFigureOut">
               <a:rPr lang="en-US" smtClean="0"/>
-              <a:t>10/3/26</a:t>
+              <a:t>10/7/26</a:t>
             </a:fld>
             <a:endParaRPr lang="en-US"/>
           </a:p>
@@ -2850,7 +2852,7 @@
           <a:p>
             <a:fld id="{FCA6FE47-71D2-8C4F-A2E7-0757E18BE1F0}" type="datetimeFigureOut">
               <a:rPr lang="en-US" smtClean="0"/>
-              <a:t>10/3/26</a:t>
+              <a:t>10/7/26</a:t>
             </a:fld>
             <a:endParaRPr lang="en-US"/>
           </a:p>
@@ -3467,14 +3469,47 @@
       </p:sp>
       <p:sp>
         <p:nvSpPr>
-          <p:cNvPr id="4" name="Rect 20"/>
-          <p:cNvSpPr/>
-          <p:nvPr/>
-        </p:nvSpPr>
-        <p:spPr>
-          <a:xfrm>
-            <a:off x="594360" y="1600200"/>
-            <a:ext cx="4754880" cy="4023360"/>
+          <p:cNvPr id="5" name="TextBox 21"/>
+          <p:cNvSpPr/>
+          <p:nvPr/>
+        </p:nvSpPr>
+        <p:spPr>
+          <a:xfrm>
+            <a:off x="2423160" y="1874519"/>
+            <a:ext cx="1577340" cy="365760"/>
+          </a:xfrm>
+          <a:noFill/>
+          <a:ln>
+            <a:noFill/>
+          </a:ln>
+        </p:spPr>
+        <p:txBody>
+          <a:bodyPr lIns="73152" tIns="73152" rIns="73152" bIns="73152" anchor="ctr"/>
+          <a:lstStyle/>
+          <a:p>
+            <a:pPr marL="0" lvl="0" indent="0" algn="l"/>
+            <a:r>
+              <a:rPr lang="en-US" sz="1600" b="1" i="0" dirty="0">
+                <a:solidFill>
+                  <a:srgbClr val="172033"/>
+                </a:solidFill>
+                <a:latin typeface="Aptos"/>
+              </a:rPr>
+              <a:t>CORE LOGIC</a:t>
+            </a:r>
+          </a:p>
+        </p:txBody>
+      </p:sp>
+      <p:sp>
+        <p:nvSpPr>
+          <p:cNvPr id="6" name="Rect 22"/>
+          <p:cNvSpPr/>
+          <p:nvPr/>
+        </p:nvSpPr>
+        <p:spPr>
+          <a:xfrm>
+            <a:off x="841248" y="2423160"/>
+            <a:ext cx="4224528" cy="2331720"/>
           </a:xfrm>
           <a:prstGeom prst="roundRect">
             <a:avLst/>
@@ -3490,23 +3525,159 @@
           </a:ln>
         </p:spPr>
         <p:txBody>
-          <a:bodyPr/>
-          <a:lstStyle/>
-          <a:p>
-            <a:endParaRPr lang="en-US"/>
-          </a:p>
-        </p:txBody>
-      </p:sp>
-      <p:sp>
-        <p:nvSpPr>
-          <p:cNvPr id="5" name="TextBox 21"/>
-          <p:cNvSpPr/>
-          <p:nvPr/>
-        </p:nvSpPr>
-        <p:spPr>
-          <a:xfrm>
-            <a:off x="868680" y="1874519"/>
-            <a:ext cx="4206240" cy="365760"/>
+          <a:bodyPr lIns="164592" tIns="128016" rIns="164592" bIns="128016"/>
+          <a:lstStyle/>
+          <a:p>
+            <a:pPr marL="0" lvl="0" indent="0" algn="l"/>
+            <a:r>
+              <a:rPr lang="en-US" sz="1375" b="0" i="0">
+                <a:solidFill>
+                  <a:srgbClr val="172033"/>
+                </a:solidFill>
+                <a:latin typeface="Courier New"/>
+              </a:rPr>
+              <a:t>def </a:t>
+            </a:r>
+            <a:r>
+              <a:rPr lang="en-US" sz="1375" b="0" i="0" err="1">
+                <a:solidFill>
+                  <a:srgbClr val="172033"/>
+                </a:solidFill>
+                <a:latin typeface="Courier New"/>
+              </a:rPr>
+              <a:t>ols</a:t>
+            </a:r>
+            <a:r>
+              <a:rPr lang="en-US" sz="1375" b="0" i="0">
+                <a:solidFill>
+                  <a:srgbClr val="172033"/>
+                </a:solidFill>
+                <a:latin typeface="Courier New"/>
+              </a:rPr>
+              <a:t>(data, model):</a:t>
+            </a:r>
+          </a:p>
+          <a:p>
+            <a:pPr algn="l"/>
+            <a:r>
+              <a:rPr lang="en-US" sz="1375" b="0" i="0">
+                <a:solidFill>
+                  <a:srgbClr val="172033"/>
+                </a:solidFill>
+                <a:latin typeface="Courier New"/>
+              </a:rPr>
+              <a:t>    </a:t>
+            </a:r>
+          </a:p>
+          <a:p>
+            <a:pPr algn="l"/>
+            <a:r>
+              <a:rPr lang="en-US" sz="1375">
+                <a:solidFill>
+                  <a:srgbClr val="172033"/>
+                </a:solidFill>
+                <a:latin typeface="Courier New"/>
+              </a:rPr>
+              <a:t>    </a:t>
+            </a:r>
+            <a:r>
+              <a:rPr lang="en-US" sz="1375" b="0" i="0">
+                <a:solidFill>
+                  <a:srgbClr val="172033"/>
+                </a:solidFill>
+                <a:latin typeface="Courier New"/>
+              </a:rPr>
+              <a:t>fit = </a:t>
+            </a:r>
+            <a:r>
+              <a:rPr lang="en-US" sz="1375" b="0" i="0" err="1">
+                <a:solidFill>
+                  <a:srgbClr val="172033"/>
+                </a:solidFill>
+                <a:latin typeface="Courier New"/>
+              </a:rPr>
+              <a:t>np.linalg.inv</a:t>
+            </a:r>
+            <a:r>
+              <a:rPr lang="en-US" sz="1375" b="0" i="0">
+                <a:solidFill>
+                  <a:srgbClr val="172033"/>
+                </a:solidFill>
+                <a:latin typeface="Courier New"/>
+              </a:rPr>
+              <a:t>(</a:t>
+            </a:r>
+            <a:r>
+              <a:rPr lang="en-US" sz="1380" err="1">
+                <a:latin typeface="Courier New" panose="02070309020205020404" pitchFamily="49" charset="0"/>
+                <a:cs typeface="Courier New" panose="02070309020205020404" pitchFamily="49" charset="0"/>
+              </a:rPr>
+              <a:t>model.T</a:t>
+            </a:r>
+            <a:r>
+              <a:rPr lang="en-US" sz="1380">
+                <a:latin typeface="Courier New" panose="02070309020205020404" pitchFamily="49" charset="0"/>
+                <a:cs typeface="Courier New" panose="02070309020205020404" pitchFamily="49" charset="0"/>
+              </a:rPr>
+              <a:t> @ 		model) @ </a:t>
+            </a:r>
+            <a:r>
+              <a:rPr lang="en-US" sz="1380" err="1">
+                <a:latin typeface="Courier New" panose="02070309020205020404" pitchFamily="49" charset="0"/>
+                <a:cs typeface="Courier New" panose="02070309020205020404" pitchFamily="49" charset="0"/>
+              </a:rPr>
+              <a:t>model.T</a:t>
+            </a:r>
+            <a:r>
+              <a:rPr lang="en-US" sz="1380">
+                <a:latin typeface="Courier New" panose="02070309020205020404" pitchFamily="49" charset="0"/>
+                <a:cs typeface="Courier New" panose="02070309020205020404" pitchFamily="49" charset="0"/>
+              </a:rPr>
+              <a:t> @ data</a:t>
+            </a:r>
+            <a:endParaRPr lang="en-US" sz="1375" b="0" i="0">
+              <a:solidFill>
+                <a:srgbClr val="172033"/>
+              </a:solidFill>
+              <a:latin typeface="Courier New"/>
+            </a:endParaRPr>
+          </a:p>
+          <a:p>
+            <a:pPr marL="0" lvl="0" indent="0" algn="l"/>
+            <a:r>
+              <a:rPr lang="en-US" sz="1375" b="0" i="0">
+                <a:solidFill>
+                  <a:srgbClr val="172033"/>
+                </a:solidFill>
+                <a:latin typeface="Courier New"/>
+              </a:rPr>
+              <a:t>    error = data - (model @ fit)</a:t>
+            </a:r>
+          </a:p>
+          <a:p>
+            <a:pPr marL="0" lvl="0" indent="0" algn="l"/>
+            <a:r>
+              <a:rPr lang="en-US" sz="1375" b="0" i="0">
+                <a:solidFill>
+                  <a:srgbClr val="172033"/>
+                </a:solidFill>
+                <a:latin typeface="Courier New"/>
+              </a:rPr>
+              <a:t>    return fit, error</a:t>
+            </a:r>
+          </a:p>
+        </p:txBody>
+      </p:sp>
+      <p:sp>
+        <p:nvSpPr>
+          <p:cNvPr id="8" name="TextBox 31"/>
+          <p:cNvSpPr/>
+          <p:nvPr/>
+        </p:nvSpPr>
+        <p:spPr>
+          <a:xfrm>
+            <a:off x="8145780" y="1828800"/>
+            <a:ext cx="3246120" cy="365760"/>
           </a:xfrm>
           <a:noFill/>
           <a:ln>
@@ -3525,21 +3696,21 @@
                 </a:solidFill>
                 <a:latin typeface="Aptos"/>
               </a:rPr>
-              <a:t>CORE LOGIC</a:t>
-            </a:r>
-          </a:p>
-        </p:txBody>
-      </p:sp>
-      <p:sp>
-        <p:nvSpPr>
-          <p:cNvPr id="6" name="Rect 22"/>
-          <p:cNvSpPr/>
-          <p:nvPr/>
-        </p:nvSpPr>
-        <p:spPr>
-          <a:xfrm>
-            <a:off x="841248" y="2423160"/>
-            <a:ext cx="4224528" cy="2331720"/>
+              <a:t>I/O BOUNDARY</a:t>
+            </a:r>
+          </a:p>
+        </p:txBody>
+      </p:sp>
+      <p:sp>
+        <p:nvSpPr>
+          <p:cNvPr id="9" name="Rect 32"/>
+          <p:cNvSpPr/>
+          <p:nvPr/>
+        </p:nvSpPr>
+        <p:spPr>
+          <a:xfrm>
+            <a:off x="6748272" y="2423160"/>
+            <a:ext cx="4462272" cy="2331720"/>
           </a:xfrm>
           <a:prstGeom prst="roundRect">
             <a:avLst/>
@@ -3560,239 +3731,6 @@
           <a:p>
             <a:pPr marL="0" lvl="0" indent="0" algn="l"/>
             <a:r>
-              <a:rPr lang="en-US" sz="1375" b="0" i="0">
-                <a:solidFill>
-                  <a:srgbClr val="172033"/>
-                </a:solidFill>
-                <a:latin typeface="Courier New"/>
-              </a:rPr>
-              <a:t>def </a:t>
-            </a:r>
-            <a:r>
-              <a:rPr lang="en-US" sz="1375" b="0" i="0" err="1">
-                <a:solidFill>
-                  <a:srgbClr val="172033"/>
-                </a:solidFill>
-                <a:latin typeface="Courier New"/>
-              </a:rPr>
-              <a:t>ols</a:t>
-            </a:r>
-            <a:r>
-              <a:rPr lang="en-US" sz="1375" b="0" i="0">
-                <a:solidFill>
-                  <a:srgbClr val="172033"/>
-                </a:solidFill>
-                <a:latin typeface="Courier New"/>
-              </a:rPr>
-              <a:t>(data, model):</a:t>
-            </a:r>
-          </a:p>
-          <a:p>
-            <a:pPr algn="l"/>
-            <a:r>
-              <a:rPr lang="en-US" sz="1375" b="0" i="0">
-                <a:solidFill>
-                  <a:srgbClr val="172033"/>
-                </a:solidFill>
-                <a:latin typeface="Courier New"/>
-              </a:rPr>
-              <a:t>    </a:t>
-            </a:r>
-          </a:p>
-          <a:p>
-            <a:pPr algn="l"/>
-            <a:r>
-              <a:rPr lang="en-US" sz="1375">
-                <a:solidFill>
-                  <a:srgbClr val="172033"/>
-                </a:solidFill>
-                <a:latin typeface="Courier New"/>
-              </a:rPr>
-              <a:t>    </a:t>
-            </a:r>
-            <a:r>
-              <a:rPr lang="en-US" sz="1375" b="0" i="0">
-                <a:solidFill>
-                  <a:srgbClr val="172033"/>
-                </a:solidFill>
-                <a:latin typeface="Courier New"/>
-              </a:rPr>
-              <a:t>fit = </a:t>
-            </a:r>
-            <a:r>
-              <a:rPr lang="en-US" sz="1375" b="0" i="0" err="1">
-                <a:solidFill>
-                  <a:srgbClr val="172033"/>
-                </a:solidFill>
-                <a:latin typeface="Courier New"/>
-              </a:rPr>
-              <a:t>np.linalg.inv</a:t>
-            </a:r>
-            <a:r>
-              <a:rPr lang="en-US" sz="1375" b="0" i="0">
-                <a:solidFill>
-                  <a:srgbClr val="172033"/>
-                </a:solidFill>
-                <a:latin typeface="Courier New"/>
-              </a:rPr>
-              <a:t>(</a:t>
-            </a:r>
-            <a:r>
-              <a:rPr lang="en-US" sz="1380" err="1">
-                <a:latin typeface="Courier New" panose="02070309020205020404" pitchFamily="49" charset="0"/>
-                <a:cs typeface="Courier New" panose="02070309020205020404" pitchFamily="49" charset="0"/>
-              </a:rPr>
-              <a:t>model.T</a:t>
-            </a:r>
-            <a:r>
-              <a:rPr lang="en-US" sz="1380">
-                <a:latin typeface="Courier New" panose="02070309020205020404" pitchFamily="49" charset="0"/>
-                <a:cs typeface="Courier New" panose="02070309020205020404" pitchFamily="49" charset="0"/>
-              </a:rPr>
-              <a:t> @ 		model) @ </a:t>
-            </a:r>
-            <a:r>
-              <a:rPr lang="en-US" sz="1380" err="1">
-                <a:latin typeface="Courier New" panose="02070309020205020404" pitchFamily="49" charset="0"/>
-                <a:cs typeface="Courier New" panose="02070309020205020404" pitchFamily="49" charset="0"/>
-              </a:rPr>
-              <a:t>model.T</a:t>
-            </a:r>
-            <a:r>
-              <a:rPr lang="en-US" sz="1380">
-                <a:latin typeface="Courier New" panose="02070309020205020404" pitchFamily="49" charset="0"/>
-                <a:cs typeface="Courier New" panose="02070309020205020404" pitchFamily="49" charset="0"/>
-              </a:rPr>
-              <a:t> @ data</a:t>
-            </a:r>
-            <a:endParaRPr lang="en-US" sz="1375" b="0" i="0">
-              <a:solidFill>
-                <a:srgbClr val="172033"/>
-              </a:solidFill>
-              <a:latin typeface="Courier New"/>
-            </a:endParaRPr>
-          </a:p>
-          <a:p>
-            <a:pPr marL="0" lvl="0" indent="0" algn="l"/>
-            <a:r>
-              <a:rPr lang="en-US" sz="1375" b="0" i="0">
-                <a:solidFill>
-                  <a:srgbClr val="172033"/>
-                </a:solidFill>
-                <a:latin typeface="Courier New"/>
-              </a:rPr>
-              <a:t>    error = data - (model @ fit)</a:t>
-            </a:r>
-          </a:p>
-          <a:p>
-            <a:pPr marL="0" lvl="0" indent="0" algn="l"/>
-            <a:r>
-              <a:rPr lang="en-US" sz="1375" b="0" i="0">
-                <a:solidFill>
-                  <a:srgbClr val="172033"/>
-                </a:solidFill>
-                <a:latin typeface="Courier New"/>
-              </a:rPr>
-              <a:t>    return fit, error</a:t>
-            </a:r>
-          </a:p>
-        </p:txBody>
-      </p:sp>
-      <p:sp>
-        <p:nvSpPr>
-          <p:cNvPr id="7" name="Rect 30"/>
-          <p:cNvSpPr/>
-          <p:nvPr/>
-        </p:nvSpPr>
-        <p:spPr>
-          <a:xfrm>
-            <a:off x="6492240" y="1600200"/>
-            <a:ext cx="5074920" cy="4023360"/>
-          </a:xfrm>
-          <a:prstGeom prst="roundRect">
-            <a:avLst/>
-          </a:prstGeom>
-          <a:solidFill>
-            <a:srgbClr val="FFFFFF"/>
-          </a:solidFill>
-          <a:ln>
-            <a:solidFill>
-              <a:srgbClr val="D5DDE7"/>
-            </a:solidFill>
-            <a:prstDash val="solid"/>
-          </a:ln>
-        </p:spPr>
-        <p:txBody>
-          <a:bodyPr/>
-          <a:lstStyle/>
-          <a:p>
-            <a:endParaRPr lang="en-US"/>
-          </a:p>
-        </p:txBody>
-      </p:sp>
-      <p:sp>
-        <p:nvSpPr>
-          <p:cNvPr id="8" name="TextBox 31"/>
-          <p:cNvSpPr/>
-          <p:nvPr/>
-        </p:nvSpPr>
-        <p:spPr>
-          <a:xfrm>
-            <a:off x="6766560" y="1874519"/>
-            <a:ext cx="4480560" cy="365760"/>
-          </a:xfrm>
-          <a:noFill/>
-          <a:ln>
-            <a:noFill/>
-          </a:ln>
-        </p:spPr>
-        <p:txBody>
-          <a:bodyPr lIns="73152" tIns="73152" rIns="73152" bIns="73152" anchor="ctr"/>
-          <a:lstStyle/>
-          <a:p>
-            <a:pPr marL="0" lvl="0" indent="0" algn="l"/>
-            <a:r>
-              <a:rPr lang="en-US" sz="1600" b="1" i="0" dirty="0">
-                <a:solidFill>
-                  <a:srgbClr val="172033"/>
-                </a:solidFill>
-                <a:latin typeface="Aptos"/>
-              </a:rPr>
-              <a:t>I/O BOUNDARY</a:t>
-            </a:r>
-          </a:p>
-        </p:txBody>
-      </p:sp>
-      <p:sp>
-        <p:nvSpPr>
-          <p:cNvPr id="9" name="Rect 32"/>
-          <p:cNvSpPr/>
-          <p:nvPr/>
-        </p:nvSpPr>
-        <p:spPr>
-          <a:xfrm>
-            <a:off x="6748272" y="2423160"/>
-            <a:ext cx="4462272" cy="2331720"/>
-          </a:xfrm>
-          <a:prstGeom prst="roundRect">
-            <a:avLst/>
-          </a:prstGeom>
-          <a:solidFill>
-            <a:srgbClr val="FFFFFF"/>
-          </a:solidFill>
-          <a:ln>
-            <a:solidFill>
-              <a:srgbClr val="D5DDE7"/>
-            </a:solidFill>
-            <a:prstDash val="solid"/>
-          </a:ln>
-        </p:spPr>
-        <p:txBody>
-          <a:bodyPr lIns="164592" tIns="128016" rIns="164592" bIns="128016"/>
-          <a:lstStyle/>
-          <a:p>
-            <a:pPr marL="0" lvl="0" indent="0" algn="l"/>
-            <a:r>
               <a:rPr lang="en-US" sz="1239" b="0" i="0">
                 <a:solidFill>
                   <a:srgbClr val="172033"/>
@@ -4099,39 +4037,6 @@
           <a:lstStyle/>
           <a:p>
             <a:endParaRPr lang="en-US"/>
-          </a:p>
-        </p:txBody>
-      </p:sp>
-      <p:sp>
-        <p:nvSpPr>
-          <p:cNvPr id="11" name="TextBox 41"/>
-          <p:cNvSpPr/>
-          <p:nvPr/>
-        </p:nvSpPr>
-        <p:spPr>
-          <a:xfrm>
-            <a:off x="5394960" y="2423160"/>
-            <a:ext cx="1005840" cy="411480"/>
-          </a:xfrm>
-          <a:noFill/>
-          <a:ln>
-            <a:noFill/>
-          </a:ln>
-        </p:spPr>
-        <p:txBody>
-          <a:bodyPr lIns="73152" tIns="73152" rIns="73152" bIns="73152" anchor="ctr"/>
-          <a:lstStyle/>
-          <a:p>
-            <a:pPr marL="0" lvl="0" indent="0" algn="ctr"/>
-            <a:r>
-              <a:rPr lang="en-US" b="1" i="0" dirty="0">
-                <a:solidFill>
-                  <a:srgbClr val="172033"/>
-                </a:solidFill>
-                <a:latin typeface="Aptos"/>
-              </a:rPr>
-              <a:t>CALL</a:t>
-            </a:r>
           </a:p>
         </p:txBody>
       </p:sp>
@@ -4336,83 +4241,6 @@
       </p:sp>
       <p:sp>
         <p:nvSpPr>
-          <p:cNvPr id="4" name="Rect 20">
-            <a:extLst>
-              <a:ext uri="{FF2B5EF4-FFF2-40B4-BE49-F238E27FC236}">
-                <a16:creationId xmlns:a16="http://schemas.microsoft.com/office/drawing/2014/main" id="{A490D65C-900F-2C3A-1B1D-F3EF448F767E}"/>
-              </a:ext>
-            </a:extLst>
-          </p:cNvPr>
-          <p:cNvSpPr/>
-          <p:nvPr/>
-        </p:nvSpPr>
-        <p:spPr>
-          <a:xfrm>
-            <a:off x="594360" y="1600200"/>
-            <a:ext cx="4754880" cy="4023360"/>
-          </a:xfrm>
-          <a:prstGeom prst="roundRect">
-            <a:avLst/>
-          </a:prstGeom>
-          <a:solidFill>
-            <a:srgbClr val="FFFFFF"/>
-          </a:solidFill>
-          <a:ln>
-            <a:solidFill>
-              <a:srgbClr val="D5DDE7"/>
-            </a:solidFill>
-            <a:prstDash val="solid"/>
-          </a:ln>
-        </p:spPr>
-        <p:txBody>
-          <a:bodyPr/>
-          <a:lstStyle/>
-          <a:p>
-            <a:endParaRPr lang="en-US"/>
-          </a:p>
-        </p:txBody>
-      </p:sp>
-      <p:sp>
-        <p:nvSpPr>
-          <p:cNvPr id="5" name="TextBox 21">
-            <a:extLst>
-              <a:ext uri="{FF2B5EF4-FFF2-40B4-BE49-F238E27FC236}">
-                <a16:creationId xmlns:a16="http://schemas.microsoft.com/office/drawing/2014/main" id="{E0986C4B-3E79-B288-86B3-04ED6B8E7D85}"/>
-              </a:ext>
-            </a:extLst>
-          </p:cNvPr>
-          <p:cNvSpPr/>
-          <p:nvPr/>
-        </p:nvSpPr>
-        <p:spPr>
-          <a:xfrm>
-            <a:off x="868680" y="1874519"/>
-            <a:ext cx="4206240" cy="365760"/>
-          </a:xfrm>
-          <a:noFill/>
-          <a:ln>
-            <a:noFill/>
-          </a:ln>
-        </p:spPr>
-        <p:txBody>
-          <a:bodyPr lIns="73152" tIns="73152" rIns="73152" bIns="73152" anchor="ctr"/>
-          <a:lstStyle/>
-          <a:p>
-            <a:pPr marL="0" lvl="0" indent="0" algn="l"/>
-            <a:r>
-              <a:rPr lang="en-US" sz="1600" b="1" i="0" dirty="0">
-                <a:solidFill>
-                  <a:srgbClr val="172033"/>
-                </a:solidFill>
-                <a:latin typeface="Aptos"/>
-              </a:rPr>
-              <a:t>CORE LOGIC</a:t>
-            </a:r>
-          </a:p>
-        </p:txBody>
-      </p:sp>
-      <p:sp>
-        <p:nvSpPr>
           <p:cNvPr id="6" name="Rect 22">
             <a:extLst>
               <a:ext uri="{FF2B5EF4-FFF2-40B4-BE49-F238E27FC236}">
@@ -4587,83 +4415,6 @@
       </p:sp>
       <p:sp>
         <p:nvSpPr>
-          <p:cNvPr id="7" name="Rect 30">
-            <a:extLst>
-              <a:ext uri="{FF2B5EF4-FFF2-40B4-BE49-F238E27FC236}">
-                <a16:creationId xmlns:a16="http://schemas.microsoft.com/office/drawing/2014/main" id="{1C640DF0-DD2F-1F2B-2A2B-7471DE7CDE80}"/>
-              </a:ext>
-            </a:extLst>
-          </p:cNvPr>
-          <p:cNvSpPr/>
-          <p:nvPr/>
-        </p:nvSpPr>
-        <p:spPr>
-          <a:xfrm>
-            <a:off x="6492240" y="1600200"/>
-            <a:ext cx="5074920" cy="4023360"/>
-          </a:xfrm>
-          <a:prstGeom prst="roundRect">
-            <a:avLst/>
-          </a:prstGeom>
-          <a:solidFill>
-            <a:srgbClr val="FFFFFF"/>
-          </a:solidFill>
-          <a:ln>
-            <a:solidFill>
-              <a:srgbClr val="D5DDE7"/>
-            </a:solidFill>
-            <a:prstDash val="solid"/>
-          </a:ln>
-        </p:spPr>
-        <p:txBody>
-          <a:bodyPr/>
-          <a:lstStyle/>
-          <a:p>
-            <a:endParaRPr lang="en-US"/>
-          </a:p>
-        </p:txBody>
-      </p:sp>
-      <p:sp>
-        <p:nvSpPr>
-          <p:cNvPr id="8" name="TextBox 31">
-            <a:extLst>
-              <a:ext uri="{FF2B5EF4-FFF2-40B4-BE49-F238E27FC236}">
-                <a16:creationId xmlns:a16="http://schemas.microsoft.com/office/drawing/2014/main" id="{0A1E1236-A4F5-28B8-1DBA-E25ED33C82D6}"/>
-              </a:ext>
-            </a:extLst>
-          </p:cNvPr>
-          <p:cNvSpPr/>
-          <p:nvPr/>
-        </p:nvSpPr>
-        <p:spPr>
-          <a:xfrm>
-            <a:off x="6766560" y="1874519"/>
-            <a:ext cx="4480560" cy="365760"/>
-          </a:xfrm>
-          <a:noFill/>
-          <a:ln>
-            <a:noFill/>
-          </a:ln>
-        </p:spPr>
-        <p:txBody>
-          <a:bodyPr lIns="73152" tIns="73152" rIns="73152" bIns="73152" anchor="ctr"/>
-          <a:lstStyle/>
-          <a:p>
-            <a:pPr marL="0" lvl="0" indent="0" algn="l"/>
-            <a:r>
-              <a:rPr lang="en-US" sz="1600" b="1" i="0" dirty="0">
-                <a:solidFill>
-                  <a:srgbClr val="172033"/>
-                </a:solidFill>
-                <a:latin typeface="Aptos"/>
-              </a:rPr>
-              <a:t>I/O BOUNDARY</a:t>
-            </a:r>
-          </a:p>
-        </p:txBody>
-      </p:sp>
-      <p:sp>
-        <p:nvSpPr>
           <p:cNvPr id="9" name="Rect 32">
             <a:extLst>
               <a:ext uri="{FF2B5EF4-FFF2-40B4-BE49-F238E27FC236}">
@@ -5010,45 +4761,6 @@
           <a:lstStyle/>
           <a:p>
             <a:endParaRPr lang="en-US"/>
-          </a:p>
-        </p:txBody>
-      </p:sp>
-      <p:sp>
-        <p:nvSpPr>
-          <p:cNvPr id="11" name="TextBox 41">
-            <a:extLst>
-              <a:ext uri="{FF2B5EF4-FFF2-40B4-BE49-F238E27FC236}">
-                <a16:creationId xmlns:a16="http://schemas.microsoft.com/office/drawing/2014/main" id="{19B6CA16-232E-E41E-2830-4BA8A3A90A71}"/>
-              </a:ext>
-            </a:extLst>
-          </p:cNvPr>
-          <p:cNvSpPr/>
-          <p:nvPr/>
-        </p:nvSpPr>
-        <p:spPr>
-          <a:xfrm>
-            <a:off x="5394960" y="2423160"/>
-            <a:ext cx="1005840" cy="411480"/>
-          </a:xfrm>
-          <a:noFill/>
-          <a:ln>
-            <a:noFill/>
-          </a:ln>
-        </p:spPr>
-        <p:txBody>
-          <a:bodyPr lIns="73152" tIns="73152" rIns="73152" bIns="73152" anchor="ctr"/>
-          <a:lstStyle/>
-          <a:p>
-            <a:pPr marL="0" lvl="0" indent="0" algn="ctr"/>
-            <a:r>
-              <a:rPr lang="en-US" b="1" i="0" dirty="0">
-                <a:solidFill>
-                  <a:srgbClr val="172033"/>
-                </a:solidFill>
-                <a:latin typeface="Aptos"/>
-              </a:rPr>
-              <a:t>CALL</a:t>
-            </a:r>
           </a:p>
         </p:txBody>
       </p:sp>
@@ -5232,6 +4944,84 @@
                 </a:solidFill>
               </a:rPr>
               <a:t>Complete working code in tutorial</a:t>
+            </a:r>
+          </a:p>
+        </p:txBody>
+      </p:sp>
+      <p:sp>
+        <p:nvSpPr>
+          <p:cNvPr id="16" name="TextBox 21">
+            <a:extLst>
+              <a:ext uri="{FF2B5EF4-FFF2-40B4-BE49-F238E27FC236}">
+                <a16:creationId xmlns:a16="http://schemas.microsoft.com/office/drawing/2014/main" id="{FCC3DD9F-1E9A-F70D-0D47-282E5213E416}"/>
+              </a:ext>
+            </a:extLst>
+          </p:cNvPr>
+          <p:cNvSpPr/>
+          <p:nvPr/>
+        </p:nvSpPr>
+        <p:spPr>
+          <a:xfrm>
+            <a:off x="2423160" y="1874519"/>
+            <a:ext cx="1577340" cy="365760"/>
+          </a:xfrm>
+          <a:noFill/>
+          <a:ln>
+            <a:noFill/>
+          </a:ln>
+        </p:spPr>
+        <p:txBody>
+          <a:bodyPr lIns="73152" tIns="73152" rIns="73152" bIns="73152" anchor="ctr"/>
+          <a:lstStyle/>
+          <a:p>
+            <a:pPr marL="0" lvl="0" indent="0" algn="l"/>
+            <a:r>
+              <a:rPr lang="en-US" sz="1600" b="1" i="0" dirty="0">
+                <a:solidFill>
+                  <a:srgbClr val="172033"/>
+                </a:solidFill>
+                <a:latin typeface="Aptos"/>
+              </a:rPr>
+              <a:t>CORE LOGIC</a:t>
+            </a:r>
+          </a:p>
+        </p:txBody>
+      </p:sp>
+      <p:sp>
+        <p:nvSpPr>
+          <p:cNvPr id="17" name="TextBox 31">
+            <a:extLst>
+              <a:ext uri="{FF2B5EF4-FFF2-40B4-BE49-F238E27FC236}">
+                <a16:creationId xmlns:a16="http://schemas.microsoft.com/office/drawing/2014/main" id="{A1289981-7302-5D5F-132D-876003391EE0}"/>
+              </a:ext>
+            </a:extLst>
+          </p:cNvPr>
+          <p:cNvSpPr/>
+          <p:nvPr/>
+        </p:nvSpPr>
+        <p:spPr>
+          <a:xfrm>
+            <a:off x="8145780" y="1828800"/>
+            <a:ext cx="3246120" cy="365760"/>
+          </a:xfrm>
+          <a:noFill/>
+          <a:ln>
+            <a:noFill/>
+          </a:ln>
+        </p:spPr>
+        <p:txBody>
+          <a:bodyPr lIns="73152" tIns="73152" rIns="73152" bIns="73152" anchor="ctr"/>
+          <a:lstStyle/>
+          <a:p>
+            <a:pPr marL="0" lvl="0" indent="0" algn="l"/>
+            <a:r>
+              <a:rPr lang="en-US" sz="1600" b="1" i="0" dirty="0">
+                <a:solidFill>
+                  <a:srgbClr val="172033"/>
+                </a:solidFill>
+                <a:latin typeface="Aptos"/>
+              </a:rPr>
+              <a:t>I/O BOUNDARY</a:t>
             </a:r>
           </a:p>
         </p:txBody>
@@ -5544,7 +5334,7 @@
         <p:spPr>
           <a:xfrm>
             <a:off x="6428232" y="1901952"/>
-            <a:ext cx="2057400" cy="457200"/>
+            <a:ext cx="2322576" cy="457200"/>
           </a:xfrm>
           <a:noFill/>
           <a:ln>
@@ -5557,7 +5347,7 @@
           <a:p>
             <a:pPr marL="0" lvl="0" indent="0" algn="l"/>
             <a:r>
-              <a:rPr lang="en-US" sz="2400" b="1" i="0">
+              <a:rPr lang="en-US" sz="2400" b="1" i="0" dirty="0">
                 <a:solidFill>
                   <a:srgbClr val="172033"/>
                 </a:solidFill>
@@ -5641,8 +5431,8 @@
         </p:nvSpPr>
         <p:spPr>
           <a:xfrm>
-            <a:off x="9244584" y="1901952"/>
-            <a:ext cx="2057400" cy="457200"/>
+            <a:off x="9187434" y="1901952"/>
+            <a:ext cx="2322576" cy="457200"/>
           </a:xfrm>
           <a:noFill/>
           <a:ln>
@@ -5655,7 +5445,7 @@
           <a:p>
             <a:pPr marL="0" lvl="0" indent="0" algn="l"/>
             <a:r>
-              <a:rPr lang="en-US" sz="2400" b="1" i="0">
+              <a:rPr lang="en-US" sz="2400" b="1" i="0" dirty="0">
                 <a:solidFill>
                   <a:srgbClr val="172033"/>
                 </a:solidFill>
@@ -6235,38 +6025,6 @@
       </p:sp>
       <p:sp>
         <p:nvSpPr>
-          <p:cNvPr id="5" name="Rect 30"/>
-          <p:cNvSpPr/>
-          <p:nvPr/>
-        </p:nvSpPr>
-        <p:spPr>
-          <a:xfrm>
-            <a:off x="7406640" y="1600200"/>
-            <a:ext cx="4114800" cy="4343400"/>
-          </a:xfrm>
-          <a:prstGeom prst="roundRect">
-            <a:avLst/>
-          </a:prstGeom>
-          <a:solidFill>
-            <a:srgbClr val="FFFFFF"/>
-          </a:solidFill>
-          <a:ln>
-            <a:solidFill>
-              <a:srgbClr val="D5DDE7"/>
-            </a:solidFill>
-            <a:prstDash val="solid"/>
-          </a:ln>
-        </p:spPr>
-        <p:txBody>
-          <a:bodyPr/>
-          <a:lstStyle/>
-          <a:p>
-            <a:endParaRPr lang="en-US"/>
-          </a:p>
-        </p:txBody>
-      </p:sp>
-      <p:sp>
-        <p:nvSpPr>
           <p:cNvPr id="6" name="TextBox 31"/>
           <p:cNvSpPr/>
           <p:nvPr/>
@@ -6287,13 +6045,13 @@
           <a:p>
             <a:pPr marL="0" lvl="0" indent="0" algn="l"/>
             <a:r>
-              <a:rPr lang="en-US" sz="2000" b="1" i="0">
-                <a:solidFill>
-                  <a:srgbClr val="172033"/>
-                </a:solidFill>
-                <a:latin typeface="Aptos"/>
-              </a:rPr>
-              <a:t>Test the contract</a:t>
+              <a:rPr lang="en-US" sz="2000" b="1" i="0" dirty="0">
+                <a:solidFill>
+                  <a:srgbClr val="172033"/>
+                </a:solidFill>
+                <a:latin typeface="Aptos"/>
+              </a:rPr>
+              <a:t>Test</a:t>
             </a:r>
           </a:p>
         </p:txBody>
@@ -6393,39 +6151,6 @@
                 <a:latin typeface="Aptos"/>
               </a:rPr>
               <a:t>✓  Expected residuals = 0</a:t>
-            </a:r>
-          </a:p>
-        </p:txBody>
-      </p:sp>
-      <p:sp>
-        <p:nvSpPr>
-          <p:cNvPr id="10" name="TextBox 40"/>
-          <p:cNvSpPr/>
-          <p:nvPr/>
-        </p:nvSpPr>
-        <p:spPr>
-          <a:xfrm>
-            <a:off x="7680960" y="4617720"/>
-            <a:ext cx="3337560" cy="658368"/>
-          </a:xfrm>
-          <a:noFill/>
-          <a:ln>
-            <a:noFill/>
-          </a:ln>
-        </p:spPr>
-        <p:txBody>
-          <a:bodyPr lIns="73152" tIns="73152" rIns="73152" bIns="73152" anchor="ctr"/>
-          <a:lstStyle/>
-          <a:p>
-            <a:pPr marL="0" lvl="0" indent="0" algn="l"/>
-            <a:r>
-              <a:rPr lang="en-US" b="1" i="0">
-                <a:solidFill>
-                  <a:srgbClr val="172033"/>
-                </a:solidFill>
-                <a:latin typeface="Aptos"/>
-              </a:rPr>
-              <a:t>Fast + deterministic + local</a:t>
             </a:r>
           </a:p>
         </p:txBody>
@@ -6924,44 +6649,6 @@
       </p:sp>
       <p:sp>
         <p:nvSpPr>
-          <p:cNvPr id="5" name="Rect 30">
-            <a:extLst>
-              <a:ext uri="{FF2B5EF4-FFF2-40B4-BE49-F238E27FC236}">
-                <a16:creationId xmlns:a16="http://schemas.microsoft.com/office/drawing/2014/main" id="{6F8D38A2-9D7F-AA18-7346-EE5C8ADBF9A8}"/>
-              </a:ext>
-            </a:extLst>
-          </p:cNvPr>
-          <p:cNvSpPr/>
-          <p:nvPr/>
-        </p:nvSpPr>
-        <p:spPr>
-          <a:xfrm>
-            <a:off x="7406640" y="1600200"/>
-            <a:ext cx="4114800" cy="4343400"/>
-          </a:xfrm>
-          <a:prstGeom prst="roundRect">
-            <a:avLst/>
-          </a:prstGeom>
-          <a:solidFill>
-            <a:srgbClr val="FFFFFF"/>
-          </a:solidFill>
-          <a:ln>
-            <a:solidFill>
-              <a:srgbClr val="D5DDE7"/>
-            </a:solidFill>
-            <a:prstDash val="solid"/>
-          </a:ln>
-        </p:spPr>
-        <p:txBody>
-          <a:bodyPr/>
-          <a:lstStyle/>
-          <a:p>
-            <a:endParaRPr lang="en-US"/>
-          </a:p>
-        </p:txBody>
-      </p:sp>
-      <p:sp>
-        <p:nvSpPr>
           <p:cNvPr id="6" name="TextBox 31">
             <a:extLst>
               <a:ext uri="{FF2B5EF4-FFF2-40B4-BE49-F238E27FC236}">
@@ -6988,13 +6675,13 @@
           <a:p>
             <a:pPr marL="0" lvl="0" indent="0" algn="l"/>
             <a:r>
-              <a:rPr lang="en-US" sz="2000" b="1" i="0">
-                <a:solidFill>
-                  <a:srgbClr val="172033"/>
-                </a:solidFill>
-                <a:latin typeface="Aptos"/>
-              </a:rPr>
-              <a:t>Test the contract</a:t>
+              <a:rPr lang="en-US" sz="2000" b="1" i="0" dirty="0">
+                <a:solidFill>
+                  <a:srgbClr val="172033"/>
+                </a:solidFill>
+                <a:latin typeface="Aptos"/>
+              </a:rPr>
+              <a:t>Test</a:t>
             </a:r>
           </a:p>
         </p:txBody>
@@ -7112,45 +6799,6 @@
                 <a:latin typeface="Aptos"/>
               </a:rPr>
               <a:t>✓  Expected residuals = 0</a:t>
-            </a:r>
-          </a:p>
-        </p:txBody>
-      </p:sp>
-      <p:sp>
-        <p:nvSpPr>
-          <p:cNvPr id="10" name="TextBox 40">
-            <a:extLst>
-              <a:ext uri="{FF2B5EF4-FFF2-40B4-BE49-F238E27FC236}">
-                <a16:creationId xmlns:a16="http://schemas.microsoft.com/office/drawing/2014/main" id="{7B92CD10-D74E-5C63-B6C0-0E8F1058FFA0}"/>
-              </a:ext>
-            </a:extLst>
-          </p:cNvPr>
-          <p:cNvSpPr/>
-          <p:nvPr/>
-        </p:nvSpPr>
-        <p:spPr>
-          <a:xfrm>
-            <a:off x="7680960" y="4617720"/>
-            <a:ext cx="3337560" cy="658368"/>
-          </a:xfrm>
-          <a:noFill/>
-          <a:ln>
-            <a:noFill/>
-          </a:ln>
-        </p:spPr>
-        <p:txBody>
-          <a:bodyPr lIns="73152" tIns="73152" rIns="73152" bIns="73152" anchor="ctr"/>
-          <a:lstStyle/>
-          <a:p>
-            <a:pPr marL="0" lvl="0" indent="0" algn="l"/>
-            <a:r>
-              <a:rPr lang="en-US" b="1" i="0">
-                <a:solidFill>
-                  <a:srgbClr val="172033"/>
-                </a:solidFill>
-                <a:latin typeface="Aptos"/>
-              </a:rPr>
-              <a:t>Fast + deterministic + local</a:t>
             </a:r>
           </a:p>
         </p:txBody>
@@ -7509,7 +7157,7 @@
                 </a:solidFill>
                 <a:latin typeface="Aptos"/>
               </a:rPr>
-              <a:t>function with toy data.</a:t>
+              <a:t>function with test data.</a:t>
             </a:r>
           </a:p>
         </p:txBody>
@@ -7523,7 +7171,7 @@
         <p:spPr>
           <a:xfrm>
             <a:off x="6035040" y="1600200"/>
-            <a:ext cx="4572000" cy="3520440"/>
+            <a:ext cx="5288280" cy="3520440"/>
           </a:xfrm>
           <a:prstGeom prst="roundRect">
             <a:avLst/>
@@ -7652,7 +7300,7 @@
                 </a:solidFill>
                 <a:latin typeface="Aptos"/>
               </a:rPr>
-              <a:t>through the public entry point.</a:t>
+              <a:t>through the entry point.</a:t>
             </a:r>
           </a:p>
         </p:txBody>
@@ -7858,27 +7506,46 @@
           <a:p>
             <a:pPr marL="0" lvl="0" indent="0" algn="l"/>
             <a:r>
-              <a:rPr lang="en-US" sz="3080" b="1" i="0">
-                <a:solidFill>
-                  <a:srgbClr val="172033"/>
-                </a:solidFill>
-                <a:latin typeface="Aptos"/>
-              </a:rPr>
-              <a:t>Let pytest run the suite</a:t>
-            </a:r>
-          </a:p>
-        </p:txBody>
-      </p:sp>
-      <p:sp>
-        <p:nvSpPr>
-          <p:cNvPr id="4" name="Rect 20"/>
-          <p:cNvSpPr/>
-          <p:nvPr/>
-        </p:nvSpPr>
-        <p:spPr>
-          <a:xfrm>
-            <a:off x="594360" y="1600200"/>
-            <a:ext cx="5486400" cy="3611880"/>
+              <a:rPr lang="en-US" sz="3080" b="1" i="0" dirty="0">
+                <a:solidFill>
+                  <a:srgbClr val="172033"/>
+                </a:solidFill>
+                <a:latin typeface="Aptos"/>
+              </a:rPr>
+              <a:t>Let </a:t>
+            </a:r>
+            <a:r>
+              <a:rPr lang="en-US" sz="3080" b="1" i="0" dirty="0" err="1">
+                <a:solidFill>
+                  <a:srgbClr val="172033"/>
+                </a:solidFill>
+                <a:latin typeface="Courier New" panose="02070309020205020404" pitchFamily="49" charset="0"/>
+                <a:cs typeface="Courier New" panose="02070309020205020404" pitchFamily="49" charset="0"/>
+              </a:rPr>
+              <a:t>pytest</a:t>
+            </a:r>
+            <a:r>
+              <a:rPr lang="en-US" sz="3080" b="1" i="0" dirty="0">
+                <a:solidFill>
+                  <a:srgbClr val="172033"/>
+                </a:solidFill>
+                <a:latin typeface="Aptos"/>
+              </a:rPr>
+              <a:t> run the test</a:t>
+            </a:r>
+          </a:p>
+        </p:txBody>
+      </p:sp>
+      <p:sp>
+        <p:nvSpPr>
+          <p:cNvPr id="6" name="Rect 22"/>
+          <p:cNvSpPr/>
+          <p:nvPr/>
+        </p:nvSpPr>
+        <p:spPr>
+          <a:xfrm>
+            <a:off x="868680" y="2423160"/>
+            <a:ext cx="4846320" cy="2194560"/>
           </a:xfrm>
           <a:prstGeom prst="roundRect">
             <a:avLst/>
@@ -7894,71 +7561,6 @@
           </a:ln>
         </p:spPr>
         <p:txBody>
-          <a:bodyPr/>
-          <a:lstStyle/>
-          <a:p>
-            <a:endParaRPr lang="en-US"/>
-          </a:p>
-        </p:txBody>
-      </p:sp>
-      <p:sp>
-        <p:nvSpPr>
-          <p:cNvPr id="5" name="TextBox 21"/>
-          <p:cNvSpPr/>
-          <p:nvPr/>
-        </p:nvSpPr>
-        <p:spPr>
-          <a:xfrm>
-            <a:off x="868680" y="1856231"/>
-            <a:ext cx="4846320" cy="365760"/>
-          </a:xfrm>
-          <a:noFill/>
-          <a:ln>
-            <a:noFill/>
-          </a:ln>
-        </p:spPr>
-        <p:txBody>
-          <a:bodyPr lIns="73152" tIns="73152" rIns="73152" bIns="73152" anchor="ctr"/>
-          <a:lstStyle/>
-          <a:p>
-            <a:pPr marL="0" lvl="0" indent="0" algn="l"/>
-            <a:r>
-              <a:rPr lang="en-US" sz="1102" b="1" i="0">
-                <a:solidFill>
-                  <a:srgbClr val="172033"/>
-                </a:solidFill>
-                <a:latin typeface="Aptos"/>
-              </a:rPr>
-              <a:t>TERMINAL</a:t>
-            </a:r>
-          </a:p>
-        </p:txBody>
-      </p:sp>
-      <p:sp>
-        <p:nvSpPr>
-          <p:cNvPr id="6" name="Rect 22"/>
-          <p:cNvSpPr/>
-          <p:nvPr/>
-        </p:nvSpPr>
-        <p:spPr>
-          <a:xfrm>
-            <a:off x="868680" y="2423160"/>
-            <a:ext cx="4846320" cy="2194560"/>
-          </a:xfrm>
-          <a:prstGeom prst="roundRect">
-            <a:avLst/>
-          </a:prstGeom>
-          <a:solidFill>
-            <a:srgbClr val="FFFFFF"/>
-          </a:solidFill>
-          <a:ln>
-            <a:solidFill>
-              <a:srgbClr val="D5DDE7"/>
-            </a:solidFill>
-            <a:prstDash val="solid"/>
-          </a:ln>
-        </p:spPr>
-        <p:txBody>
           <a:bodyPr lIns="164592" tIns="128016" rIns="164592" bIns="128016"/>
           <a:lstStyle/>
           <a:p>
@@ -8133,71 +7735,6 @@
       </p:sp>
       <p:sp>
         <p:nvSpPr>
-          <p:cNvPr id="7" name="Rect 30"/>
-          <p:cNvSpPr/>
-          <p:nvPr/>
-        </p:nvSpPr>
-        <p:spPr>
-          <a:xfrm>
-            <a:off x="6400800" y="1600200"/>
-            <a:ext cx="4709160" cy="3611880"/>
-          </a:xfrm>
-          <a:prstGeom prst="roundRect">
-            <a:avLst/>
-          </a:prstGeom>
-          <a:solidFill>
-            <a:srgbClr val="FFFFFF"/>
-          </a:solidFill>
-          <a:ln>
-            <a:solidFill>
-              <a:srgbClr val="D5DDE7"/>
-            </a:solidFill>
-            <a:prstDash val="solid"/>
-          </a:ln>
-        </p:spPr>
-        <p:txBody>
-          <a:bodyPr/>
-          <a:lstStyle/>
-          <a:p>
-            <a:endParaRPr lang="en-US"/>
-          </a:p>
-        </p:txBody>
-      </p:sp>
-      <p:sp>
-        <p:nvSpPr>
-          <p:cNvPr id="8" name="TextBox 31"/>
-          <p:cNvSpPr/>
-          <p:nvPr/>
-        </p:nvSpPr>
-        <p:spPr>
-          <a:xfrm>
-            <a:off x="6675120" y="1856231"/>
-            <a:ext cx="4023360" cy="411480"/>
-          </a:xfrm>
-          <a:noFill/>
-          <a:ln>
-            <a:noFill/>
-          </a:ln>
-        </p:spPr>
-        <p:txBody>
-          <a:bodyPr lIns="73152" tIns="73152" rIns="73152" bIns="73152" anchor="ctr"/>
-          <a:lstStyle/>
-          <a:p>
-            <a:pPr marL="0" lvl="0" indent="0" algn="l"/>
-            <a:r>
-              <a:rPr lang="en-US" sz="2000" b="1" i="0">
-                <a:solidFill>
-                  <a:srgbClr val="172033"/>
-                </a:solidFill>
-                <a:latin typeface="Aptos"/>
-              </a:rPr>
-              <a:t>Why this matters</a:t>
-            </a:r>
-          </a:p>
-        </p:txBody>
-      </p:sp>
-      <p:sp>
-        <p:nvSpPr>
           <p:cNvPr id="9" name="TextBox 32"/>
           <p:cNvSpPr/>
           <p:nvPr/>
@@ -8251,13 +7788,31 @@
           <a:p>
             <a:pPr marL="0" lvl="0" indent="0" algn="l"/>
             <a:r>
-              <a:rPr lang="en-US" sz="1600" b="0" i="0">
-                <a:solidFill>
-                  <a:srgbClr val="172033"/>
-                </a:solidFill>
-                <a:latin typeface="Aptos"/>
-              </a:rPr>
-              <a:t>•  Runs the suite consistently</a:t>
+              <a:rPr lang="en-US" sz="1600" b="0" i="0" dirty="0">
+                <a:solidFill>
+                  <a:srgbClr val="172033"/>
+                </a:solidFill>
+                <a:latin typeface="Aptos"/>
+              </a:rPr>
+              <a:t>•  Runs </a:t>
+            </a:r>
+            <a:r>
+              <a:rPr lang="en-US" sz="1600" dirty="0">
+                <a:solidFill>
+                  <a:srgbClr val="172033"/>
+                </a:solidFill>
+                <a:latin typeface="Aptos"/>
+              </a:rPr>
+              <a:t>all tests </a:t>
+            </a:r>
+            <a:r>
+              <a:rPr lang="en-US" sz="1600" b="0" i="0" dirty="0">
+                <a:solidFill>
+                  <a:srgbClr val="172033"/>
+                </a:solidFill>
+                <a:latin typeface="Aptos"/>
+              </a:rPr>
+              <a:t>consistently</a:t>
             </a:r>
           </a:p>
         </p:txBody>
@@ -8678,38 +8233,6 @@
       </p:sp>
       <p:sp>
         <p:nvSpPr>
-          <p:cNvPr id="8" name="Rect 30"/>
-          <p:cNvSpPr/>
-          <p:nvPr/>
-        </p:nvSpPr>
-        <p:spPr>
-          <a:xfrm>
-            <a:off x="5897880" y="1645920"/>
-            <a:ext cx="4937760" cy="3566160"/>
-          </a:xfrm>
-          <a:prstGeom prst="roundRect">
-            <a:avLst/>
-          </a:prstGeom>
-          <a:solidFill>
-            <a:srgbClr val="FFFFFF"/>
-          </a:solidFill>
-          <a:ln>
-            <a:solidFill>
-              <a:srgbClr val="D5DDE7"/>
-            </a:solidFill>
-            <a:prstDash val="solid"/>
-          </a:ln>
-        </p:spPr>
-        <p:txBody>
-          <a:bodyPr/>
-          <a:lstStyle/>
-          <a:p>
-            <a:endParaRPr lang="en-US"/>
-          </a:p>
-        </p:txBody>
-      </p:sp>
-      <p:sp>
-        <p:nvSpPr>
           <p:cNvPr id="9" name="TextBox 31"/>
           <p:cNvSpPr/>
           <p:nvPr/>
@@ -8743,64 +8266,6 @@
       </p:sp>
       <p:sp>
         <p:nvSpPr>
-          <p:cNvPr id="10" name="Rect 32"/>
-          <p:cNvSpPr/>
-          <p:nvPr/>
-        </p:nvSpPr>
-        <p:spPr>
-          <a:xfrm>
-            <a:off x="6217920" y="2697480"/>
-            <a:ext cx="3749039" cy="347472"/>
-          </a:xfrm>
-          <a:prstGeom prst="roundRect">
-            <a:avLst/>
-          </a:prstGeom>
-          <a:solidFill>
-            <a:srgbClr val="FFFFFF"/>
-          </a:solidFill>
-          <a:ln>
-            <a:noFill/>
-          </a:ln>
-        </p:spPr>
-        <p:txBody>
-          <a:bodyPr/>
-          <a:lstStyle/>
-          <a:p>
-            <a:endParaRPr lang="en-US"/>
-          </a:p>
-        </p:txBody>
-      </p:sp>
-      <p:sp>
-        <p:nvSpPr>
-          <p:cNvPr id="11" name="Rect 33"/>
-          <p:cNvSpPr/>
-          <p:nvPr/>
-        </p:nvSpPr>
-        <p:spPr>
-          <a:xfrm>
-            <a:off x="6217920" y="2697480"/>
-            <a:ext cx="3374136" cy="347472"/>
-          </a:xfrm>
-          <a:prstGeom prst="roundRect">
-            <a:avLst/>
-          </a:prstGeom>
-          <a:solidFill>
-            <a:srgbClr val="FFFFFF"/>
-          </a:solidFill>
-          <a:ln>
-            <a:noFill/>
-          </a:ln>
-        </p:spPr>
-        <p:txBody>
-          <a:bodyPr/>
-          <a:lstStyle/>
-          <a:p>
-            <a:endParaRPr lang="en-US"/>
-          </a:p>
-        </p:txBody>
-      </p:sp>
-      <p:sp>
-        <p:nvSpPr>
           <p:cNvPr id="12" name="TextBox 34"/>
           <p:cNvSpPr/>
           <p:nvPr/>
@@ -8821,7 +8286,7 @@
           <a:p>
             <a:pPr marL="0" lvl="0" indent="0" algn="l"/>
             <a:r>
-              <a:rPr lang="en-US" sz="2508" b="1" i="0">
+              <a:rPr lang="en-US" sz="2508" b="1" i="0" dirty="0">
                 <a:solidFill>
                   <a:srgbClr val="172033"/>
                 </a:solidFill>
@@ -9058,15 +8523,12 @@
           <a:lstStyle/>
           <a:p>
             <a:pPr marL="0" lvl="0" indent="0" algn="l"/>
-            <a:r>
-              <a:rPr lang="en-US" sz="1050" b="1" i="0">
-                <a:solidFill>
-                  <a:srgbClr val="172033"/>
-                </a:solidFill>
-                <a:latin typeface="Aptos"/>
-              </a:rPr>
-              <a:t>THREE WORKABLE LAYOUTS</a:t>
-            </a:r>
+            <a:endParaRPr lang="en-US" sz="1050" b="1" i="0" dirty="0">
+              <a:solidFill>
+                <a:srgbClr val="172033"/>
+              </a:solidFill>
+              <a:latin typeface="Aptos"/>
+            </a:endParaRPr>
           </a:p>
         </p:txBody>
       </p:sp>
@@ -9105,14 +8567,47 @@
       </p:sp>
       <p:sp>
         <p:nvSpPr>
-          <p:cNvPr id="4" name="Rect 20"/>
-          <p:cNvSpPr/>
-          <p:nvPr/>
-        </p:nvSpPr>
-        <p:spPr>
-          <a:xfrm>
-            <a:off x="594360" y="1691640"/>
-            <a:ext cx="3364992" cy="3840480"/>
+          <p:cNvPr id="5" name="TextBox 30"/>
+          <p:cNvSpPr/>
+          <p:nvPr/>
+        </p:nvSpPr>
+        <p:spPr>
+          <a:xfrm>
+            <a:off x="832104" y="1938528"/>
+            <a:ext cx="2880360" cy="438912"/>
+          </a:xfrm>
+          <a:noFill/>
+          <a:ln>
+            <a:noFill/>
+          </a:ln>
+        </p:spPr>
+        <p:txBody>
+          <a:bodyPr lIns="73152" tIns="73152" rIns="73152" bIns="73152" anchor="ctr"/>
+          <a:lstStyle/>
+          <a:p>
+            <a:pPr marL="0" lvl="0" indent="0" algn="l"/>
+            <a:r>
+              <a:rPr lang="en-US" sz="1650" b="1" i="0">
+                <a:solidFill>
+                  <a:srgbClr val="172033"/>
+                </a:solidFill>
+                <a:latin typeface="Aptos"/>
+              </a:rPr>
+              <a:t>Separate directory</a:t>
+            </a:r>
+          </a:p>
+        </p:txBody>
+      </p:sp>
+      <p:sp>
+        <p:nvSpPr>
+          <p:cNvPr id="6" name="Rect 40"/>
+          <p:cNvSpPr/>
+          <p:nvPr/>
+        </p:nvSpPr>
+        <p:spPr>
+          <a:xfrm>
+            <a:off x="832104" y="2633472"/>
+            <a:ext cx="2889504" cy="1920240"/>
           </a:xfrm>
           <a:prstGeom prst="roundRect">
             <a:avLst/>
@@ -9128,22 +8623,67 @@
           </a:ln>
         </p:spPr>
         <p:txBody>
-          <a:bodyPr/>
-          <a:lstStyle/>
-          <a:p>
-            <a:endParaRPr lang="en-US"/>
-          </a:p>
-        </p:txBody>
-      </p:sp>
-      <p:sp>
-        <p:nvSpPr>
-          <p:cNvPr id="5" name="TextBox 30"/>
-          <p:cNvSpPr/>
-          <p:nvPr/>
-        </p:nvSpPr>
-        <p:spPr>
-          <a:xfrm>
-            <a:off x="832104" y="1938528"/>
+          <a:bodyPr lIns="164592" tIns="128016" rIns="164592" bIns="128016"/>
+          <a:lstStyle/>
+          <a:p>
+            <a:pPr marL="0" lvl="0" indent="0" algn="l"/>
+            <a:r>
+              <a:rPr lang="en-US" sz="1155" b="0" i="0">
+                <a:solidFill>
+                  <a:srgbClr val="172033"/>
+                </a:solidFill>
+                <a:latin typeface="Courier New"/>
+              </a:rPr>
+              <a:t>my_ols/</a:t>
+            </a:r>
+          </a:p>
+          <a:p>
+            <a:pPr marL="0" lvl="0" indent="0" algn="l"/>
+            <a:r>
+              <a:rPr lang="en-US" sz="1155" b="0" i="0">
+                <a:solidFill>
+                  <a:srgbClr val="172033"/>
+                </a:solidFill>
+                <a:latin typeface="Courier New"/>
+              </a:rPr>
+              <a:t>  main.py</a:t>
+            </a:r>
+          </a:p>
+          <a:p>
+            <a:pPr marL="0" lvl="0" indent="0" algn="l"/>
+            <a:r>
+              <a:rPr lang="en-US" sz="1155" b="0" i="0">
+                <a:solidFill>
+                  <a:srgbClr val="172033"/>
+                </a:solidFill>
+                <a:latin typeface="Courier New"/>
+              </a:rPr>
+              <a:t>tests/</a:t>
+            </a:r>
+          </a:p>
+          <a:p>
+            <a:pPr marL="0" lvl="0" indent="0" algn="l"/>
+            <a:r>
+              <a:rPr lang="en-US" sz="1155" b="0" i="0">
+                <a:solidFill>
+                  <a:srgbClr val="172033"/>
+                </a:solidFill>
+                <a:latin typeface="Courier New"/>
+              </a:rPr>
+              <a:t>  test_ols.py</a:t>
+            </a:r>
+          </a:p>
+        </p:txBody>
+      </p:sp>
+      <p:sp>
+        <p:nvSpPr>
+          <p:cNvPr id="8" name="TextBox 31"/>
+          <p:cNvSpPr/>
+          <p:nvPr/>
+        </p:nvSpPr>
+        <p:spPr>
+          <a:xfrm>
+            <a:off x="4599432" y="1938528"/>
             <a:ext cx="2880360" cy="438912"/>
           </a:xfrm>
           <a:noFill/>
@@ -9163,20 +8703,20 @@
                 </a:solidFill>
                 <a:latin typeface="Aptos"/>
               </a:rPr>
-              <a:t>Separate directory</a:t>
-            </a:r>
-          </a:p>
-        </p:txBody>
-      </p:sp>
-      <p:sp>
-        <p:nvSpPr>
-          <p:cNvPr id="6" name="Rect 40"/>
-          <p:cNvSpPr/>
-          <p:nvPr/>
-        </p:nvSpPr>
-        <p:spPr>
-          <a:xfrm>
-            <a:off x="832104" y="2633472"/>
+              <a:t>Same directory</a:t>
+            </a:r>
+          </a:p>
+        </p:txBody>
+      </p:sp>
+      <p:sp>
+        <p:nvSpPr>
+          <p:cNvPr id="9" name="Rect 41"/>
+          <p:cNvSpPr/>
+          <p:nvPr/>
+        </p:nvSpPr>
+        <p:spPr>
+          <a:xfrm>
+            <a:off x="4599432" y="2633472"/>
             <a:ext cx="2889504" cy="1920240"/>
           </a:xfrm>
           <a:prstGeom prst="roundRect">
@@ -9228,182 +8768,8 @@
                 </a:solidFill>
                 <a:latin typeface="Courier New"/>
               </a:rPr>
-              <a:t>tests/</a:t>
-            </a:r>
-          </a:p>
-          <a:p>
-            <a:pPr marL="0" lvl="0" indent="0" algn="l"/>
-            <a:r>
-              <a:rPr lang="en-US" sz="1155" b="0" i="0">
-                <a:solidFill>
-                  <a:srgbClr val="172033"/>
-                </a:solidFill>
-                <a:latin typeface="Courier New"/>
-              </a:rPr>
               <a:t>  test_ols.py</a:t>
             </a:r>
-          </a:p>
-        </p:txBody>
-      </p:sp>
-      <p:sp>
-        <p:nvSpPr>
-          <p:cNvPr id="7" name="Rect 21"/>
-          <p:cNvSpPr/>
-          <p:nvPr/>
-        </p:nvSpPr>
-        <p:spPr>
-          <a:xfrm>
-            <a:off x="4361688" y="1691640"/>
-            <a:ext cx="3364992" cy="3840480"/>
-          </a:xfrm>
-          <a:prstGeom prst="roundRect">
-            <a:avLst/>
-          </a:prstGeom>
-          <a:solidFill>
-            <a:srgbClr val="FFFFFF"/>
-          </a:solidFill>
-          <a:ln>
-            <a:solidFill>
-              <a:srgbClr val="D5DDE7"/>
-            </a:solidFill>
-            <a:prstDash val="solid"/>
-          </a:ln>
-        </p:spPr>
-        <p:txBody>
-          <a:bodyPr/>
-          <a:lstStyle/>
-          <a:p>
-            <a:endParaRPr lang="en-US"/>
-          </a:p>
-        </p:txBody>
-      </p:sp>
-      <p:sp>
-        <p:nvSpPr>
-          <p:cNvPr id="8" name="TextBox 31"/>
-          <p:cNvSpPr/>
-          <p:nvPr/>
-        </p:nvSpPr>
-        <p:spPr>
-          <a:xfrm>
-            <a:off x="4599432" y="1938528"/>
-            <a:ext cx="2880360" cy="438912"/>
-          </a:xfrm>
-          <a:noFill/>
-          <a:ln>
-            <a:noFill/>
-          </a:ln>
-        </p:spPr>
-        <p:txBody>
-          <a:bodyPr lIns="73152" tIns="73152" rIns="73152" bIns="73152" anchor="ctr"/>
-          <a:lstStyle/>
-          <a:p>
-            <a:pPr marL="0" lvl="0" indent="0" algn="l"/>
-            <a:r>
-              <a:rPr lang="en-US" sz="1650" b="1" i="0">
-                <a:solidFill>
-                  <a:srgbClr val="172033"/>
-                </a:solidFill>
-                <a:latin typeface="Aptos"/>
-              </a:rPr>
-              <a:t>Same directory</a:t>
-            </a:r>
-          </a:p>
-        </p:txBody>
-      </p:sp>
-      <p:sp>
-        <p:nvSpPr>
-          <p:cNvPr id="9" name="Rect 41"/>
-          <p:cNvSpPr/>
-          <p:nvPr/>
-        </p:nvSpPr>
-        <p:spPr>
-          <a:xfrm>
-            <a:off x="4599432" y="2633472"/>
-            <a:ext cx="2889504" cy="1920240"/>
-          </a:xfrm>
-          <a:prstGeom prst="roundRect">
-            <a:avLst/>
-          </a:prstGeom>
-          <a:solidFill>
-            <a:srgbClr val="FFFFFF"/>
-          </a:solidFill>
-          <a:ln>
-            <a:solidFill>
-              <a:srgbClr val="D5DDE7"/>
-            </a:solidFill>
-            <a:prstDash val="solid"/>
-          </a:ln>
-        </p:spPr>
-        <p:txBody>
-          <a:bodyPr lIns="164592" tIns="128016" rIns="164592" bIns="128016"/>
-          <a:lstStyle/>
-          <a:p>
-            <a:pPr marL="0" lvl="0" indent="0" algn="l"/>
-            <a:r>
-              <a:rPr lang="en-US" sz="1155" b="0" i="0">
-                <a:solidFill>
-                  <a:srgbClr val="172033"/>
-                </a:solidFill>
-                <a:latin typeface="Courier New"/>
-              </a:rPr>
-              <a:t>my_ols/</a:t>
-            </a:r>
-          </a:p>
-          <a:p>
-            <a:pPr marL="0" lvl="0" indent="0" algn="l"/>
-            <a:r>
-              <a:rPr lang="en-US" sz="1155" b="0" i="0">
-                <a:solidFill>
-                  <a:srgbClr val="172033"/>
-                </a:solidFill>
-                <a:latin typeface="Courier New"/>
-              </a:rPr>
-              <a:t>  main.py</a:t>
-            </a:r>
-          </a:p>
-          <a:p>
-            <a:pPr marL="0" lvl="0" indent="0" algn="l"/>
-            <a:r>
-              <a:rPr lang="en-US" sz="1155" b="0" i="0">
-                <a:solidFill>
-                  <a:srgbClr val="172033"/>
-                </a:solidFill>
-                <a:latin typeface="Courier New"/>
-              </a:rPr>
-              <a:t>  test_ols.py</a:t>
-            </a:r>
-          </a:p>
-        </p:txBody>
-      </p:sp>
-      <p:sp>
-        <p:nvSpPr>
-          <p:cNvPr id="10" name="Rect 22"/>
-          <p:cNvSpPr/>
-          <p:nvPr/>
-        </p:nvSpPr>
-        <p:spPr>
-          <a:xfrm>
-            <a:off x="8129016" y="1691640"/>
-            <a:ext cx="3364992" cy="3840480"/>
-          </a:xfrm>
-          <a:prstGeom prst="roundRect">
-            <a:avLst/>
-          </a:prstGeom>
-          <a:solidFill>
-            <a:srgbClr val="FFFFFF"/>
-          </a:solidFill>
-          <a:ln>
-            <a:solidFill>
-              <a:srgbClr val="D5DDE7"/>
-            </a:solidFill>
-            <a:prstDash val="solid"/>
-          </a:ln>
-        </p:spPr>
-        <p:txBody>
-          <a:bodyPr/>
-          <a:lstStyle/>
-          <a:p>
-            <a:endParaRPr lang="en-US"/>
           </a:p>
         </p:txBody>
       </p:sp>
@@ -10083,7 +9449,7 @@
                 </a:solidFill>
                 <a:latin typeface="Aptos"/>
               </a:rPr>
-              <a:t>Keep smoke tests for releases</a:t>
+              <a:t>Add smoke tests for releases</a:t>
             </a:r>
           </a:p>
           <a:p>
@@ -10456,43 +9822,115 @@
           <a:p>
             <a:pPr marL="0" lvl="0" indent="0" algn="l"/>
             <a:r>
-              <a:rPr lang="en-US" sz="1342" b="0" i="0">
-                <a:solidFill>
-                  <a:srgbClr val="172033"/>
-                </a:solidFill>
-                <a:latin typeface="Courier New"/>
-              </a:rPr>
-              <a:t>def load_parameters():</a:t>
-            </a:r>
-          </a:p>
-          <a:p>
-            <a:pPr marL="0" lvl="0" indent="0" algn="l"/>
-            <a:r>
-              <a:rPr lang="en-US" sz="1342" b="0" i="0">
-                <a:solidFill>
-                  <a:srgbClr val="172033"/>
-                </a:solidFill>
-                <a:latin typeface="Courier New"/>
-              </a:rPr>
-              <a:t>    resp = requests.get('https://www.config.org/parameters.txt')</a:t>
-            </a:r>
-          </a:p>
-          <a:p>
-            <a:pPr marL="0" lvl="0" indent="0" algn="l"/>
-            <a:r>
-              <a:rPr lang="en-US" sz="1342" b="0" i="0">
-                <a:solidFill>
-                  <a:srgbClr val="172033"/>
-                </a:solidFill>
-                <a:latin typeface="Courier New"/>
-              </a:rPr>
-              <a:t>    config = resp.text.split('\n')</a:t>
-            </a:r>
-          </a:p>
-          <a:p>
-            <a:pPr marL="0" lvl="0" indent="0" algn="l"/>
-            <a:r>
-              <a:rPr lang="en-US" sz="1342" b="0" i="0">
+              <a:rPr lang="en-US" sz="1342" b="0" i="0" dirty="0">
+                <a:solidFill>
+                  <a:srgbClr val="172033"/>
+                </a:solidFill>
+                <a:latin typeface="Courier New"/>
+              </a:rPr>
+              <a:t>def </a:t>
+            </a:r>
+            <a:r>
+              <a:rPr lang="en-US" sz="1342" b="0" i="0" dirty="0" err="1">
+                <a:solidFill>
+                  <a:srgbClr val="172033"/>
+                </a:solidFill>
+                <a:latin typeface="Courier New"/>
+              </a:rPr>
+              <a:t>load_parameters</a:t>
+            </a:r>
+            <a:r>
+              <a:rPr lang="en-US" sz="1342" b="0" i="0" dirty="0">
+                <a:solidFill>
+                  <a:srgbClr val="172033"/>
+                </a:solidFill>
+                <a:latin typeface="Courier New"/>
+              </a:rPr>
+              <a:t>():</a:t>
+            </a:r>
+          </a:p>
+          <a:p>
+            <a:pPr marL="0" lvl="0" indent="0" algn="l"/>
+            <a:r>
+              <a:rPr lang="en-US" sz="1342" b="0" i="0" dirty="0">
+                <a:solidFill>
+                  <a:srgbClr val="172033"/>
+                </a:solidFill>
+                <a:latin typeface="Courier New"/>
+              </a:rPr>
+              <a:t>    resp = 	</a:t>
+            </a:r>
+            <a:r>
+              <a:rPr lang="en-US" sz="1342" b="0" i="0" dirty="0" err="1">
+                <a:solidFill>
+                  <a:srgbClr val="172033"/>
+                </a:solidFill>
+                <a:latin typeface="Courier New"/>
+              </a:rPr>
+              <a:t>requests.get</a:t>
+            </a:r>
+            <a:r>
+              <a:rPr lang="en-US" sz="1342" b="0" i="0" dirty="0">
+                <a:solidFill>
+                  <a:srgbClr val="172033"/>
+                </a:solidFill>
+                <a:latin typeface="Courier New"/>
+              </a:rPr>
+              <a:t>('https://</a:t>
+            </a:r>
+            <a:r>
+              <a:rPr lang="en-US" sz="1342" b="0" i="0" dirty="0" err="1">
+                <a:solidFill>
+                  <a:srgbClr val="172033"/>
+                </a:solidFill>
+                <a:latin typeface="Courier New"/>
+              </a:rPr>
+              <a:t>www.config.org</a:t>
+            </a:r>
+            <a:r>
+              <a:rPr lang="en-US" sz="1342" b="0" i="0" dirty="0">
+                <a:solidFill>
+                  <a:srgbClr val="172033"/>
+                </a:solidFill>
+                <a:latin typeface="Courier New"/>
+              </a:rPr>
+              <a:t>/parameters.	txt')</a:t>
+            </a:r>
+          </a:p>
+          <a:p>
+            <a:pPr marL="0" lvl="0" indent="0" algn="l"/>
+            <a:r>
+              <a:rPr lang="en-US" sz="1342" b="0" i="0" dirty="0">
+                <a:solidFill>
+                  <a:srgbClr val="172033"/>
+                </a:solidFill>
+                <a:latin typeface="Courier New"/>
+              </a:rPr>
+              <a:t>    config = </a:t>
+            </a:r>
+            <a:r>
+              <a:rPr lang="en-US" sz="1342" b="0" i="0" dirty="0" err="1">
+                <a:solidFill>
+                  <a:srgbClr val="172033"/>
+                </a:solidFill>
+                <a:latin typeface="Courier New"/>
+              </a:rPr>
+              <a:t>resp.text.split</a:t>
+            </a:r>
+            <a:r>
+              <a:rPr lang="en-US" sz="1342" b="0" i="0" dirty="0">
+                <a:solidFill>
+                  <a:srgbClr val="172033"/>
+                </a:solidFill>
+                <a:latin typeface="Courier New"/>
+              </a:rPr>
+              <a:t>('\n')</a:t>
+            </a:r>
+          </a:p>
+          <a:p>
+            <a:pPr marL="0" lvl="0" indent="0" algn="l"/>
+            <a:r>
+              <a:rPr lang="en-US" sz="1342" b="0" i="0" dirty="0">
                 <a:solidFill>
                   <a:srgbClr val="172033"/>
                 </a:solidFill>
@@ -10503,7 +9941,7 @@
           </a:p>
           <a:p>
             <a:pPr marL="0" lvl="0" indent="0" algn="l"/>
-            <a:endParaRPr lang="en-US" sz="1342" b="0" i="0">
+            <a:endParaRPr lang="en-US" sz="1342" b="0" i="0" dirty="0">
               <a:solidFill>
                 <a:srgbClr val="172033"/>
               </a:solidFill>
@@ -10513,31 +9951,67 @@
           <a:p>
             <a:pPr marL="0" lvl="0" indent="0" algn="l"/>
             <a:r>
-              <a:rPr lang="en-US" sz="1342" b="0" i="0">
-                <a:solidFill>
-                  <a:srgbClr val="172033"/>
-                </a:solidFill>
-                <a:latin typeface="Courier New"/>
-              </a:rPr>
-              <a:t>def run_preprocessing(data):</a:t>
-            </a:r>
-          </a:p>
-          <a:p>
-            <a:pPr marL="0" lvl="0" indent="0" algn="l"/>
-            <a:r>
-              <a:rPr lang="en-US" sz="1342" b="0" i="0">
-                <a:solidFill>
-                  <a:srgbClr val="172033"/>
-                </a:solidFill>
-                <a:latin typeface="Courier New"/>
-              </a:rPr>
-              <a:t>    p1, p2, p3 = load_parameters()</a:t>
-            </a:r>
-          </a:p>
-          <a:p>
-            <a:pPr marL="0" lvl="0" indent="0" algn="l"/>
-            <a:r>
-              <a:rPr lang="en-US" sz="1342" b="0" i="0">
+              <a:rPr lang="en-US" sz="1342" b="0" i="0" dirty="0">
+                <a:solidFill>
+                  <a:srgbClr val="172033"/>
+                </a:solidFill>
+                <a:latin typeface="Courier New"/>
+              </a:rPr>
+              <a:t>def </a:t>
+            </a:r>
+            <a:r>
+              <a:rPr lang="en-US" sz="1342" b="0" i="0" dirty="0" err="1">
+                <a:solidFill>
+                  <a:srgbClr val="172033"/>
+                </a:solidFill>
+                <a:latin typeface="Courier New"/>
+              </a:rPr>
+              <a:t>run_preprocessing</a:t>
+            </a:r>
+            <a:r>
+              <a:rPr lang="en-US" sz="1342" b="0" i="0" dirty="0">
+                <a:solidFill>
+                  <a:srgbClr val="172033"/>
+                </a:solidFill>
+                <a:latin typeface="Courier New"/>
+              </a:rPr>
+              <a:t>(data):</a:t>
+            </a:r>
+          </a:p>
+          <a:p>
+            <a:pPr marL="0" lvl="0" indent="0" algn="l"/>
+            <a:r>
+              <a:rPr lang="en-US" sz="1342" b="0" i="0" dirty="0">
+                <a:solidFill>
+                  <a:srgbClr val="172033"/>
+                </a:solidFill>
+                <a:latin typeface="Courier New"/>
+              </a:rPr>
+              <a:t>    p1, p2, p3 = </a:t>
+            </a:r>
+            <a:r>
+              <a:rPr lang="en-US" sz="1342" b="0" i="0" dirty="0" err="1">
+                <a:solidFill>
+                  <a:srgbClr val="172033"/>
+                </a:solidFill>
+                <a:latin typeface="Courier New"/>
+              </a:rPr>
+              <a:t>load_parameters</a:t>
+            </a:r>
+            <a:r>
+              <a:rPr lang="en-US" sz="1342" b="0" i="0" dirty="0">
+                <a:solidFill>
+                  <a:srgbClr val="172033"/>
+                </a:solidFill>
+                <a:latin typeface="Courier New"/>
+              </a:rPr>
+              <a:t>()</a:t>
+            </a:r>
+          </a:p>
+          <a:p>
+            <a:pPr marL="0" lvl="0" indent="0" algn="l"/>
+            <a:r>
+              <a:rPr lang="en-US" sz="1342" b="0" i="0" dirty="0">
                 <a:solidFill>
                   <a:srgbClr val="172033"/>
                 </a:solidFill>
@@ -10545,40 +10019,6 @@
               </a:rPr>
               <a:t>    return data * p1 * p2 / p3</a:t>
             </a:r>
-          </a:p>
-        </p:txBody>
-      </p:sp>
-      <p:sp>
-        <p:nvSpPr>
-          <p:cNvPr id="5" name="Rect 30"/>
-          <p:cNvSpPr/>
-          <p:nvPr/>
-        </p:nvSpPr>
-        <p:spPr>
-          <a:xfrm>
-            <a:off x="7479792" y="1600200"/>
-            <a:ext cx="3977639" cy="1143000"/>
-          </a:xfrm>
-          <a:prstGeom prst="roundRect">
-            <a:avLst/>
-          </a:prstGeom>
-          <a:solidFill>
-            <a:srgbClr val="FFFFFF"/>
-          </a:solidFill>
-          <a:ln>
-            <a:solidFill>
-              <a:schemeClr val="bg2">
-                <a:lumMod val="90000"/>
-              </a:schemeClr>
-            </a:solidFill>
-            <a:prstDash val="solid"/>
-          </a:ln>
-        </p:spPr>
-        <p:txBody>
-          <a:bodyPr/>
-          <a:lstStyle/>
-          <a:p>
-            <a:endParaRPr lang="en-US"/>
           </a:p>
         </p:txBody>
       </p:sp>
@@ -10650,46 +10090,14 @@
       </p:sp>
       <p:sp>
         <p:nvSpPr>
-          <p:cNvPr id="8" name="Rect 33"/>
-          <p:cNvSpPr/>
-          <p:nvPr/>
-        </p:nvSpPr>
-        <p:spPr>
-          <a:xfrm>
-            <a:off x="7479792" y="2971800"/>
-            <a:ext cx="3977639" cy="1847088"/>
-          </a:xfrm>
-          <a:prstGeom prst="roundRect">
-            <a:avLst/>
-          </a:prstGeom>
-          <a:solidFill>
-            <a:srgbClr val="FFFFFF"/>
-          </a:solidFill>
-          <a:ln>
-            <a:solidFill>
-              <a:srgbClr val="D5DDE7"/>
-            </a:solidFill>
-            <a:prstDash val="solid"/>
-          </a:ln>
-        </p:spPr>
-        <p:txBody>
-          <a:bodyPr/>
-          <a:lstStyle/>
-          <a:p>
-            <a:endParaRPr lang="en-US" sz="2400"/>
-          </a:p>
-        </p:txBody>
-      </p:sp>
-      <p:sp>
-        <p:nvSpPr>
-          <p:cNvPr id="9" name="TextBox 34"/>
-          <p:cNvSpPr/>
-          <p:nvPr/>
-        </p:nvSpPr>
-        <p:spPr>
-          <a:xfrm>
-            <a:off x="7754112" y="3227832"/>
-            <a:ext cx="3429000" cy="365760"/>
+          <p:cNvPr id="10" name="TextBox 35"/>
+          <p:cNvSpPr/>
+          <p:nvPr/>
+        </p:nvSpPr>
+        <p:spPr>
+          <a:xfrm>
+            <a:off x="7754112" y="3785615"/>
+            <a:ext cx="3538728" cy="731520"/>
           </a:xfrm>
           <a:noFill/>
           <a:ln>
@@ -10702,58 +10110,13 @@
           <a:p>
             <a:pPr marL="0" lvl="0" indent="0" algn="l"/>
             <a:r>
-              <a:rPr lang="en-US" b="1" i="0">
-                <a:solidFill>
-                  <a:srgbClr val="172033"/>
-                </a:solidFill>
-                <a:latin typeface="Aptos"/>
-              </a:rPr>
-              <a:t>Better boundary</a:t>
-            </a:r>
-          </a:p>
-        </p:txBody>
-      </p:sp>
-      <p:sp>
-        <p:nvSpPr>
-          <p:cNvPr id="10" name="TextBox 35"/>
-          <p:cNvSpPr/>
-          <p:nvPr/>
-        </p:nvSpPr>
-        <p:spPr>
-          <a:xfrm>
-            <a:off x="7754112" y="3785615"/>
-            <a:ext cx="3246120" cy="731520"/>
-          </a:xfrm>
-          <a:noFill/>
-          <a:ln>
-            <a:noFill/>
-          </a:ln>
-        </p:spPr>
-        <p:txBody>
-          <a:bodyPr lIns="73152" tIns="73152" rIns="73152" bIns="73152" anchor="ctr"/>
-          <a:lstStyle/>
-          <a:p>
-            <a:pPr marL="0" lvl="0" indent="0" algn="l"/>
-            <a:r>
-              <a:rPr lang="en-US" b="1" i="0">
-                <a:solidFill>
-                  <a:srgbClr val="172033"/>
-                </a:solidFill>
-                <a:latin typeface="Aptos"/>
-              </a:rPr>
-              <a:t>Pass p1, p2, p3</a:t>
-            </a:r>
-          </a:p>
-          <a:p>
-            <a:pPr marL="0" lvl="0" indent="0" algn="l"/>
-            <a:r>
-              <a:rPr lang="en-US" b="1" i="0">
-                <a:solidFill>
-                  <a:srgbClr val="172033"/>
-                </a:solidFill>
-                <a:latin typeface="Aptos"/>
-              </a:rPr>
-              <a:t>into the function.</a:t>
+              <a:rPr lang="en-US" b="1" i="0" dirty="0">
+                <a:solidFill>
+                  <a:srgbClr val="172033"/>
+                </a:solidFill>
+                <a:latin typeface="Aptos"/>
+              </a:rPr>
+              <a:t>Pass p1, p2, p3 to the function.</a:t>
             </a:r>
           </a:p>
         </p:txBody>
@@ -11105,38 +10468,6 @@
       </p:sp>
       <p:sp>
         <p:nvSpPr>
-          <p:cNvPr id="5" name="Rect 30"/>
-          <p:cNvSpPr/>
-          <p:nvPr/>
-        </p:nvSpPr>
-        <p:spPr>
-          <a:xfrm>
-            <a:off x="8229600" y="1600200"/>
-            <a:ext cx="3246120" cy="4251960"/>
-          </a:xfrm>
-          <a:prstGeom prst="roundRect">
-            <a:avLst/>
-          </a:prstGeom>
-          <a:solidFill>
-            <a:srgbClr val="FFFFFF"/>
-          </a:solidFill>
-          <a:ln>
-            <a:solidFill>
-              <a:srgbClr val="D5DDE7"/>
-            </a:solidFill>
-            <a:prstDash val="solid"/>
-          </a:ln>
-        </p:spPr>
-        <p:txBody>
-          <a:bodyPr/>
-          <a:lstStyle/>
-          <a:p>
-            <a:endParaRPr lang="en-US"/>
-          </a:p>
-        </p:txBody>
-      </p:sp>
-      <p:sp>
-        <p:nvSpPr>
           <p:cNvPr id="6" name="TextBox 31"/>
           <p:cNvSpPr/>
           <p:nvPr/>
@@ -11573,71 +10904,6 @@
       </p:sp>
       <p:sp>
         <p:nvSpPr>
-          <p:cNvPr id="5" name="Rect 30"/>
-          <p:cNvSpPr/>
-          <p:nvPr/>
-        </p:nvSpPr>
-        <p:spPr>
-          <a:xfrm>
-            <a:off x="7635240" y="1600200"/>
-            <a:ext cx="3840480" cy="1828800"/>
-          </a:xfrm>
-          <a:prstGeom prst="roundRect">
-            <a:avLst/>
-          </a:prstGeom>
-          <a:solidFill>
-            <a:srgbClr val="FFFFFF"/>
-          </a:solidFill>
-          <a:ln>
-            <a:solidFill>
-              <a:srgbClr val="D5DDE7"/>
-            </a:solidFill>
-            <a:prstDash val="solid"/>
-          </a:ln>
-        </p:spPr>
-        <p:txBody>
-          <a:bodyPr/>
-          <a:lstStyle/>
-          <a:p>
-            <a:endParaRPr lang="en-US"/>
-          </a:p>
-        </p:txBody>
-      </p:sp>
-      <p:sp>
-        <p:nvSpPr>
-          <p:cNvPr id="6" name="TextBox 31"/>
-          <p:cNvSpPr/>
-          <p:nvPr/>
-        </p:nvSpPr>
-        <p:spPr>
-          <a:xfrm>
-            <a:off x="7909560" y="1874519"/>
-            <a:ext cx="3200400" cy="384048"/>
-          </a:xfrm>
-          <a:noFill/>
-          <a:ln>
-            <a:noFill/>
-          </a:ln>
-        </p:spPr>
-        <p:txBody>
-          <a:bodyPr lIns="73152" tIns="73152" rIns="73152" bIns="73152" anchor="ctr"/>
-          <a:lstStyle/>
-          <a:p>
-            <a:pPr marL="0" lvl="0" indent="0" algn="l"/>
-            <a:r>
-              <a:rPr lang="en-US" sz="1485" b="1" i="0">
-                <a:solidFill>
-                  <a:srgbClr val="172033"/>
-                </a:solidFill>
-                <a:latin typeface="Aptos"/>
-              </a:rPr>
-              <a:t>One test shape</a:t>
-            </a:r>
-          </a:p>
-        </p:txBody>
-      </p:sp>
-      <p:sp>
-        <p:nvSpPr>
           <p:cNvPr id="7" name="TextBox 32"/>
           <p:cNvSpPr/>
           <p:nvPr/>
@@ -11656,9 +10922,12 @@
           <a:bodyPr lIns="73152" tIns="73152" rIns="73152" bIns="73152" anchor="ctr"/>
           <a:lstStyle/>
           <a:p>
-            <a:pPr marL="0" lvl="0" indent="0" algn="l"/>
-            <a:r>
-              <a:rPr lang="en-US" sz="1320" b="0" i="0">
+            <a:pPr marL="342900" lvl="0" indent="-342900" algn="l">
+              <a:buFont typeface="Arial" panose="020B0604020202020204" pitchFamily="34" charset="0"/>
+              <a:buChar char="•"/>
+            </a:pPr>
+            <a:r>
+              <a:rPr lang="en-US" sz="2400" b="0" i="0" dirty="0">
                 <a:solidFill>
                   <a:srgbClr val="172033"/>
                 </a:solidFill>
@@ -11668,159 +10937,40 @@
             </a:r>
           </a:p>
           <a:p>
-            <a:pPr marL="0" lvl="0" indent="0" algn="l"/>
-            <a:r>
-              <a:rPr lang="en-US" sz="1320" b="0" i="0">
-                <a:solidFill>
-                  <a:srgbClr val="172033"/>
-                </a:solidFill>
-                <a:latin typeface="Aptos"/>
-              </a:rPr>
-              <a:t>+ parameters</a:t>
-            </a:r>
-          </a:p>
-          <a:p>
-            <a:pPr marL="0" lvl="0" indent="0" algn="l"/>
-            <a:r>
-              <a:rPr lang="en-US" sz="1320" b="0" i="0">
-                <a:solidFill>
-                  <a:srgbClr val="172033"/>
-                </a:solidFill>
-                <a:latin typeface="Aptos"/>
-              </a:rPr>
-              <a:t>+ expected result</a:t>
-            </a:r>
-          </a:p>
-        </p:txBody>
-      </p:sp>
-      <p:sp>
-        <p:nvSpPr>
-          <p:cNvPr id="8" name="Rect 33"/>
-          <p:cNvSpPr/>
-          <p:nvPr/>
-        </p:nvSpPr>
-        <p:spPr>
-          <a:xfrm>
-            <a:off x="7635240" y="3977639"/>
-            <a:ext cx="3287318" cy="1874519"/>
-          </a:xfrm>
-          <a:prstGeom prst="roundRect">
-            <a:avLst/>
-          </a:prstGeom>
-          <a:solidFill>
-            <a:srgbClr val="FFFFFF"/>
-          </a:solidFill>
-          <a:ln>
-            <a:solidFill>
-              <a:srgbClr val="D5DDE7"/>
-            </a:solidFill>
-            <a:prstDash val="solid"/>
-          </a:ln>
-        </p:spPr>
-        <p:txBody>
-          <a:bodyPr/>
-          <a:lstStyle/>
-          <a:p>
-            <a:endParaRPr lang="en-US"/>
-          </a:p>
-        </p:txBody>
-      </p:sp>
-      <p:sp>
-        <p:nvSpPr>
-          <p:cNvPr id="9" name="TextBox 34"/>
-          <p:cNvSpPr/>
-          <p:nvPr/>
-        </p:nvSpPr>
-        <p:spPr>
-          <a:xfrm>
-            <a:off x="7909560" y="4251960"/>
-            <a:ext cx="3154680" cy="384048"/>
-          </a:xfrm>
-          <a:noFill/>
-          <a:ln>
-            <a:noFill/>
-          </a:ln>
-        </p:spPr>
-        <p:txBody>
-          <a:bodyPr lIns="73152" tIns="73152" rIns="73152" bIns="73152" anchor="ctr"/>
-          <a:lstStyle/>
-          <a:p>
-            <a:pPr marL="0" lvl="0" indent="0" algn="l"/>
-            <a:r>
-              <a:rPr lang="en-US" sz="1485" b="1" i="0">
-                <a:solidFill>
-                  <a:srgbClr val="172033"/>
-                </a:solidFill>
-                <a:latin typeface="Aptos"/>
-              </a:rPr>
-              <a:t>Easy to extend</a:t>
-            </a:r>
-          </a:p>
-        </p:txBody>
-      </p:sp>
-      <p:sp>
-        <p:nvSpPr>
-          <p:cNvPr id="10" name="TextBox 35"/>
-          <p:cNvSpPr/>
-          <p:nvPr/>
-        </p:nvSpPr>
-        <p:spPr>
-          <a:xfrm>
-            <a:off x="7909560" y="4800600"/>
-            <a:ext cx="3108960" cy="749808"/>
-          </a:xfrm>
-          <a:noFill/>
-          <a:ln>
-            <a:noFill/>
-          </a:ln>
-        </p:spPr>
-        <p:txBody>
-          <a:bodyPr lIns="73152" tIns="73152" rIns="73152" bIns="73152" anchor="ctr"/>
-          <a:lstStyle/>
-          <a:p>
-            <a:pPr marL="0" lvl="0" indent="0" algn="l"/>
-            <a:r>
-              <a:rPr lang="en-US" sz="1540" b="1" i="0">
-                <a:solidFill>
-                  <a:srgbClr val="172033"/>
-                </a:solidFill>
-                <a:latin typeface="Aptos"/>
-              </a:rPr>
-              <a:t>Add rows, not repeated code.</a:t>
-            </a:r>
-          </a:p>
-        </p:txBody>
-      </p:sp>
-      <p:sp>
-        <p:nvSpPr>
-          <p:cNvPr id="11" name="TextBox 40"/>
-          <p:cNvSpPr/>
-          <p:nvPr/>
-        </p:nvSpPr>
-        <p:spPr>
-          <a:xfrm>
-            <a:off x="594360" y="5806440"/>
-            <a:ext cx="10881360" cy="384048"/>
-          </a:xfrm>
-          <a:noFill/>
-          <a:ln>
-            <a:noFill/>
-          </a:ln>
-        </p:spPr>
-        <p:txBody>
-          <a:bodyPr lIns="73152" tIns="73152" rIns="73152" bIns="73152" anchor="ctr"/>
-          <a:lstStyle/>
-          <a:p>
-            <a:pPr marL="0" lvl="0" indent="0" algn="l"/>
-            <a:r>
-              <a:rPr lang="en-US" sz="1540" b="1" i="0">
-                <a:solidFill>
-                  <a:srgbClr val="172033"/>
-                </a:solidFill>
-                <a:latin typeface="Aptos"/>
-              </a:rPr>
-              <a:t>Data-driven tests make dozens or hundreds of cases easier to maintain.</a:t>
-            </a:r>
+            <a:pPr marL="342900" lvl="0" indent="-342900" algn="l">
+              <a:buFont typeface="Arial" panose="020B0604020202020204" pitchFamily="34" charset="0"/>
+              <a:buChar char="•"/>
+            </a:pPr>
+            <a:r>
+              <a:rPr lang="en-US" sz="2400" b="0" i="0" dirty="0">
+                <a:solidFill>
+                  <a:srgbClr val="172033"/>
+                </a:solidFill>
+                <a:latin typeface="Aptos"/>
+              </a:rPr>
+              <a:t>parameters</a:t>
+            </a:r>
+          </a:p>
+          <a:p>
+            <a:pPr marL="342900" lvl="0" indent="-342900" algn="l">
+              <a:buFont typeface="Arial" panose="020B0604020202020204" pitchFamily="34" charset="0"/>
+              <a:buChar char="•"/>
+            </a:pPr>
+            <a:r>
+              <a:rPr lang="en-US" sz="2400" b="0" i="0" dirty="0">
+                <a:solidFill>
+                  <a:srgbClr val="172033"/>
+                </a:solidFill>
+                <a:latin typeface="Aptos"/>
+              </a:rPr>
+              <a:t>expected result</a:t>
+            </a:r>
+            <a:endParaRPr lang="en-US" sz="1320" b="0" i="0" dirty="0">
+              <a:solidFill>
+                <a:srgbClr val="172033"/>
+              </a:solidFill>
+              <a:latin typeface="Aptos"/>
+            </a:endParaRPr>
           </a:p>
         </p:txBody>
       </p:sp>
@@ -11967,13 +11117,13 @@
           <a:p>
             <a:pPr marL="0" lvl="0" indent="0" algn="l"/>
             <a:r>
-              <a:rPr lang="en-US" sz="3080" b="1" i="0">
-                <a:solidFill>
-                  <a:srgbClr val="172033"/>
-                </a:solidFill>
-                <a:latin typeface="Aptos"/>
-              </a:rPr>
-              <a:t>CI/CD turns “remember to test” into automation</a:t>
+              <a:rPr lang="en-US" sz="3080" b="1" i="0" dirty="0">
+                <a:solidFill>
+                  <a:srgbClr val="172033"/>
+                </a:solidFill>
+                <a:latin typeface="Aptos"/>
+              </a:rPr>
+              <a:t>CI/CD for automation</a:t>
             </a:r>
           </a:p>
         </p:txBody>
@@ -12006,40 +11156,7 @@
           <a:bodyPr/>
           <a:lstStyle/>
           <a:p>
-            <a:endParaRPr lang="en-US"/>
-          </a:p>
-        </p:txBody>
-      </p:sp>
-      <p:sp>
-        <p:nvSpPr>
-          <p:cNvPr id="5" name="TextBox 30"/>
-          <p:cNvSpPr/>
-          <p:nvPr/>
-        </p:nvSpPr>
-        <p:spPr>
-          <a:xfrm>
-            <a:off x="813816" y="2029968"/>
-            <a:ext cx="457200" cy="402336"/>
-          </a:xfrm>
-          <a:noFill/>
-          <a:ln>
-            <a:noFill/>
-          </a:ln>
-        </p:spPr>
-        <p:txBody>
-          <a:bodyPr lIns="73152" tIns="73152" rIns="73152" bIns="73152" anchor="ctr"/>
-          <a:lstStyle/>
-          <a:p>
-            <a:pPr marL="0" lvl="0" indent="0" algn="l"/>
-            <a:r>
-              <a:rPr lang="en-US" b="1" i="0">
-                <a:solidFill>
-                  <a:srgbClr val="172033"/>
-                </a:solidFill>
-                <a:latin typeface="Aptos"/>
-              </a:rPr>
-              <a:t>1</a:t>
-            </a:r>
+            <a:endParaRPr lang="en-US" dirty="0"/>
           </a:p>
         </p:txBody>
       </p:sp>
@@ -12098,13 +11215,13 @@
           <a:p>
             <a:pPr marL="0" lvl="0" indent="0" algn="l"/>
             <a:r>
-              <a:rPr lang="en-US" sz="1600" b="0" i="0">
-                <a:solidFill>
-                  <a:srgbClr val="172033"/>
-                </a:solidFill>
-                <a:latin typeface="Aptos"/>
-              </a:rPr>
-              <a:t>Repository</a:t>
+              <a:rPr lang="en-US" sz="1600" b="0" i="0" dirty="0">
+                <a:solidFill>
+                  <a:srgbClr val="172033"/>
+                </a:solidFill>
+                <a:latin typeface="Aptos"/>
+              </a:rPr>
+              <a:t>Repository main branch</a:t>
             </a:r>
           </a:p>
         </p:txBody>
@@ -12168,39 +11285,6 @@
       </p:sp>
       <p:sp>
         <p:nvSpPr>
-          <p:cNvPr id="10" name="TextBox 31"/>
-          <p:cNvSpPr/>
-          <p:nvPr/>
-        </p:nvSpPr>
-        <p:spPr>
-          <a:xfrm>
-            <a:off x="3648456" y="2029968"/>
-            <a:ext cx="457200" cy="402336"/>
-          </a:xfrm>
-          <a:noFill/>
-          <a:ln>
-            <a:noFill/>
-          </a:ln>
-        </p:spPr>
-        <p:txBody>
-          <a:bodyPr lIns="73152" tIns="73152" rIns="73152" bIns="73152" anchor="ctr"/>
-          <a:lstStyle/>
-          <a:p>
-            <a:pPr marL="0" lvl="0" indent="0" algn="l"/>
-            <a:r>
-              <a:rPr lang="en-US" b="1" i="0">
-                <a:solidFill>
-                  <a:srgbClr val="172033"/>
-                </a:solidFill>
-                <a:latin typeface="Aptos"/>
-              </a:rPr>
-              <a:t>2</a:t>
-            </a:r>
-          </a:p>
-        </p:txBody>
-      </p:sp>
-      <p:sp>
-        <p:nvSpPr>
           <p:cNvPr id="11" name="TextBox 41"/>
           <p:cNvSpPr/>
           <p:nvPr/>
@@ -12254,13 +11338,13 @@
           <a:p>
             <a:pPr marL="0" lvl="0" indent="0" algn="l"/>
             <a:r>
-              <a:rPr lang="en-US" sz="1600" b="0" i="0">
-                <a:solidFill>
-                  <a:srgbClr val="172033"/>
-                </a:solidFill>
-                <a:latin typeface="Aptos"/>
-              </a:rPr>
-              <a:t>GitHub notifies CI</a:t>
+              <a:rPr lang="en-US" sz="1600" b="0" i="0" dirty="0">
+                <a:solidFill>
+                  <a:srgbClr val="172033"/>
+                </a:solidFill>
+                <a:latin typeface="Aptos"/>
+              </a:rPr>
+              <a:t>GitHub starts CI</a:t>
             </a:r>
           </a:p>
         </p:txBody>
@@ -12324,39 +11408,6 @@
       </p:sp>
       <p:sp>
         <p:nvSpPr>
-          <p:cNvPr id="15" name="TextBox 32"/>
-          <p:cNvSpPr/>
-          <p:nvPr/>
-        </p:nvSpPr>
-        <p:spPr>
-          <a:xfrm>
-            <a:off x="6483096" y="2029968"/>
-            <a:ext cx="457200" cy="402336"/>
-          </a:xfrm>
-          <a:noFill/>
-          <a:ln>
-            <a:noFill/>
-          </a:ln>
-        </p:spPr>
-        <p:txBody>
-          <a:bodyPr lIns="73152" tIns="73152" rIns="73152" bIns="73152" anchor="ctr"/>
-          <a:lstStyle/>
-          <a:p>
-            <a:pPr marL="0" lvl="0" indent="0" algn="l"/>
-            <a:r>
-              <a:rPr lang="en-US" b="1" i="0">
-                <a:solidFill>
-                  <a:srgbClr val="172033"/>
-                </a:solidFill>
-                <a:latin typeface="Aptos"/>
-              </a:rPr>
-              <a:t>3</a:t>
-            </a:r>
-          </a:p>
-        </p:txBody>
-      </p:sp>
-      <p:sp>
-        <p:nvSpPr>
           <p:cNvPr id="16" name="TextBox 42"/>
           <p:cNvSpPr/>
           <p:nvPr/>
@@ -12475,39 +11526,6 @@
           <a:lstStyle/>
           <a:p>
             <a:endParaRPr lang="en-US"/>
-          </a:p>
-        </p:txBody>
-      </p:sp>
-      <p:sp>
-        <p:nvSpPr>
-          <p:cNvPr id="20" name="TextBox 33"/>
-          <p:cNvSpPr/>
-          <p:nvPr/>
-        </p:nvSpPr>
-        <p:spPr>
-          <a:xfrm>
-            <a:off x="9317736" y="2029968"/>
-            <a:ext cx="457200" cy="402336"/>
-          </a:xfrm>
-          <a:noFill/>
-          <a:ln>
-            <a:noFill/>
-          </a:ln>
-        </p:spPr>
-        <p:txBody>
-          <a:bodyPr lIns="73152" tIns="73152" rIns="73152" bIns="73152" anchor="ctr"/>
-          <a:lstStyle/>
-          <a:p>
-            <a:pPr marL="0" lvl="0" indent="0" algn="l"/>
-            <a:r>
-              <a:rPr lang="en-US" b="1" i="0">
-                <a:solidFill>
-                  <a:srgbClr val="172033"/>
-                </a:solidFill>
-                <a:latin typeface="Aptos"/>
-              </a:rPr>
-              <a:t>4</a:t>
-            </a:r>
           </a:p>
         </p:txBody>
       </p:sp>
@@ -12819,14 +11837,69 @@
           <a:p>
             <a:pPr marL="0" lvl="0" indent="0" algn="l"/>
             <a:r>
-              <a:rPr lang="en-US" sz="2400" b="0" i="0">
-                <a:solidFill>
-                  <a:srgbClr val="172033"/>
-                </a:solidFill>
-                <a:latin typeface="Aptos"/>
-              </a:rPr>
-              <a:t>Install Python environment + pytest + coverage</a:t>
-            </a:r>
+              <a:rPr lang="en-US" sz="2400" b="0" i="0" dirty="0">
+                <a:solidFill>
+                  <a:srgbClr val="172033"/>
+                </a:solidFill>
+                <a:latin typeface="Aptos"/>
+              </a:rPr>
+              <a:t>Install Python environment + </a:t>
+            </a:r>
+            <a:r>
+              <a:rPr lang="en-US" sz="2400" b="0" i="0" dirty="0" err="1">
+                <a:solidFill>
+                  <a:srgbClr val="172033"/>
+                </a:solidFill>
+                <a:latin typeface="Courier New" panose="02070309020205020404" pitchFamily="49" charset="0"/>
+                <a:cs typeface="Courier New" panose="02070309020205020404" pitchFamily="49" charset="0"/>
+              </a:rPr>
+              <a:t>pytest</a:t>
+            </a:r>
+            <a:r>
+              <a:rPr lang="en-US" sz="2400" b="0" i="0" dirty="0">
+                <a:solidFill>
+                  <a:srgbClr val="172033"/>
+                </a:solidFill>
+                <a:latin typeface="Aptos"/>
+              </a:rPr>
+              <a:t> + </a:t>
+            </a:r>
+            <a:r>
+              <a:rPr lang="en-US" sz="2400" b="0" i="0" dirty="0">
+                <a:solidFill>
+                  <a:srgbClr val="172033"/>
+                </a:solidFill>
+                <a:latin typeface="Courier New" panose="02070309020205020404" pitchFamily="49" charset="0"/>
+                <a:cs typeface="Courier New" panose="02070309020205020404" pitchFamily="49" charset="0"/>
+              </a:rPr>
+              <a:t>coverage</a:t>
+            </a:r>
+            <a:r>
+              <a:rPr lang="en-US" sz="2400" b="0" i="0" dirty="0">
+                <a:solidFill>
+                  <a:srgbClr val="172033"/>
+                </a:solidFill>
+                <a:latin typeface="Aptos"/>
+              </a:rPr>
+              <a:t> + </a:t>
+            </a:r>
+            <a:r>
+              <a:rPr lang="en-US" sz="2400" b="0" i="0" dirty="0" err="1">
+                <a:solidFill>
+                  <a:srgbClr val="172033"/>
+                </a:solidFill>
+                <a:latin typeface="Courier New" panose="02070309020205020404" pitchFamily="49" charset="0"/>
+                <a:cs typeface="Courier New" panose="02070309020205020404" pitchFamily="49" charset="0"/>
+              </a:rPr>
+              <a:t>uv</a:t>
+            </a:r>
+            <a:endParaRPr lang="en-US" sz="2400" b="0" i="0" dirty="0">
+              <a:solidFill>
+                <a:srgbClr val="172033"/>
+              </a:solidFill>
+              <a:latin typeface="Courier New" panose="02070309020205020404" pitchFamily="49" charset="0"/>
+              <a:cs typeface="Courier New" panose="02070309020205020404" pitchFamily="49" charset="0"/>
+            </a:endParaRPr>
           </a:p>
         </p:txBody>
       </p:sp>
@@ -12916,7 +11989,7 @@
                 </a:solidFill>
                 <a:latin typeface="Aptos"/>
               </a:rPr>
-              <a:t>Fork the </a:t>
+              <a:t>(optional) Fork the </a:t>
             </a:r>
             <a:r>
               <a:rPr lang="en-US" sz="2400" b="0" i="0" dirty="0">
@@ -13026,8 +12099,25 @@
                 </a:solidFill>
                 <a:latin typeface="Aptos"/>
               </a:rPr>
-              <a:t>Clone your fork</a:t>
-            </a:r>
+              <a:t>Clone </a:t>
+            </a:r>
+            <a:r>
+              <a:rPr lang="en-US" sz="2400" b="0" i="0" dirty="0" err="1">
+                <a:solidFill>
+                  <a:srgbClr val="172033"/>
+                </a:solidFill>
+                <a:latin typeface="Courier New" panose="02070309020205020404" pitchFamily="49" charset="0"/>
+                <a:cs typeface="Courier New" panose="02070309020205020404" pitchFamily="49" charset="0"/>
+              </a:rPr>
+              <a:t>my_ols</a:t>
+            </a:r>
+            <a:endParaRPr lang="en-US" sz="2400" b="0" i="0" dirty="0">
+              <a:solidFill>
+                <a:srgbClr val="172033"/>
+              </a:solidFill>
+              <a:latin typeface="Courier New" panose="02070309020205020404" pitchFamily="49" charset="0"/>
+              <a:cs typeface="Courier New" panose="02070309020205020404" pitchFamily="49" charset="0"/>
+            </a:endParaRPr>
           </a:p>
         </p:txBody>
       </p:sp>
@@ -13111,13 +12201,33 @@
           <a:p>
             <a:pPr marL="0" lvl="0" indent="0" algn="l"/>
             <a:r>
-              <a:rPr lang="en-US" sz="2400" b="0" i="0">
-                <a:solidFill>
-                  <a:srgbClr val="172033"/>
-                </a:solidFill>
-                <a:latin typeface="Aptos"/>
-              </a:rPr>
-              <a:t>Install dependencies with uv sync --all-extras</a:t>
+              <a:rPr lang="en-US" sz="2400" b="0" i="0" dirty="0">
+                <a:solidFill>
+                  <a:srgbClr val="172033"/>
+                </a:solidFill>
+                <a:latin typeface="Aptos"/>
+              </a:rPr>
+              <a:t>Install dependencies with </a:t>
+            </a:r>
+            <a:r>
+              <a:rPr lang="en-US" sz="2400" b="0" i="0" dirty="0" err="1">
+                <a:solidFill>
+                  <a:srgbClr val="172033"/>
+                </a:solidFill>
+                <a:latin typeface="Courier New" panose="02070309020205020404" pitchFamily="49" charset="0"/>
+                <a:cs typeface="Courier New" panose="02070309020205020404" pitchFamily="49" charset="0"/>
+              </a:rPr>
+              <a:t>uv</a:t>
+            </a:r>
+            <a:r>
+              <a:rPr lang="en-US" sz="2400" b="0" i="0" dirty="0">
+                <a:solidFill>
+                  <a:srgbClr val="172033"/>
+                </a:solidFill>
+                <a:latin typeface="Courier New" panose="02070309020205020404" pitchFamily="49" charset="0"/>
+                <a:cs typeface="Courier New" panose="02070309020205020404" pitchFamily="49" charset="0"/>
+              </a:rPr>
+              <a:t> sync --all-extras</a:t>
             </a:r>
           </a:p>
         </p:txBody>
@@ -13202,14 +12312,90 @@
           <a:p>
             <a:pPr marL="0" lvl="0" indent="0" algn="l"/>
             <a:r>
-              <a:rPr lang="en-US" sz="2400" b="0" i="0">
-                <a:solidFill>
-                  <a:srgbClr val="172033"/>
-                </a:solidFill>
-                <a:latin typeface="Aptos"/>
-              </a:rPr>
-              <a:t>Run uv run my_ols and uv run pytest</a:t>
-            </a:r>
+              <a:rPr lang="en-US" sz="2400" b="0" i="0" dirty="0">
+                <a:solidFill>
+                  <a:srgbClr val="172033"/>
+                </a:solidFill>
+                <a:latin typeface="Aptos"/>
+              </a:rPr>
+              <a:t>Run </a:t>
+            </a:r>
+            <a:r>
+              <a:rPr lang="en-US" sz="2400" b="0" i="0" dirty="0" err="1">
+                <a:solidFill>
+                  <a:srgbClr val="172033"/>
+                </a:solidFill>
+                <a:latin typeface="Courier New" panose="02070309020205020404" pitchFamily="49" charset="0"/>
+                <a:cs typeface="Courier New" panose="02070309020205020404" pitchFamily="49" charset="0"/>
+              </a:rPr>
+              <a:t>uv</a:t>
+            </a:r>
+            <a:r>
+              <a:rPr lang="en-US" sz="2400" b="0" i="0" dirty="0">
+                <a:solidFill>
+                  <a:srgbClr val="172033"/>
+                </a:solidFill>
+                <a:latin typeface="Courier New" panose="02070309020205020404" pitchFamily="49" charset="0"/>
+                <a:cs typeface="Courier New" panose="02070309020205020404" pitchFamily="49" charset="0"/>
+              </a:rPr>
+              <a:t> run </a:t>
+            </a:r>
+            <a:r>
+              <a:rPr lang="en-US" sz="2400" b="0" i="0" dirty="0" err="1">
+                <a:solidFill>
+                  <a:srgbClr val="172033"/>
+                </a:solidFill>
+                <a:latin typeface="Courier New" panose="02070309020205020404" pitchFamily="49" charset="0"/>
+                <a:cs typeface="Courier New" panose="02070309020205020404" pitchFamily="49" charset="0"/>
+              </a:rPr>
+              <a:t>my_ols</a:t>
+            </a:r>
+            <a:r>
+              <a:rPr lang="en-US" sz="2400" b="0" i="0" dirty="0">
+                <a:solidFill>
+                  <a:srgbClr val="172033"/>
+                </a:solidFill>
+                <a:latin typeface="Aptos"/>
+              </a:rPr>
+              <a:t> and </a:t>
+            </a:r>
+            <a:r>
+              <a:rPr lang="en-US" sz="2400" b="0" i="0" dirty="0" err="1">
+                <a:solidFill>
+                  <a:srgbClr val="172033"/>
+                </a:solidFill>
+                <a:latin typeface="Courier New" panose="02070309020205020404" pitchFamily="49" charset="0"/>
+                <a:cs typeface="Courier New" panose="02070309020205020404" pitchFamily="49" charset="0"/>
+              </a:rPr>
+              <a:t>uv</a:t>
+            </a:r>
+            <a:r>
+              <a:rPr lang="en-US" sz="2400" b="0" i="0" dirty="0">
+                <a:solidFill>
+                  <a:srgbClr val="172033"/>
+                </a:solidFill>
+                <a:latin typeface="Courier New" panose="02070309020205020404" pitchFamily="49" charset="0"/>
+                <a:cs typeface="Courier New" panose="02070309020205020404" pitchFamily="49" charset="0"/>
+              </a:rPr>
+              <a:t> run </a:t>
+            </a:r>
+            <a:r>
+              <a:rPr lang="en-US" sz="2400" b="0" i="0" dirty="0" err="1">
+                <a:solidFill>
+                  <a:srgbClr val="172033"/>
+                </a:solidFill>
+                <a:latin typeface="Courier New" panose="02070309020205020404" pitchFamily="49" charset="0"/>
+                <a:cs typeface="Courier New" panose="02070309020205020404" pitchFamily="49" charset="0"/>
+              </a:rPr>
+              <a:t>pytest</a:t>
+            </a:r>
+            <a:endParaRPr lang="en-US" sz="2400" b="0" i="0" dirty="0">
+              <a:solidFill>
+                <a:srgbClr val="172033"/>
+              </a:solidFill>
+              <a:latin typeface="Courier New" panose="02070309020205020404" pitchFamily="49" charset="0"/>
+              <a:cs typeface="Courier New" panose="02070309020205020404" pitchFamily="49" charset="0"/>
+            </a:endParaRPr>
           </a:p>
         </p:txBody>
       </p:sp>
@@ -13235,47 +12421,6 @@
           <a:lstStyle/>
           <a:p>
             <a:endParaRPr lang="en-US" sz="3200"/>
-          </a:p>
-        </p:txBody>
-      </p:sp>
-      <p:sp>
-        <p:nvSpPr>
-          <p:cNvPr id="19" name="Rect 60"/>
-          <p:cNvSpPr/>
-          <p:nvPr/>
-        </p:nvSpPr>
-        <p:spPr>
-          <a:xfrm>
-            <a:off x="4198620" y="5385816"/>
-            <a:ext cx="3794760" cy="731520"/>
-          </a:xfrm>
-          <a:prstGeom prst="roundRect">
-            <a:avLst/>
-          </a:prstGeom>
-          <a:solidFill>
-            <a:srgbClr val="FFFFFF"/>
-          </a:solidFill>
-          <a:ln>
-            <a:solidFill>
-              <a:srgbClr val="D5DDE7"/>
-            </a:solidFill>
-            <a:prstDash val="solid"/>
-          </a:ln>
-        </p:spPr>
-        <p:txBody>
-          <a:bodyPr lIns="164592" tIns="128016" rIns="164592" bIns="128016"/>
-          <a:lstStyle/>
-          <a:p>
-            <a:pPr marL="0" lvl="0" indent="0" algn="l"/>
-            <a:r>
-              <a:rPr lang="en-US" sz="1320" b="0" i="0">
-                <a:solidFill>
-                  <a:srgbClr val="172033"/>
-                </a:solidFill>
-                <a:latin typeface="Courier New"/>
-              </a:rPr>
-              <a:t>uv run pytest</a:t>
-            </a:r>
           </a:p>
         </p:txBody>
       </p:sp>
@@ -13557,38 +12702,6 @@
       </p:sp>
       <p:sp>
         <p:nvSpPr>
-          <p:cNvPr id="5" name="Rect 30"/>
-          <p:cNvSpPr/>
-          <p:nvPr/>
-        </p:nvSpPr>
-        <p:spPr>
-          <a:xfrm>
-            <a:off x="7498079" y="1600200"/>
-            <a:ext cx="4343400" cy="4343400"/>
-          </a:xfrm>
-          <a:prstGeom prst="roundRect">
-            <a:avLst/>
-          </a:prstGeom>
-          <a:solidFill>
-            <a:srgbClr val="FFFFFF"/>
-          </a:solidFill>
-          <a:ln>
-            <a:solidFill>
-              <a:srgbClr val="D5DDE7"/>
-            </a:solidFill>
-            <a:prstDash val="solid"/>
-          </a:ln>
-        </p:spPr>
-        <p:txBody>
-          <a:bodyPr/>
-          <a:lstStyle/>
-          <a:p>
-            <a:endParaRPr lang="en-US"/>
-          </a:p>
-        </p:txBody>
-      </p:sp>
-      <p:sp>
-        <p:nvSpPr>
           <p:cNvPr id="6" name="TextBox 31"/>
           <p:cNvSpPr/>
           <p:nvPr/>
@@ -13609,13 +12722,13 @@
           <a:p>
             <a:pPr marL="0" lvl="0" indent="0" algn="l"/>
             <a:r>
-              <a:rPr lang="en-US" b="1" i="0">
-                <a:solidFill>
-                  <a:srgbClr val="172033"/>
-                </a:solidFill>
-                <a:latin typeface="Aptos"/>
-              </a:rPr>
-              <a:t>WORKFLOW RULE</a:t>
+              <a:rPr lang="en-US" b="1" i="0" dirty="0">
+                <a:solidFill>
+                  <a:srgbClr val="172033"/>
+                </a:solidFill>
+                <a:latin typeface="Aptos"/>
+              </a:rPr>
+              <a:t>WORKFLOW</a:t>
             </a:r>
           </a:p>
         </p:txBody>
@@ -13711,15 +12824,12 @@
           <a:lstStyle/>
           <a:p>
             <a:pPr marL="0" lvl="0" indent="0" algn="l"/>
-            <a:r>
-              <a:rPr lang="en-US" sz="892" b="0" i="0">
-                <a:solidFill>
-                  <a:srgbClr val="172033"/>
-                </a:solidFill>
-                <a:latin typeface="Aptos"/>
-              </a:rPr>
-              <a:t>HOW TO TEST YOUR CODE ON GITHUB</a:t>
-            </a:r>
+            <a:endParaRPr lang="en-US" sz="892" b="0" i="0" dirty="0">
+              <a:solidFill>
+                <a:srgbClr val="172033"/>
+              </a:solidFill>
+              <a:latin typeface="Aptos"/>
+            </a:endParaRPr>
           </a:p>
         </p:txBody>
       </p:sp>
@@ -14114,44 +13224,6 @@
       </p:sp>
       <p:sp>
         <p:nvSpPr>
-          <p:cNvPr id="5" name="Rect 30">
-            <a:extLst>
-              <a:ext uri="{FF2B5EF4-FFF2-40B4-BE49-F238E27FC236}">
-                <a16:creationId xmlns:a16="http://schemas.microsoft.com/office/drawing/2014/main" id="{844F9A06-35CC-3EEE-291F-3D2E8A2769AC}"/>
-              </a:ext>
-            </a:extLst>
-          </p:cNvPr>
-          <p:cNvSpPr/>
-          <p:nvPr/>
-        </p:nvSpPr>
-        <p:spPr>
-          <a:xfrm>
-            <a:off x="7498079" y="1600200"/>
-            <a:ext cx="4343400" cy="4343400"/>
-          </a:xfrm>
-          <a:prstGeom prst="roundRect">
-            <a:avLst/>
-          </a:prstGeom>
-          <a:solidFill>
-            <a:srgbClr val="FFFFFF"/>
-          </a:solidFill>
-          <a:ln>
-            <a:solidFill>
-              <a:srgbClr val="D5DDE7"/>
-            </a:solidFill>
-            <a:prstDash val="solid"/>
-          </a:ln>
-        </p:spPr>
-        <p:txBody>
-          <a:bodyPr/>
-          <a:lstStyle/>
-          <a:p>
-            <a:endParaRPr lang="en-US" dirty="0"/>
-          </a:p>
-        </p:txBody>
-      </p:sp>
-      <p:sp>
-        <p:nvSpPr>
           <p:cNvPr id="6" name="TextBox 31">
             <a:extLst>
               <a:ext uri="{FF2B5EF4-FFF2-40B4-BE49-F238E27FC236}">
@@ -14184,7 +13256,7 @@
                 </a:solidFill>
                 <a:latin typeface="Aptos"/>
               </a:rPr>
-              <a:t>WORKFLOW RULE</a:t>
+              <a:t>WORKFLOW</a:t>
             </a:r>
           </a:p>
         </p:txBody>
@@ -14223,7 +13295,7 @@
                 </a:solidFill>
                 <a:latin typeface="Aptos"/>
               </a:rPr>
-              <a:t>On an </a:t>
+              <a:t>on an </a:t>
             </a:r>
             <a:r>
               <a:rPr lang="en-US" sz="2000" dirty="0">
@@ -14263,7 +13335,7 @@
                 </a:solidFill>
                 <a:latin typeface="Aptos"/>
               </a:rPr>
-              <a:t>With Python 3.14</a:t>
+              <a:t>with Python 3.14</a:t>
             </a:r>
           </a:p>
           <a:p>
@@ -14284,7 +13356,7 @@
                 </a:solidFill>
                 <a:latin typeface="Aptos"/>
               </a:rPr>
-              <a:t>Install listed packages</a:t>
+              <a:t>install listed packages</a:t>
             </a:r>
           </a:p>
           <a:p>
@@ -14305,7 +13377,7 @@
                 </a:solidFill>
                 <a:latin typeface="Aptos"/>
               </a:rPr>
-              <a:t>Run </a:t>
+              <a:t>run </a:t>
             </a:r>
             <a:r>
               <a:rPr lang="en-US" sz="2000" dirty="0" err="1">
@@ -14387,13 +13459,13 @@
           <a:p>
             <a:pPr marL="0" lvl="0" indent="0" algn="l"/>
             <a:r>
-              <a:rPr lang="en-US" sz="3080" b="1" i="0">
-                <a:solidFill>
-                  <a:srgbClr val="172033"/>
-                </a:solidFill>
-                <a:latin typeface="Aptos"/>
-              </a:rPr>
-              <a:t>The reusable testing workflow</a:t>
+              <a:rPr lang="en-US" sz="3080" b="1" i="0" dirty="0">
+                <a:solidFill>
+                  <a:srgbClr val="172033"/>
+                </a:solidFill>
+                <a:latin typeface="Aptos"/>
+              </a:rPr>
+              <a:t>The testing workflow</a:t>
             </a:r>
           </a:p>
         </p:txBody>
@@ -14877,46 +13949,14 @@
           <a:p>
             <a:pPr marL="0" lvl="0" indent="0" algn="l"/>
             <a:r>
-              <a:rPr lang="en-US" b="1" i="0">
-                <a:solidFill>
-                  <a:srgbClr val="172033"/>
-                </a:solidFill>
-                <a:latin typeface="Aptos"/>
-              </a:rPr>
-              <a:t>Run the suite in CI</a:t>
-            </a:r>
-          </a:p>
-        </p:txBody>
-      </p:sp>
-      <p:sp>
-        <p:nvSpPr>
-          <p:cNvPr id="19" name="Rect 50"/>
-          <p:cNvSpPr/>
-          <p:nvPr/>
-        </p:nvSpPr>
-        <p:spPr>
-          <a:xfrm>
-            <a:off x="594360" y="5074920"/>
-            <a:ext cx="10972800" cy="841248"/>
-          </a:xfrm>
-          <a:prstGeom prst="roundRect">
-            <a:avLst/>
-          </a:prstGeom>
-          <a:solidFill>
-            <a:srgbClr val="FFFFFF"/>
-          </a:solidFill>
-          <a:ln>
-            <a:solidFill>
-              <a:srgbClr val="D5DDE7"/>
-            </a:solidFill>
-            <a:prstDash val="solid"/>
-          </a:ln>
-        </p:spPr>
-        <p:txBody>
-          <a:bodyPr/>
-          <a:lstStyle/>
-          <a:p>
-            <a:endParaRPr lang="en-US"/>
+              <a:rPr lang="en-US" b="1" i="0" dirty="0">
+                <a:solidFill>
+                  <a:srgbClr val="172033"/>
+                </a:solidFill>
+                <a:latin typeface="Aptos"/>
+              </a:rPr>
+              <a:t>Run tests in CI</a:t>
+            </a:r>
           </a:p>
         </p:txBody>
       </p:sp>
@@ -15965,7 +15005,7 @@
         <p:spPr>
           <a:xfrm>
             <a:off x="576072" y="3584448"/>
-            <a:ext cx="1527048" cy="274320"/>
+            <a:ext cx="1527048" cy="261610"/>
           </a:xfrm>
           <a:prstGeom prst="rect">
             <a:avLst/>
@@ -15992,8 +15032,14 @@
               </a:defRPr>
             </a:pPr>
             <a:r>
+              <a:rPr dirty="0"/>
               <a:t>Describe</a:t>
             </a:r>
+            <a:r>
+              <a:rPr lang="en-GB" dirty="0"/>
+              <a:t> + Discuss</a:t>
+            </a:r>
+            <a:endParaRPr dirty="0"/>
           </a:p>
         </p:txBody>
       </p:sp>
@@ -17103,39 +16149,6 @@
       </p:sp>
       <p:sp>
         <p:nvSpPr>
-          <p:cNvPr id="5" name="TextBox 30"/>
-          <p:cNvSpPr/>
-          <p:nvPr/>
-        </p:nvSpPr>
-        <p:spPr>
-          <a:xfrm>
-            <a:off x="795528" y="1901952"/>
-            <a:ext cx="640080" cy="347472"/>
-          </a:xfrm>
-          <a:noFill/>
-          <a:ln>
-            <a:noFill/>
-          </a:ln>
-        </p:spPr>
-        <p:txBody>
-          <a:bodyPr lIns="73152" tIns="73152" rIns="73152" bIns="73152" anchor="ctr"/>
-          <a:lstStyle/>
-          <a:p>
-            <a:pPr marL="0" lvl="0" indent="0" algn="l"/>
-            <a:r>
-              <a:rPr lang="en-US" sz="2000" b="1" i="0" dirty="0">
-                <a:solidFill>
-                  <a:srgbClr val="172033"/>
-                </a:solidFill>
-                <a:latin typeface="Aptos"/>
-              </a:rPr>
-              <a:t>01</a:t>
-            </a:r>
-          </a:p>
-        </p:txBody>
-      </p:sp>
-      <p:sp>
-        <p:nvSpPr>
           <p:cNvPr id="6" name="TextBox 40"/>
           <p:cNvSpPr/>
           <p:nvPr/>
@@ -17252,39 +16265,6 @@
       </p:sp>
       <p:sp>
         <p:nvSpPr>
-          <p:cNvPr id="9" name="TextBox 31"/>
-          <p:cNvSpPr/>
-          <p:nvPr/>
-        </p:nvSpPr>
-        <p:spPr>
-          <a:xfrm>
-            <a:off x="3611880" y="1901952"/>
-            <a:ext cx="640080" cy="347472"/>
-          </a:xfrm>
-          <a:noFill/>
-          <a:ln>
-            <a:noFill/>
-          </a:ln>
-        </p:spPr>
-        <p:txBody>
-          <a:bodyPr lIns="73152" tIns="73152" rIns="73152" bIns="73152" anchor="ctr"/>
-          <a:lstStyle/>
-          <a:p>
-            <a:pPr marL="0" lvl="0" indent="0" algn="l"/>
-            <a:r>
-              <a:rPr lang="en-US" sz="2000" b="1" i="0" dirty="0">
-                <a:solidFill>
-                  <a:srgbClr val="172033"/>
-                </a:solidFill>
-                <a:latin typeface="Aptos"/>
-              </a:rPr>
-              <a:t>02</a:t>
-            </a:r>
-          </a:p>
-        </p:txBody>
-      </p:sp>
-      <p:sp>
-        <p:nvSpPr>
           <p:cNvPr id="10" name="TextBox 41"/>
           <p:cNvSpPr/>
           <p:nvPr/>
@@ -17383,39 +16363,6 @@
       </p:sp>
       <p:sp>
         <p:nvSpPr>
-          <p:cNvPr id="13" name="TextBox 32"/>
-          <p:cNvSpPr/>
-          <p:nvPr/>
-        </p:nvSpPr>
-        <p:spPr>
-          <a:xfrm>
-            <a:off x="6428232" y="1901952"/>
-            <a:ext cx="640080" cy="347472"/>
-          </a:xfrm>
-          <a:noFill/>
-          <a:ln>
-            <a:noFill/>
-          </a:ln>
-        </p:spPr>
-        <p:txBody>
-          <a:bodyPr lIns="73152" tIns="73152" rIns="73152" bIns="73152" anchor="ctr"/>
-          <a:lstStyle/>
-          <a:p>
-            <a:pPr marL="0" lvl="0" indent="0" algn="l"/>
-            <a:r>
-              <a:rPr lang="en-US" sz="2000" b="1" i="0" dirty="0">
-                <a:solidFill>
-                  <a:srgbClr val="172033"/>
-                </a:solidFill>
-                <a:latin typeface="Aptos"/>
-              </a:rPr>
-              <a:t>03</a:t>
-            </a:r>
-          </a:p>
-        </p:txBody>
-      </p:sp>
-      <p:sp>
-        <p:nvSpPr>
           <p:cNvPr id="14" name="TextBox 42"/>
           <p:cNvSpPr/>
           <p:nvPr/>
@@ -17509,39 +16456,6 @@
           <a:lstStyle/>
           <a:p>
             <a:endParaRPr lang="en-US" dirty="0"/>
-          </a:p>
-        </p:txBody>
-      </p:sp>
-      <p:sp>
-        <p:nvSpPr>
-          <p:cNvPr id="17" name="TextBox 33"/>
-          <p:cNvSpPr/>
-          <p:nvPr/>
-        </p:nvSpPr>
-        <p:spPr>
-          <a:xfrm>
-            <a:off x="9244584" y="1901952"/>
-            <a:ext cx="640080" cy="347472"/>
-          </a:xfrm>
-          <a:noFill/>
-          <a:ln>
-            <a:noFill/>
-          </a:ln>
-        </p:spPr>
-        <p:txBody>
-          <a:bodyPr lIns="73152" tIns="73152" rIns="73152" bIns="73152" anchor="ctr"/>
-          <a:lstStyle/>
-          <a:p>
-            <a:pPr marL="0" lvl="0" indent="0" algn="l"/>
-            <a:r>
-              <a:rPr lang="en-US" sz="2000" b="1" i="0" dirty="0">
-                <a:solidFill>
-                  <a:srgbClr val="172033"/>
-                </a:solidFill>
-                <a:latin typeface="Aptos"/>
-              </a:rPr>
-              <a:t>04</a:t>
-            </a:r>
           </a:p>
         </p:txBody>
       </p:sp>
@@ -17708,6 +16622,1383 @@
 </file>
 
 <file path=ppt/slides/slide30.xml><?xml version="1.0" encoding="utf-8"?>
+<p:sld xmlns:a="http://schemas.openxmlformats.org/drawingml/2006/main" xmlns:r="http://schemas.openxmlformats.org/officeDocument/2006/relationships" xmlns:p="http://schemas.openxmlformats.org/presentationml/2006/main">
+  <p:cSld>
+    <p:bg>
+      <p:bgPr>
+        <a:solidFill>
+          <a:srgbClr val="F7F9FC"/>
+        </a:solidFill>
+        <a:effectLst/>
+      </p:bgPr>
+    </p:bg>
+    <p:spTree>
+      <p:nvGrpSpPr>
+        <p:cNvPr id="1" name="">
+          <a:extLst>
+            <a:ext uri="{FF2B5EF4-FFF2-40B4-BE49-F238E27FC236}">
+              <a16:creationId xmlns:a16="http://schemas.microsoft.com/office/drawing/2014/main" id="{50BD7AEA-8DFB-9FE8-ED71-15B3F3951855}"/>
+            </a:ext>
+          </a:extLst>
+        </p:cNvPr>
+        <p:cNvGrpSpPr/>
+        <p:nvPr/>
+      </p:nvGrpSpPr>
+      <p:grpSpPr>
+        <a:xfrm>
+          <a:off x="0" y="0"/>
+          <a:ext cx="0" cy="0"/>
+          <a:chOff x="0" y="0"/>
+          <a:chExt cx="0" cy="0"/>
+        </a:xfrm>
+      </p:grpSpPr>
+      <p:sp>
+        <p:nvSpPr>
+          <p:cNvPr id="3" name="TextBox 2">
+            <a:extLst>
+              <a:ext uri="{FF2B5EF4-FFF2-40B4-BE49-F238E27FC236}">
+                <a16:creationId xmlns:a16="http://schemas.microsoft.com/office/drawing/2014/main" id="{B511B047-2EDF-0008-F8DC-D47473DCF488}"/>
+              </a:ext>
+            </a:extLst>
+          </p:cNvPr>
+          <p:cNvSpPr txBox="1"/>
+          <p:nvPr/>
+        </p:nvSpPr>
+        <p:spPr>
+          <a:xfrm>
+            <a:off x="731520" y="749808"/>
+            <a:ext cx="10698480" cy="594360"/>
+          </a:xfrm>
+          <a:prstGeom prst="rect">
+            <a:avLst/>
+          </a:prstGeom>
+          <a:noFill/>
+        </p:spPr>
+        <p:txBody>
+          <a:bodyPr wrap="square">
+            <a:spAutoFit/>
+          </a:bodyPr>
+          <a:lstStyle/>
+          <a:p>
+            <a:pPr algn="l">
+              <a:defRPr sz="2800" b="1">
+                <a:solidFill>
+                  <a:srgbClr val="0D1117"/>
+                </a:solidFill>
+                <a:latin typeface="Aptos"/>
+              </a:defRPr>
+            </a:pPr>
+            <a:r>
+              <a:t>Connect the issue to the code that resolves it</a:t>
+            </a:r>
+          </a:p>
+        </p:txBody>
+      </p:sp>
+      <p:sp>
+        <p:nvSpPr>
+          <p:cNvPr id="4" name="TextBox 3">
+            <a:extLst>
+              <a:ext uri="{FF2B5EF4-FFF2-40B4-BE49-F238E27FC236}">
+                <a16:creationId xmlns:a16="http://schemas.microsoft.com/office/drawing/2014/main" id="{6C57B90A-9139-AB0B-BBE1-7AC3580404D5}"/>
+              </a:ext>
+            </a:extLst>
+          </p:cNvPr>
+          <p:cNvSpPr txBox="1"/>
+          <p:nvPr/>
+        </p:nvSpPr>
+        <p:spPr>
+          <a:xfrm>
+            <a:off x="731520" y="1417320"/>
+            <a:ext cx="10698480" cy="502920"/>
+          </a:xfrm>
+          <a:prstGeom prst="rect">
+            <a:avLst/>
+          </a:prstGeom>
+          <a:noFill/>
+        </p:spPr>
+        <p:txBody>
+          <a:bodyPr wrap="square">
+            <a:spAutoFit/>
+          </a:bodyPr>
+          <a:lstStyle/>
+          <a:p>
+            <a:pPr algn="l">
+              <a:defRPr sz="2000" b="0">
+                <a:solidFill>
+                  <a:srgbClr val="57606A"/>
+                </a:solidFill>
+                <a:latin typeface="Aptos"/>
+              </a:defRPr>
+            </a:pPr>
+            <a:r>
+              <a:t>A branch and pull request create traceability from the original task to the final code change.</a:t>
+            </a:r>
+          </a:p>
+        </p:txBody>
+      </p:sp>
+      <p:sp>
+        <p:nvSpPr>
+          <p:cNvPr id="5" name="Rounded Rectangle 4">
+            <a:extLst>
+              <a:ext uri="{FF2B5EF4-FFF2-40B4-BE49-F238E27FC236}">
+                <a16:creationId xmlns:a16="http://schemas.microsoft.com/office/drawing/2014/main" id="{6C47C576-AD1B-DEF4-F0B5-D98FEF6E9020}"/>
+              </a:ext>
+            </a:extLst>
+          </p:cNvPr>
+          <p:cNvSpPr/>
+          <p:nvPr/>
+        </p:nvSpPr>
+        <p:spPr>
+          <a:xfrm>
+            <a:off x="502920" y="2423160"/>
+            <a:ext cx="1673352" cy="1828800"/>
+          </a:xfrm>
+          <a:prstGeom prst="roundRect">
+            <a:avLst/>
+          </a:prstGeom>
+          <a:solidFill>
+            <a:schemeClr val="bg1"/>
+          </a:solidFill>
+          <a:ln>
+            <a:solidFill>
+              <a:schemeClr val="bg1">
+                <a:lumMod val="85000"/>
+              </a:schemeClr>
+            </a:solidFill>
+          </a:ln>
+        </p:spPr>
+        <p:style>
+          <a:lnRef idx="1">
+            <a:schemeClr val="accent1"/>
+          </a:lnRef>
+          <a:fillRef idx="3">
+            <a:schemeClr val="accent1"/>
+          </a:fillRef>
+          <a:effectRef idx="2">
+            <a:schemeClr val="accent1"/>
+          </a:effectRef>
+          <a:fontRef idx="minor">
+            <a:schemeClr val="lt1"/>
+          </a:fontRef>
+        </p:style>
+        <p:txBody>
+          <a:bodyPr rtlCol="0" anchor="ctr"/>
+          <a:lstStyle/>
+          <a:p>
+            <a:pPr algn="ctr"/>
+            <a:endParaRPr/>
+          </a:p>
+        </p:txBody>
+      </p:sp>
+      <p:sp>
+        <p:nvSpPr>
+          <p:cNvPr id="6" name="TextBox 5">
+            <a:extLst>
+              <a:ext uri="{FF2B5EF4-FFF2-40B4-BE49-F238E27FC236}">
+                <a16:creationId xmlns:a16="http://schemas.microsoft.com/office/drawing/2014/main" id="{74CF18FB-D7BD-17B3-46D2-8AE2CF87B269}"/>
+              </a:ext>
+            </a:extLst>
+          </p:cNvPr>
+          <p:cNvSpPr txBox="1"/>
+          <p:nvPr/>
+        </p:nvSpPr>
+        <p:spPr>
+          <a:xfrm>
+            <a:off x="576072" y="2688336"/>
+            <a:ext cx="1527048" cy="347472"/>
+          </a:xfrm>
+          <a:prstGeom prst="rect">
+            <a:avLst/>
+          </a:prstGeom>
+          <a:solidFill>
+            <a:schemeClr val="bg1"/>
+          </a:solidFill>
+          <a:ln>
+            <a:noFill/>
+          </a:ln>
+        </p:spPr>
+        <p:txBody>
+          <a:bodyPr wrap="square">
+            <a:spAutoFit/>
+          </a:bodyPr>
+          <a:lstStyle/>
+          <a:p>
+            <a:pPr algn="ctr">
+              <a:defRPr sz="1600" b="1">
+                <a:solidFill>
+                  <a:srgbClr val="0D1117"/>
+                </a:solidFill>
+                <a:latin typeface="Aptos"/>
+              </a:defRPr>
+            </a:pPr>
+            <a:r>
+              <a:t>#42</a:t>
+            </a:r>
+          </a:p>
+        </p:txBody>
+      </p:sp>
+      <p:sp>
+        <p:nvSpPr>
+          <p:cNvPr id="7" name="TextBox 6">
+            <a:extLst>
+              <a:ext uri="{FF2B5EF4-FFF2-40B4-BE49-F238E27FC236}">
+                <a16:creationId xmlns:a16="http://schemas.microsoft.com/office/drawing/2014/main" id="{62E923CA-4A1E-C0BC-B882-71C0EA8782C9}"/>
+              </a:ext>
+            </a:extLst>
+          </p:cNvPr>
+          <p:cNvSpPr txBox="1"/>
+          <p:nvPr/>
+        </p:nvSpPr>
+        <p:spPr>
+          <a:xfrm>
+            <a:off x="576072" y="3136392"/>
+            <a:ext cx="1527048" cy="338554"/>
+          </a:xfrm>
+          <a:prstGeom prst="rect">
+            <a:avLst/>
+          </a:prstGeom>
+          <a:solidFill>
+            <a:schemeClr val="bg1"/>
+          </a:solidFill>
+          <a:ln>
+            <a:noFill/>
+          </a:ln>
+        </p:spPr>
+        <p:txBody>
+          <a:bodyPr wrap="square">
+            <a:spAutoFit/>
+          </a:bodyPr>
+          <a:lstStyle/>
+          <a:p>
+            <a:pPr algn="ctr">
+              <a:defRPr sz="1300" b="1">
+                <a:solidFill>
+                  <a:srgbClr val="0969DA"/>
+                </a:solidFill>
+                <a:latin typeface="Aptos"/>
+              </a:defRPr>
+            </a:pPr>
+            <a:r>
+              <a:rPr sz="1600"/>
+              <a:t>Issue</a:t>
+            </a:r>
+          </a:p>
+        </p:txBody>
+      </p:sp>
+      <p:sp>
+        <p:nvSpPr>
+          <p:cNvPr id="8" name="TextBox 7">
+            <a:extLst>
+              <a:ext uri="{FF2B5EF4-FFF2-40B4-BE49-F238E27FC236}">
+                <a16:creationId xmlns:a16="http://schemas.microsoft.com/office/drawing/2014/main" id="{3A7297E7-5A74-91A5-C2AA-B22AF83D16BD}"/>
+              </a:ext>
+            </a:extLst>
+          </p:cNvPr>
+          <p:cNvSpPr txBox="1"/>
+          <p:nvPr/>
+        </p:nvSpPr>
+        <p:spPr>
+          <a:xfrm>
+            <a:off x="576072" y="3584448"/>
+            <a:ext cx="1527048" cy="261610"/>
+          </a:xfrm>
+          <a:prstGeom prst="rect">
+            <a:avLst/>
+          </a:prstGeom>
+          <a:solidFill>
+            <a:schemeClr val="bg1"/>
+          </a:solidFill>
+          <a:ln>
+            <a:noFill/>
+          </a:ln>
+        </p:spPr>
+        <p:txBody>
+          <a:bodyPr wrap="square">
+            <a:spAutoFit/>
+          </a:bodyPr>
+          <a:lstStyle/>
+          <a:p>
+            <a:pPr algn="ctr">
+              <a:defRPr sz="1100" b="0">
+                <a:solidFill>
+                  <a:srgbClr val="57606A"/>
+                </a:solidFill>
+                <a:latin typeface="Aptos"/>
+              </a:defRPr>
+            </a:pPr>
+            <a:r>
+              <a:rPr dirty="0"/>
+              <a:t>Describe</a:t>
+            </a:r>
+            <a:r>
+              <a:rPr lang="en-GB" dirty="0"/>
+              <a:t> + Discuss</a:t>
+            </a:r>
+            <a:endParaRPr dirty="0"/>
+          </a:p>
+        </p:txBody>
+      </p:sp>
+      <p:sp>
+        <p:nvSpPr>
+          <p:cNvPr id="9" name="TextBox 8">
+            <a:extLst>
+              <a:ext uri="{FF2B5EF4-FFF2-40B4-BE49-F238E27FC236}">
+                <a16:creationId xmlns:a16="http://schemas.microsoft.com/office/drawing/2014/main" id="{6B4F09B7-622E-76F7-743E-D11B92759085}"/>
+              </a:ext>
+            </a:extLst>
+          </p:cNvPr>
+          <p:cNvSpPr txBox="1"/>
+          <p:nvPr/>
+        </p:nvSpPr>
+        <p:spPr>
+          <a:xfrm>
+            <a:off x="2194560" y="3063240"/>
+            <a:ext cx="658368" cy="338554"/>
+          </a:xfrm>
+          <a:prstGeom prst="rect">
+            <a:avLst/>
+          </a:prstGeom>
+          <a:solidFill>
+            <a:schemeClr val="bg1"/>
+          </a:solidFill>
+          <a:ln>
+            <a:noFill/>
+          </a:ln>
+        </p:spPr>
+        <p:txBody>
+          <a:bodyPr wrap="square">
+            <a:spAutoFit/>
+          </a:bodyPr>
+          <a:lstStyle/>
+          <a:p>
+            <a:pPr algn="ctr">
+              <a:defRPr sz="2400" b="1">
+                <a:solidFill>
+                  <a:srgbClr val="57606A"/>
+                </a:solidFill>
+                <a:latin typeface="Aptos"/>
+              </a:defRPr>
+            </a:pPr>
+            <a:r>
+              <a:rPr sz="1600"/>
+              <a:t>→</a:t>
+            </a:r>
+          </a:p>
+        </p:txBody>
+      </p:sp>
+      <p:sp>
+        <p:nvSpPr>
+          <p:cNvPr id="10" name="Rounded Rectangle 9">
+            <a:extLst>
+              <a:ext uri="{FF2B5EF4-FFF2-40B4-BE49-F238E27FC236}">
+                <a16:creationId xmlns:a16="http://schemas.microsoft.com/office/drawing/2014/main" id="{C911A45F-033E-4B7F-76B4-FD42965DE0C2}"/>
+              </a:ext>
+            </a:extLst>
+          </p:cNvPr>
+          <p:cNvSpPr/>
+          <p:nvPr/>
+        </p:nvSpPr>
+        <p:spPr>
+          <a:xfrm>
+            <a:off x="2880360" y="2423160"/>
+            <a:ext cx="1673352" cy="1828800"/>
+          </a:xfrm>
+          <a:prstGeom prst="roundRect">
+            <a:avLst/>
+          </a:prstGeom>
+          <a:solidFill>
+            <a:schemeClr val="bg1"/>
+          </a:solidFill>
+          <a:ln>
+            <a:solidFill>
+              <a:schemeClr val="bg1">
+                <a:lumMod val="85000"/>
+              </a:schemeClr>
+            </a:solidFill>
+          </a:ln>
+        </p:spPr>
+        <p:style>
+          <a:lnRef idx="1">
+            <a:schemeClr val="accent1"/>
+          </a:lnRef>
+          <a:fillRef idx="3">
+            <a:schemeClr val="accent1"/>
+          </a:fillRef>
+          <a:effectRef idx="2">
+            <a:schemeClr val="accent1"/>
+          </a:effectRef>
+          <a:fontRef idx="minor">
+            <a:schemeClr val="lt1"/>
+          </a:fontRef>
+        </p:style>
+        <p:txBody>
+          <a:bodyPr rtlCol="0" anchor="ctr"/>
+          <a:lstStyle/>
+          <a:p>
+            <a:pPr algn="ctr"/>
+            <a:endParaRPr/>
+          </a:p>
+        </p:txBody>
+      </p:sp>
+      <p:sp>
+        <p:nvSpPr>
+          <p:cNvPr id="11" name="TextBox 10">
+            <a:extLst>
+              <a:ext uri="{FF2B5EF4-FFF2-40B4-BE49-F238E27FC236}">
+                <a16:creationId xmlns:a16="http://schemas.microsoft.com/office/drawing/2014/main" id="{DBC74321-C610-7945-5DCE-9D3A5254DFF2}"/>
+              </a:ext>
+            </a:extLst>
+          </p:cNvPr>
+          <p:cNvSpPr txBox="1"/>
+          <p:nvPr/>
+        </p:nvSpPr>
+        <p:spPr>
+          <a:xfrm>
+            <a:off x="2953512" y="2688336"/>
+            <a:ext cx="1527048" cy="276999"/>
+          </a:xfrm>
+          <a:prstGeom prst="rect">
+            <a:avLst/>
+          </a:prstGeom>
+          <a:solidFill>
+            <a:schemeClr val="bg1"/>
+          </a:solidFill>
+          <a:ln>
+            <a:noFill/>
+          </a:ln>
+        </p:spPr>
+        <p:txBody>
+          <a:bodyPr wrap="square">
+            <a:spAutoFit/>
+          </a:bodyPr>
+          <a:lstStyle/>
+          <a:p>
+            <a:pPr algn="ctr">
+              <a:defRPr sz="1200" b="1">
+                <a:solidFill>
+                  <a:srgbClr val="0D1117"/>
+                </a:solidFill>
+                <a:latin typeface="Aptos"/>
+              </a:defRPr>
+            </a:pPr>
+            <a:r>
+              <a:rPr dirty="0"/>
+              <a:t>42-</a:t>
+            </a:r>
+            <a:r>
+              <a:rPr lang="en-GB" dirty="0"/>
+              <a:t>file-opening</a:t>
+            </a:r>
+            <a:endParaRPr dirty="0"/>
+          </a:p>
+        </p:txBody>
+      </p:sp>
+      <p:sp>
+        <p:nvSpPr>
+          <p:cNvPr id="12" name="TextBox 11">
+            <a:extLst>
+              <a:ext uri="{FF2B5EF4-FFF2-40B4-BE49-F238E27FC236}">
+                <a16:creationId xmlns:a16="http://schemas.microsoft.com/office/drawing/2014/main" id="{263DE7DA-C5D5-51F2-8D1D-D50BE6FE3C30}"/>
+              </a:ext>
+            </a:extLst>
+          </p:cNvPr>
+          <p:cNvSpPr txBox="1"/>
+          <p:nvPr/>
+        </p:nvSpPr>
+        <p:spPr>
+          <a:xfrm>
+            <a:off x="2953512" y="3136392"/>
+            <a:ext cx="1527048" cy="338554"/>
+          </a:xfrm>
+          <a:prstGeom prst="rect">
+            <a:avLst/>
+          </a:prstGeom>
+          <a:solidFill>
+            <a:schemeClr val="bg1"/>
+          </a:solidFill>
+          <a:ln>
+            <a:noFill/>
+          </a:ln>
+        </p:spPr>
+        <p:txBody>
+          <a:bodyPr wrap="square">
+            <a:spAutoFit/>
+          </a:bodyPr>
+          <a:lstStyle/>
+          <a:p>
+            <a:pPr algn="ctr">
+              <a:defRPr sz="1300" b="1">
+                <a:solidFill>
+                  <a:srgbClr val="0969DA"/>
+                </a:solidFill>
+                <a:latin typeface="Aptos"/>
+              </a:defRPr>
+            </a:pPr>
+            <a:r>
+              <a:rPr sz="1600"/>
+              <a:t>Branch</a:t>
+            </a:r>
+          </a:p>
+        </p:txBody>
+      </p:sp>
+      <p:sp>
+        <p:nvSpPr>
+          <p:cNvPr id="13" name="TextBox 12">
+            <a:extLst>
+              <a:ext uri="{FF2B5EF4-FFF2-40B4-BE49-F238E27FC236}">
+                <a16:creationId xmlns:a16="http://schemas.microsoft.com/office/drawing/2014/main" id="{DAEFC2D0-67EB-C4EF-C681-C1189FBE7563}"/>
+              </a:ext>
+            </a:extLst>
+          </p:cNvPr>
+          <p:cNvSpPr txBox="1"/>
+          <p:nvPr/>
+        </p:nvSpPr>
+        <p:spPr>
+          <a:xfrm>
+            <a:off x="2953512" y="3584448"/>
+            <a:ext cx="1527048" cy="274320"/>
+          </a:xfrm>
+          <a:prstGeom prst="rect">
+            <a:avLst/>
+          </a:prstGeom>
+          <a:solidFill>
+            <a:schemeClr val="bg1"/>
+          </a:solidFill>
+          <a:ln>
+            <a:noFill/>
+          </a:ln>
+        </p:spPr>
+        <p:txBody>
+          <a:bodyPr wrap="square">
+            <a:spAutoFit/>
+          </a:bodyPr>
+          <a:lstStyle/>
+          <a:p>
+            <a:pPr algn="ctr">
+              <a:defRPr sz="1100" b="0">
+                <a:solidFill>
+                  <a:srgbClr val="57606A"/>
+                </a:solidFill>
+                <a:latin typeface="Aptos"/>
+              </a:defRPr>
+            </a:pPr>
+            <a:r>
+              <a:t>Implement</a:t>
+            </a:r>
+          </a:p>
+        </p:txBody>
+      </p:sp>
+      <p:sp>
+        <p:nvSpPr>
+          <p:cNvPr id="14" name="TextBox 13">
+            <a:extLst>
+              <a:ext uri="{FF2B5EF4-FFF2-40B4-BE49-F238E27FC236}">
+                <a16:creationId xmlns:a16="http://schemas.microsoft.com/office/drawing/2014/main" id="{EC8A70DC-EE81-223C-AD29-D0F8CFF67BC4}"/>
+              </a:ext>
+            </a:extLst>
+          </p:cNvPr>
+          <p:cNvSpPr txBox="1"/>
+          <p:nvPr/>
+        </p:nvSpPr>
+        <p:spPr>
+          <a:xfrm>
+            <a:off x="4572000" y="3063240"/>
+            <a:ext cx="658368" cy="338554"/>
+          </a:xfrm>
+          <a:prstGeom prst="rect">
+            <a:avLst/>
+          </a:prstGeom>
+          <a:solidFill>
+            <a:schemeClr val="bg1"/>
+          </a:solidFill>
+          <a:ln>
+            <a:noFill/>
+          </a:ln>
+        </p:spPr>
+        <p:txBody>
+          <a:bodyPr wrap="square">
+            <a:spAutoFit/>
+          </a:bodyPr>
+          <a:lstStyle/>
+          <a:p>
+            <a:pPr algn="ctr">
+              <a:defRPr sz="2400" b="1">
+                <a:solidFill>
+                  <a:srgbClr val="57606A"/>
+                </a:solidFill>
+                <a:latin typeface="Aptos"/>
+              </a:defRPr>
+            </a:pPr>
+            <a:r>
+              <a:rPr sz="1600"/>
+              <a:t>→</a:t>
+            </a:r>
+          </a:p>
+        </p:txBody>
+      </p:sp>
+      <p:sp>
+        <p:nvSpPr>
+          <p:cNvPr id="15" name="Rounded Rectangle 14">
+            <a:extLst>
+              <a:ext uri="{FF2B5EF4-FFF2-40B4-BE49-F238E27FC236}">
+                <a16:creationId xmlns:a16="http://schemas.microsoft.com/office/drawing/2014/main" id="{A3FB98A9-21BA-81FE-CCC3-0C443EA648FA}"/>
+              </a:ext>
+            </a:extLst>
+          </p:cNvPr>
+          <p:cNvSpPr/>
+          <p:nvPr/>
+        </p:nvSpPr>
+        <p:spPr>
+          <a:xfrm>
+            <a:off x="5257800" y="2423160"/>
+            <a:ext cx="1673352" cy="1828800"/>
+          </a:xfrm>
+          <a:prstGeom prst="roundRect">
+            <a:avLst/>
+          </a:prstGeom>
+          <a:solidFill>
+            <a:schemeClr val="bg1"/>
+          </a:solidFill>
+          <a:ln>
+            <a:solidFill>
+              <a:schemeClr val="bg1">
+                <a:lumMod val="85000"/>
+              </a:schemeClr>
+            </a:solidFill>
+          </a:ln>
+        </p:spPr>
+        <p:style>
+          <a:lnRef idx="1">
+            <a:schemeClr val="accent1"/>
+          </a:lnRef>
+          <a:fillRef idx="3">
+            <a:schemeClr val="accent1"/>
+          </a:fillRef>
+          <a:effectRef idx="2">
+            <a:schemeClr val="accent1"/>
+          </a:effectRef>
+          <a:fontRef idx="minor">
+            <a:schemeClr val="lt1"/>
+          </a:fontRef>
+        </p:style>
+        <p:txBody>
+          <a:bodyPr rtlCol="0" anchor="ctr"/>
+          <a:lstStyle/>
+          <a:p>
+            <a:pPr algn="ctr"/>
+            <a:endParaRPr/>
+          </a:p>
+        </p:txBody>
+      </p:sp>
+      <p:sp>
+        <p:nvSpPr>
+          <p:cNvPr id="16" name="TextBox 15">
+            <a:extLst>
+              <a:ext uri="{FF2B5EF4-FFF2-40B4-BE49-F238E27FC236}">
+                <a16:creationId xmlns:a16="http://schemas.microsoft.com/office/drawing/2014/main" id="{8AE38D3C-2422-B42F-BE32-27F80846F057}"/>
+              </a:ext>
+            </a:extLst>
+          </p:cNvPr>
+          <p:cNvSpPr txBox="1"/>
+          <p:nvPr/>
+        </p:nvSpPr>
+        <p:spPr>
+          <a:xfrm>
+            <a:off x="5330952" y="2688336"/>
+            <a:ext cx="1527048" cy="347472"/>
+          </a:xfrm>
+          <a:prstGeom prst="rect">
+            <a:avLst/>
+          </a:prstGeom>
+          <a:solidFill>
+            <a:schemeClr val="bg1"/>
+          </a:solidFill>
+          <a:ln>
+            <a:noFill/>
+          </a:ln>
+        </p:spPr>
+        <p:txBody>
+          <a:bodyPr wrap="square">
+            <a:spAutoFit/>
+          </a:bodyPr>
+          <a:lstStyle/>
+          <a:p>
+            <a:pPr algn="ctr">
+              <a:defRPr sz="1600" b="1">
+                <a:solidFill>
+                  <a:srgbClr val="0D1117"/>
+                </a:solidFill>
+                <a:latin typeface="Aptos"/>
+              </a:defRPr>
+            </a:pPr>
+            <a:r>
+              <a:rPr dirty="0"/>
+              <a:t>Commit</a:t>
+            </a:r>
+          </a:p>
+        </p:txBody>
+      </p:sp>
+      <p:sp>
+        <p:nvSpPr>
+          <p:cNvPr id="17" name="TextBox 16">
+            <a:extLst>
+              <a:ext uri="{FF2B5EF4-FFF2-40B4-BE49-F238E27FC236}">
+                <a16:creationId xmlns:a16="http://schemas.microsoft.com/office/drawing/2014/main" id="{69F14385-7ED8-3E0D-2B77-B9DDB93902FF}"/>
+              </a:ext>
+            </a:extLst>
+          </p:cNvPr>
+          <p:cNvSpPr txBox="1"/>
+          <p:nvPr/>
+        </p:nvSpPr>
+        <p:spPr>
+          <a:xfrm>
+            <a:off x="5330952" y="3136392"/>
+            <a:ext cx="1527048" cy="338554"/>
+          </a:xfrm>
+          <a:prstGeom prst="rect">
+            <a:avLst/>
+          </a:prstGeom>
+          <a:solidFill>
+            <a:schemeClr val="bg1"/>
+          </a:solidFill>
+          <a:ln>
+            <a:noFill/>
+          </a:ln>
+        </p:spPr>
+        <p:txBody>
+          <a:bodyPr wrap="square">
+            <a:spAutoFit/>
+          </a:bodyPr>
+          <a:lstStyle/>
+          <a:p>
+            <a:pPr algn="ctr">
+              <a:defRPr sz="1300" b="1">
+                <a:solidFill>
+                  <a:srgbClr val="0969DA"/>
+                </a:solidFill>
+                <a:latin typeface="Aptos"/>
+              </a:defRPr>
+            </a:pPr>
+            <a:r>
+              <a:rPr sz="1600" dirty="0"/>
+              <a:t>Changes</a:t>
+            </a:r>
+          </a:p>
+        </p:txBody>
+      </p:sp>
+      <p:sp>
+        <p:nvSpPr>
+          <p:cNvPr id="18" name="TextBox 17">
+            <a:extLst>
+              <a:ext uri="{FF2B5EF4-FFF2-40B4-BE49-F238E27FC236}">
+                <a16:creationId xmlns:a16="http://schemas.microsoft.com/office/drawing/2014/main" id="{4841ED73-78F6-B061-0EA1-88AA02A219C1}"/>
+              </a:ext>
+            </a:extLst>
+          </p:cNvPr>
+          <p:cNvSpPr txBox="1"/>
+          <p:nvPr/>
+        </p:nvSpPr>
+        <p:spPr>
+          <a:xfrm>
+            <a:off x="5330952" y="3584448"/>
+            <a:ext cx="1527048" cy="274320"/>
+          </a:xfrm>
+          <a:prstGeom prst="rect">
+            <a:avLst/>
+          </a:prstGeom>
+          <a:solidFill>
+            <a:schemeClr val="bg1"/>
+          </a:solidFill>
+          <a:ln>
+            <a:noFill/>
+          </a:ln>
+        </p:spPr>
+        <p:txBody>
+          <a:bodyPr wrap="square">
+            <a:spAutoFit/>
+          </a:bodyPr>
+          <a:lstStyle/>
+          <a:p>
+            <a:pPr algn="ctr">
+              <a:defRPr sz="1100" b="0">
+                <a:solidFill>
+                  <a:srgbClr val="57606A"/>
+                </a:solidFill>
+                <a:latin typeface="Aptos"/>
+              </a:defRPr>
+            </a:pPr>
+            <a:r>
+              <a:t>Build &amp; test</a:t>
+            </a:r>
+          </a:p>
+        </p:txBody>
+      </p:sp>
+      <p:sp>
+        <p:nvSpPr>
+          <p:cNvPr id="19" name="TextBox 18">
+            <a:extLst>
+              <a:ext uri="{FF2B5EF4-FFF2-40B4-BE49-F238E27FC236}">
+                <a16:creationId xmlns:a16="http://schemas.microsoft.com/office/drawing/2014/main" id="{D1149AEE-3406-437A-A4DF-859A4E26535E}"/>
+              </a:ext>
+            </a:extLst>
+          </p:cNvPr>
+          <p:cNvSpPr txBox="1"/>
+          <p:nvPr/>
+        </p:nvSpPr>
+        <p:spPr>
+          <a:xfrm>
+            <a:off x="6949440" y="3063240"/>
+            <a:ext cx="658368" cy="338554"/>
+          </a:xfrm>
+          <a:prstGeom prst="rect">
+            <a:avLst/>
+          </a:prstGeom>
+          <a:solidFill>
+            <a:schemeClr val="bg1"/>
+          </a:solidFill>
+          <a:ln>
+            <a:noFill/>
+          </a:ln>
+        </p:spPr>
+        <p:txBody>
+          <a:bodyPr wrap="square">
+            <a:spAutoFit/>
+          </a:bodyPr>
+          <a:lstStyle/>
+          <a:p>
+            <a:pPr algn="ctr">
+              <a:defRPr sz="2400" b="1">
+                <a:solidFill>
+                  <a:srgbClr val="57606A"/>
+                </a:solidFill>
+                <a:latin typeface="Aptos"/>
+              </a:defRPr>
+            </a:pPr>
+            <a:r>
+              <a:rPr sz="1600"/>
+              <a:t>→</a:t>
+            </a:r>
+          </a:p>
+        </p:txBody>
+      </p:sp>
+      <p:sp>
+        <p:nvSpPr>
+          <p:cNvPr id="20" name="Rounded Rectangle 19">
+            <a:extLst>
+              <a:ext uri="{FF2B5EF4-FFF2-40B4-BE49-F238E27FC236}">
+                <a16:creationId xmlns:a16="http://schemas.microsoft.com/office/drawing/2014/main" id="{8F14F320-266E-5831-13D6-BA3FCC9A8BB3}"/>
+              </a:ext>
+            </a:extLst>
+          </p:cNvPr>
+          <p:cNvSpPr/>
+          <p:nvPr/>
+        </p:nvSpPr>
+        <p:spPr>
+          <a:xfrm>
+            <a:off x="7635240" y="2423160"/>
+            <a:ext cx="1673352" cy="1828800"/>
+          </a:xfrm>
+          <a:prstGeom prst="roundRect">
+            <a:avLst/>
+          </a:prstGeom>
+          <a:solidFill>
+            <a:schemeClr val="bg1"/>
+          </a:solidFill>
+          <a:ln>
+            <a:solidFill>
+              <a:schemeClr val="bg1">
+                <a:lumMod val="85000"/>
+              </a:schemeClr>
+            </a:solidFill>
+          </a:ln>
+        </p:spPr>
+        <p:style>
+          <a:lnRef idx="1">
+            <a:schemeClr val="accent1"/>
+          </a:lnRef>
+          <a:fillRef idx="3">
+            <a:schemeClr val="accent1"/>
+          </a:fillRef>
+          <a:effectRef idx="2">
+            <a:schemeClr val="accent1"/>
+          </a:effectRef>
+          <a:fontRef idx="minor">
+            <a:schemeClr val="lt1"/>
+          </a:fontRef>
+        </p:style>
+        <p:txBody>
+          <a:bodyPr rtlCol="0" anchor="ctr"/>
+          <a:lstStyle/>
+          <a:p>
+            <a:pPr algn="ctr"/>
+            <a:endParaRPr/>
+          </a:p>
+        </p:txBody>
+      </p:sp>
+      <p:sp>
+        <p:nvSpPr>
+          <p:cNvPr id="21" name="TextBox 20">
+            <a:extLst>
+              <a:ext uri="{FF2B5EF4-FFF2-40B4-BE49-F238E27FC236}">
+                <a16:creationId xmlns:a16="http://schemas.microsoft.com/office/drawing/2014/main" id="{C64D9D16-8357-7E93-DDE4-E131FC07BAB2}"/>
+              </a:ext>
+            </a:extLst>
+          </p:cNvPr>
+          <p:cNvSpPr txBox="1"/>
+          <p:nvPr/>
+        </p:nvSpPr>
+        <p:spPr>
+          <a:xfrm>
+            <a:off x="7708392" y="2688336"/>
+            <a:ext cx="1527048" cy="347472"/>
+          </a:xfrm>
+          <a:prstGeom prst="rect">
+            <a:avLst/>
+          </a:prstGeom>
+          <a:solidFill>
+            <a:schemeClr val="bg1"/>
+          </a:solidFill>
+          <a:ln>
+            <a:noFill/>
+          </a:ln>
+        </p:spPr>
+        <p:txBody>
+          <a:bodyPr wrap="square">
+            <a:spAutoFit/>
+          </a:bodyPr>
+          <a:lstStyle/>
+          <a:p>
+            <a:pPr algn="ctr">
+              <a:defRPr sz="1600" b="1">
+                <a:solidFill>
+                  <a:srgbClr val="0D1117"/>
+                </a:solidFill>
+                <a:latin typeface="Aptos"/>
+              </a:defRPr>
+            </a:pPr>
+            <a:r>
+              <a:t>PR #61</a:t>
+            </a:r>
+          </a:p>
+        </p:txBody>
+      </p:sp>
+      <p:sp>
+        <p:nvSpPr>
+          <p:cNvPr id="22" name="TextBox 21">
+            <a:extLst>
+              <a:ext uri="{FF2B5EF4-FFF2-40B4-BE49-F238E27FC236}">
+                <a16:creationId xmlns:a16="http://schemas.microsoft.com/office/drawing/2014/main" id="{1B8D24EE-434D-B5D2-07EE-9D0CBA52CCDB}"/>
+              </a:ext>
+            </a:extLst>
+          </p:cNvPr>
+          <p:cNvSpPr txBox="1"/>
+          <p:nvPr/>
+        </p:nvSpPr>
+        <p:spPr>
+          <a:xfrm>
+            <a:off x="7708392" y="3136392"/>
+            <a:ext cx="1527048" cy="338554"/>
+          </a:xfrm>
+          <a:prstGeom prst="rect">
+            <a:avLst/>
+          </a:prstGeom>
+          <a:solidFill>
+            <a:schemeClr val="bg1"/>
+          </a:solidFill>
+          <a:ln>
+            <a:noFill/>
+          </a:ln>
+        </p:spPr>
+        <p:txBody>
+          <a:bodyPr wrap="square">
+            <a:spAutoFit/>
+          </a:bodyPr>
+          <a:lstStyle/>
+          <a:p>
+            <a:pPr algn="ctr">
+              <a:defRPr sz="1300" b="1">
+                <a:solidFill>
+                  <a:srgbClr val="0969DA"/>
+                </a:solidFill>
+                <a:latin typeface="Aptos"/>
+              </a:defRPr>
+            </a:pPr>
+            <a:r>
+              <a:rPr sz="1600" dirty="0"/>
+              <a:t>Pull</a:t>
+            </a:r>
+            <a:r>
+              <a:rPr lang="en-GB" sz="1600" dirty="0"/>
+              <a:t> Request</a:t>
+            </a:r>
+            <a:endParaRPr sz="1600" dirty="0"/>
+          </a:p>
+        </p:txBody>
+      </p:sp>
+      <p:sp>
+        <p:nvSpPr>
+          <p:cNvPr id="23" name="TextBox 22">
+            <a:extLst>
+              <a:ext uri="{FF2B5EF4-FFF2-40B4-BE49-F238E27FC236}">
+                <a16:creationId xmlns:a16="http://schemas.microsoft.com/office/drawing/2014/main" id="{B0D1C09F-1997-C397-8E23-66EF516DF355}"/>
+              </a:ext>
+            </a:extLst>
+          </p:cNvPr>
+          <p:cNvSpPr txBox="1"/>
+          <p:nvPr/>
+        </p:nvSpPr>
+        <p:spPr>
+          <a:xfrm>
+            <a:off x="7708392" y="3584448"/>
+            <a:ext cx="1527048" cy="274320"/>
+          </a:xfrm>
+          <a:prstGeom prst="rect">
+            <a:avLst/>
+          </a:prstGeom>
+          <a:solidFill>
+            <a:schemeClr val="bg1"/>
+          </a:solidFill>
+          <a:ln>
+            <a:noFill/>
+          </a:ln>
+        </p:spPr>
+        <p:txBody>
+          <a:bodyPr wrap="square">
+            <a:spAutoFit/>
+          </a:bodyPr>
+          <a:lstStyle/>
+          <a:p>
+            <a:pPr algn="ctr">
+              <a:defRPr sz="1100" b="0">
+                <a:solidFill>
+                  <a:srgbClr val="57606A"/>
+                </a:solidFill>
+                <a:latin typeface="Aptos"/>
+              </a:defRPr>
+            </a:pPr>
+            <a:r>
+              <a:t>Review</a:t>
+            </a:r>
+          </a:p>
+        </p:txBody>
+      </p:sp>
+      <p:sp>
+        <p:nvSpPr>
+          <p:cNvPr id="24" name="TextBox 23">
+            <a:extLst>
+              <a:ext uri="{FF2B5EF4-FFF2-40B4-BE49-F238E27FC236}">
+                <a16:creationId xmlns:a16="http://schemas.microsoft.com/office/drawing/2014/main" id="{7F007551-ABA3-84DE-A768-89480F0344A9}"/>
+              </a:ext>
+            </a:extLst>
+          </p:cNvPr>
+          <p:cNvSpPr txBox="1"/>
+          <p:nvPr/>
+        </p:nvSpPr>
+        <p:spPr>
+          <a:xfrm>
+            <a:off x="9326880" y="3063240"/>
+            <a:ext cx="658368" cy="338554"/>
+          </a:xfrm>
+          <a:prstGeom prst="rect">
+            <a:avLst/>
+          </a:prstGeom>
+          <a:solidFill>
+            <a:schemeClr val="bg1"/>
+          </a:solidFill>
+          <a:ln>
+            <a:noFill/>
+          </a:ln>
+        </p:spPr>
+        <p:txBody>
+          <a:bodyPr wrap="square">
+            <a:spAutoFit/>
+          </a:bodyPr>
+          <a:lstStyle/>
+          <a:p>
+            <a:pPr algn="ctr">
+              <a:defRPr sz="2400" b="1">
+                <a:solidFill>
+                  <a:srgbClr val="57606A"/>
+                </a:solidFill>
+                <a:latin typeface="Aptos"/>
+              </a:defRPr>
+            </a:pPr>
+            <a:r>
+              <a:rPr sz="1600"/>
+              <a:t>→</a:t>
+            </a:r>
+          </a:p>
+        </p:txBody>
+      </p:sp>
+      <p:sp>
+        <p:nvSpPr>
+          <p:cNvPr id="36" name="Rounded Rectangle 35">
+            <a:extLst>
+              <a:ext uri="{FF2B5EF4-FFF2-40B4-BE49-F238E27FC236}">
+                <a16:creationId xmlns:a16="http://schemas.microsoft.com/office/drawing/2014/main" id="{F7A23EC5-630F-B8BC-4886-AB90C75D64A0}"/>
+              </a:ext>
+            </a:extLst>
+          </p:cNvPr>
+          <p:cNvSpPr/>
+          <p:nvPr/>
+        </p:nvSpPr>
+        <p:spPr>
+          <a:xfrm>
+            <a:off x="10012680" y="2423160"/>
+            <a:ext cx="1673352" cy="1828800"/>
+          </a:xfrm>
+          <a:prstGeom prst="roundRect">
+            <a:avLst/>
+          </a:prstGeom>
+          <a:solidFill>
+            <a:schemeClr val="bg1"/>
+          </a:solidFill>
+          <a:ln>
+            <a:solidFill>
+              <a:schemeClr val="bg1">
+                <a:lumMod val="85000"/>
+              </a:schemeClr>
+            </a:solidFill>
+          </a:ln>
+        </p:spPr>
+        <p:style>
+          <a:lnRef idx="1">
+            <a:schemeClr val="accent1"/>
+          </a:lnRef>
+          <a:fillRef idx="3">
+            <a:schemeClr val="accent1"/>
+          </a:fillRef>
+          <a:effectRef idx="2">
+            <a:schemeClr val="accent1"/>
+          </a:effectRef>
+          <a:fontRef idx="minor">
+            <a:schemeClr val="lt1"/>
+          </a:fontRef>
+        </p:style>
+        <p:txBody>
+          <a:bodyPr rtlCol="0" anchor="ctr"/>
+          <a:lstStyle/>
+          <a:p>
+            <a:pPr algn="ctr"/>
+            <a:endParaRPr/>
+          </a:p>
+        </p:txBody>
+      </p:sp>
+      <p:sp>
+        <p:nvSpPr>
+          <p:cNvPr id="37" name="TextBox 36">
+            <a:extLst>
+              <a:ext uri="{FF2B5EF4-FFF2-40B4-BE49-F238E27FC236}">
+                <a16:creationId xmlns:a16="http://schemas.microsoft.com/office/drawing/2014/main" id="{44026F7B-1F93-E20D-570B-82FA32BCE5D4}"/>
+              </a:ext>
+            </a:extLst>
+          </p:cNvPr>
+          <p:cNvSpPr txBox="1"/>
+          <p:nvPr/>
+        </p:nvSpPr>
+        <p:spPr>
+          <a:xfrm>
+            <a:off x="10085832" y="2688336"/>
+            <a:ext cx="1527048" cy="347472"/>
+          </a:xfrm>
+          <a:prstGeom prst="rect">
+            <a:avLst/>
+          </a:prstGeom>
+          <a:solidFill>
+            <a:schemeClr val="bg1"/>
+          </a:solidFill>
+          <a:ln>
+            <a:noFill/>
+          </a:ln>
+        </p:spPr>
+        <p:txBody>
+          <a:bodyPr wrap="square">
+            <a:spAutoFit/>
+          </a:bodyPr>
+          <a:lstStyle/>
+          <a:p>
+            <a:pPr algn="ctr">
+              <a:defRPr sz="1600" b="1">
+                <a:solidFill>
+                  <a:srgbClr val="0D1117"/>
+                </a:solidFill>
+                <a:latin typeface="Aptos"/>
+              </a:defRPr>
+            </a:pPr>
+            <a:r>
+              <a:t>main</a:t>
+            </a:r>
+          </a:p>
+        </p:txBody>
+      </p:sp>
+      <p:sp>
+        <p:nvSpPr>
+          <p:cNvPr id="38" name="TextBox 37">
+            <a:extLst>
+              <a:ext uri="{FF2B5EF4-FFF2-40B4-BE49-F238E27FC236}">
+                <a16:creationId xmlns:a16="http://schemas.microsoft.com/office/drawing/2014/main" id="{866FDA7E-874A-81BC-D017-EAC2DA65D85F}"/>
+              </a:ext>
+            </a:extLst>
+          </p:cNvPr>
+          <p:cNvSpPr txBox="1"/>
+          <p:nvPr/>
+        </p:nvSpPr>
+        <p:spPr>
+          <a:xfrm>
+            <a:off x="10085832" y="3128474"/>
+            <a:ext cx="1527048" cy="338554"/>
+          </a:xfrm>
+          <a:prstGeom prst="rect">
+            <a:avLst/>
+          </a:prstGeom>
+          <a:solidFill>
+            <a:schemeClr val="bg1"/>
+          </a:solidFill>
+          <a:ln>
+            <a:noFill/>
+          </a:ln>
+        </p:spPr>
+        <p:txBody>
+          <a:bodyPr wrap="square">
+            <a:spAutoFit/>
+          </a:bodyPr>
+          <a:lstStyle/>
+          <a:p>
+            <a:pPr algn="ctr">
+              <a:defRPr sz="1300" b="1">
+                <a:solidFill>
+                  <a:srgbClr val="1F883D"/>
+                </a:solidFill>
+                <a:latin typeface="Aptos"/>
+              </a:defRPr>
+            </a:pPr>
+            <a:r>
+              <a:rPr sz="1600" dirty="0"/>
+              <a:t>Merge</a:t>
+            </a:r>
+          </a:p>
+        </p:txBody>
+      </p:sp>
+      <p:sp>
+        <p:nvSpPr>
+          <p:cNvPr id="39" name="TextBox 38">
+            <a:extLst>
+              <a:ext uri="{FF2B5EF4-FFF2-40B4-BE49-F238E27FC236}">
+                <a16:creationId xmlns:a16="http://schemas.microsoft.com/office/drawing/2014/main" id="{C2ECEBE4-F770-0D09-836E-462FE540951F}"/>
+              </a:ext>
+            </a:extLst>
+          </p:cNvPr>
+          <p:cNvSpPr txBox="1"/>
+          <p:nvPr/>
+        </p:nvSpPr>
+        <p:spPr>
+          <a:xfrm>
+            <a:off x="10085832" y="3584448"/>
+            <a:ext cx="1527048" cy="261610"/>
+          </a:xfrm>
+          <a:prstGeom prst="rect">
+            <a:avLst/>
+          </a:prstGeom>
+          <a:solidFill>
+            <a:schemeClr val="bg1"/>
+          </a:solidFill>
+          <a:ln>
+            <a:noFill/>
+          </a:ln>
+        </p:spPr>
+        <p:txBody>
+          <a:bodyPr wrap="square">
+            <a:spAutoFit/>
+          </a:bodyPr>
+          <a:lstStyle/>
+          <a:p>
+            <a:pPr algn="ctr">
+              <a:defRPr sz="1100" b="0">
+                <a:solidFill>
+                  <a:srgbClr val="57606A"/>
+                </a:solidFill>
+                <a:latin typeface="Aptos"/>
+              </a:defRPr>
+            </a:pPr>
+            <a:r>
+              <a:rPr dirty="0"/>
+              <a:t>Close</a:t>
+            </a:r>
+            <a:r>
+              <a:rPr lang="en-GB" dirty="0"/>
+              <a:t>s</a:t>
+            </a:r>
+            <a:r>
+              <a:rPr dirty="0"/>
+              <a:t> issue</a:t>
+            </a:r>
+          </a:p>
+        </p:txBody>
+      </p:sp>
+      <p:sp>
+        <p:nvSpPr>
+          <p:cNvPr id="2" name="Curved Up Arrow 1">
+            <a:extLst>
+              <a:ext uri="{FF2B5EF4-FFF2-40B4-BE49-F238E27FC236}">
+                <a16:creationId xmlns:a16="http://schemas.microsoft.com/office/drawing/2014/main" id="{9FAA02B8-34B7-28B6-3811-63E969D576E4}"/>
+              </a:ext>
+            </a:extLst>
+          </p:cNvPr>
+          <p:cNvSpPr/>
+          <p:nvPr/>
+        </p:nvSpPr>
+        <p:spPr>
+          <a:xfrm flipH="1">
+            <a:off x="6351651" y="4251960"/>
+            <a:ext cx="1863090" cy="868680"/>
+          </a:xfrm>
+          <a:prstGeom prst="curvedUpArrow">
+            <a:avLst/>
+          </a:prstGeom>
+        </p:spPr>
+        <p:style>
+          <a:lnRef idx="2">
+            <a:schemeClr val="dk1">
+              <a:shade val="15000"/>
+            </a:schemeClr>
+          </a:lnRef>
+          <a:fillRef idx="1">
+            <a:schemeClr val="dk1"/>
+          </a:fillRef>
+          <a:effectRef idx="0">
+            <a:schemeClr val="dk1"/>
+          </a:effectRef>
+          <a:fontRef idx="minor">
+            <a:schemeClr val="lt1"/>
+          </a:fontRef>
+        </p:style>
+        <p:txBody>
+          <a:bodyPr rtlCol="0" anchor="ctr"/>
+          <a:lstStyle/>
+          <a:p>
+            <a:pPr algn="ctr"/>
+            <a:endParaRPr lang="en-US">
+              <a:solidFill>
+                <a:schemeClr val="tx1"/>
+              </a:solidFill>
+            </a:endParaRPr>
+          </a:p>
+        </p:txBody>
+      </p:sp>
+    </p:spTree>
+    <p:extLst>
+      <p:ext uri="{BB962C8B-B14F-4D97-AF65-F5344CB8AC3E}">
+        <p14:creationId xmlns:p14="http://schemas.microsoft.com/office/powerpoint/2010/main" val="3904824348"/>
+      </p:ext>
+    </p:extLst>
+  </p:cSld>
+  <p:clrMapOvr>
+    <a:masterClrMapping/>
+  </p:clrMapOvr>
+</p:sld>
+</file>
+
+<file path=ppt/slides/slide31.xml><?xml version="1.0" encoding="utf-8"?>
 <p:sld xmlns:a="http://schemas.openxmlformats.org/drawingml/2006/main" xmlns:r="http://schemas.openxmlformats.org/officeDocument/2006/relationships" xmlns:p="http://schemas.openxmlformats.org/presentationml/2006/main">
   <p:cSld>
     <p:bg>
@@ -17834,60 +18125,6 @@
       </p:sp>
       <p:sp>
         <p:nvSpPr>
-          <p:cNvPr id="26" name="Rounded Rectangle 25">
-            <a:extLst>
-              <a:ext uri="{FF2B5EF4-FFF2-40B4-BE49-F238E27FC236}">
-                <a16:creationId xmlns:a16="http://schemas.microsoft.com/office/drawing/2014/main" id="{20405B18-6730-DEDB-60CE-522A70743FF6}"/>
-              </a:ext>
-            </a:extLst>
-          </p:cNvPr>
-          <p:cNvSpPr/>
-          <p:nvPr/>
-        </p:nvSpPr>
-        <p:spPr>
-          <a:xfrm>
-            <a:off x="731520" y="2514600"/>
-            <a:ext cx="5074920" cy="1325880"/>
-          </a:xfrm>
-          <a:prstGeom prst="roundRect">
-            <a:avLst/>
-          </a:prstGeom>
-          <a:solidFill>
-            <a:schemeClr val="bg1"/>
-          </a:solidFill>
-          <a:ln>
-            <a:solidFill>
-              <a:schemeClr val="bg1">
-                <a:lumMod val="95000"/>
-              </a:schemeClr>
-            </a:solidFill>
-          </a:ln>
-        </p:spPr>
-        <p:style>
-          <a:lnRef idx="1">
-            <a:schemeClr val="accent1"/>
-          </a:lnRef>
-          <a:fillRef idx="3">
-            <a:schemeClr val="accent1"/>
-          </a:fillRef>
-          <a:effectRef idx="2">
-            <a:schemeClr val="accent1"/>
-          </a:effectRef>
-          <a:fontRef idx="minor">
-            <a:schemeClr val="lt1"/>
-          </a:fontRef>
-        </p:style>
-        <p:txBody>
-          <a:bodyPr rtlCol="0" anchor="ctr"/>
-          <a:lstStyle/>
-          <a:p>
-            <a:pPr algn="ctr"/>
-            <a:endParaRPr/>
-          </a:p>
-        </p:txBody>
-      </p:sp>
-      <p:sp>
-        <p:nvSpPr>
           <p:cNvPr id="27" name="TextBox 26">
             <a:extLst>
               <a:ext uri="{FF2B5EF4-FFF2-40B4-BE49-F238E27FC236}">
@@ -17982,60 +18219,6 @@
       </p:sp>
       <p:sp>
         <p:nvSpPr>
-          <p:cNvPr id="29" name="Rounded Rectangle 28">
-            <a:extLst>
-              <a:ext uri="{FF2B5EF4-FFF2-40B4-BE49-F238E27FC236}">
-                <a16:creationId xmlns:a16="http://schemas.microsoft.com/office/drawing/2014/main" id="{5604D235-87DB-B5EF-FE82-ED2C6E236D87}"/>
-              </a:ext>
-            </a:extLst>
-          </p:cNvPr>
-          <p:cNvSpPr/>
-          <p:nvPr/>
-        </p:nvSpPr>
-        <p:spPr>
-          <a:xfrm>
-            <a:off x="6217920" y="2514600"/>
-            <a:ext cx="5074920" cy="1325880"/>
-          </a:xfrm>
-          <a:prstGeom prst="roundRect">
-            <a:avLst/>
-          </a:prstGeom>
-          <a:solidFill>
-            <a:schemeClr val="bg1"/>
-          </a:solidFill>
-          <a:ln>
-            <a:solidFill>
-              <a:schemeClr val="bg1">
-                <a:lumMod val="95000"/>
-              </a:schemeClr>
-            </a:solidFill>
-          </a:ln>
-        </p:spPr>
-        <p:style>
-          <a:lnRef idx="1">
-            <a:schemeClr val="accent1"/>
-          </a:lnRef>
-          <a:fillRef idx="3">
-            <a:schemeClr val="accent1"/>
-          </a:fillRef>
-          <a:effectRef idx="2">
-            <a:schemeClr val="accent1"/>
-          </a:effectRef>
-          <a:fontRef idx="minor">
-            <a:schemeClr val="lt1"/>
-          </a:fontRef>
-        </p:style>
-        <p:txBody>
-          <a:bodyPr rtlCol="0" anchor="ctr"/>
-          <a:lstStyle/>
-          <a:p>
-            <a:pPr algn="ctr"/>
-            <a:endParaRPr/>
-          </a:p>
-        </p:txBody>
-      </p:sp>
-      <p:sp>
-        <p:nvSpPr>
           <p:cNvPr id="30" name="TextBox 29">
             <a:extLst>
               <a:ext uri="{FF2B5EF4-FFF2-40B4-BE49-F238E27FC236}">
@@ -18130,64 +18313,6 @@
       </p:sp>
       <p:sp>
         <p:nvSpPr>
-          <p:cNvPr id="32" name="Rounded Rectangle 31">
-            <a:extLst>
-              <a:ext uri="{FF2B5EF4-FFF2-40B4-BE49-F238E27FC236}">
-                <a16:creationId xmlns:a16="http://schemas.microsoft.com/office/drawing/2014/main" id="{EAEECCAB-5697-F630-5004-673C8BD0442E}"/>
-              </a:ext>
-            </a:extLst>
-          </p:cNvPr>
-          <p:cNvSpPr/>
-          <p:nvPr/>
-        </p:nvSpPr>
-        <p:spPr>
-          <a:xfrm>
-            <a:off x="731520" y="4251960"/>
-            <a:ext cx="5074920" cy="1325880"/>
-          </a:xfrm>
-          <a:prstGeom prst="roundRect">
-            <a:avLst/>
-          </a:prstGeom>
-          <a:solidFill>
-            <a:schemeClr val="bg1"/>
-          </a:solidFill>
-          <a:ln>
-            <a:solidFill>
-              <a:schemeClr val="bg1">
-                <a:lumMod val="95000"/>
-              </a:schemeClr>
-            </a:solidFill>
-          </a:ln>
-        </p:spPr>
-        <p:style>
-          <a:lnRef idx="1">
-            <a:schemeClr val="accent1"/>
-          </a:lnRef>
-          <a:fillRef idx="3">
-            <a:schemeClr val="accent1"/>
-          </a:fillRef>
-          <a:effectRef idx="2">
-            <a:schemeClr val="accent1"/>
-          </a:effectRef>
-          <a:fontRef idx="minor">
-            <a:schemeClr val="lt1"/>
-          </a:fontRef>
-        </p:style>
-        <p:txBody>
-          <a:bodyPr rtlCol="0" anchor="ctr"/>
-          <a:lstStyle/>
-          <a:p>
-            <a:pPr algn="ctr"/>
-            <a:endParaRPr>
-              <a:solidFill>
-                <a:schemeClr val="tx1"/>
-              </a:solidFill>
-            </a:endParaRPr>
-          </a:p>
-        </p:txBody>
-      </p:sp>
-      <p:sp>
-        <p:nvSpPr>
           <p:cNvPr id="33" name="TextBox 32">
             <a:extLst>
               <a:ext uri="{FF2B5EF4-FFF2-40B4-BE49-F238E27FC236}">
@@ -18277,64 +18402,6 @@
               </a:rPr>
               <a:t>Use acceptance criteria, reviews and linked tests to make "done" explicit.</a:t>
             </a:r>
-          </a:p>
-        </p:txBody>
-      </p:sp>
-      <p:sp>
-        <p:nvSpPr>
-          <p:cNvPr id="35" name="Rounded Rectangle 34">
-            <a:extLst>
-              <a:ext uri="{FF2B5EF4-FFF2-40B4-BE49-F238E27FC236}">
-                <a16:creationId xmlns:a16="http://schemas.microsoft.com/office/drawing/2014/main" id="{3894F5C0-8DD4-9DDA-E5BB-CCD67CB26585}"/>
-              </a:ext>
-            </a:extLst>
-          </p:cNvPr>
-          <p:cNvSpPr/>
-          <p:nvPr/>
-        </p:nvSpPr>
-        <p:spPr>
-          <a:xfrm>
-            <a:off x="6217920" y="4251960"/>
-            <a:ext cx="5074920" cy="1325880"/>
-          </a:xfrm>
-          <a:prstGeom prst="roundRect">
-            <a:avLst/>
-          </a:prstGeom>
-          <a:solidFill>
-            <a:schemeClr val="bg1"/>
-          </a:solidFill>
-          <a:ln>
-            <a:solidFill>
-              <a:schemeClr val="bg1">
-                <a:lumMod val="95000"/>
-              </a:schemeClr>
-            </a:solidFill>
-          </a:ln>
-        </p:spPr>
-        <p:style>
-          <a:lnRef idx="1">
-            <a:schemeClr val="accent1"/>
-          </a:lnRef>
-          <a:fillRef idx="3">
-            <a:schemeClr val="accent1"/>
-          </a:fillRef>
-          <a:effectRef idx="2">
-            <a:schemeClr val="accent1"/>
-          </a:effectRef>
-          <a:fontRef idx="minor">
-            <a:schemeClr val="lt1"/>
-          </a:fontRef>
-        </p:style>
-        <p:txBody>
-          <a:bodyPr rtlCol="0" anchor="ctr"/>
-          <a:lstStyle/>
-          <a:p>
-            <a:pPr algn="ctr"/>
-            <a:endParaRPr>
-              <a:solidFill>
-                <a:schemeClr val="tx1"/>
-              </a:solidFill>
-            </a:endParaRPr>
           </a:p>
         </p:txBody>
       </p:sp>
@@ -18445,7 +18512,561 @@
 </p:sld>
 </file>
 
-<file path=ppt/slides/slide31.xml><?xml version="1.0" encoding="utf-8"?>
+<file path=ppt/slides/slide32.xml><?xml version="1.0" encoding="utf-8"?>
+<p:sld xmlns:a="http://schemas.openxmlformats.org/drawingml/2006/main" xmlns:r="http://schemas.openxmlformats.org/officeDocument/2006/relationships" xmlns:p="http://schemas.openxmlformats.org/presentationml/2006/main">
+  <p:cSld>
+    <p:bg>
+      <p:bgPr>
+        <a:solidFill>
+          <a:srgbClr val="F7F9FC"/>
+        </a:solidFill>
+        <a:effectLst/>
+      </p:bgPr>
+    </p:bg>
+    <p:spTree>
+      <p:nvGrpSpPr>
+        <p:cNvPr id="1" name="">
+          <a:extLst>
+            <a:ext uri="{FF2B5EF4-FFF2-40B4-BE49-F238E27FC236}">
+              <a16:creationId xmlns:a16="http://schemas.microsoft.com/office/drawing/2014/main" id="{D89F4B5F-6EA5-EE85-3CE2-ADE8CFF89C37}"/>
+            </a:ext>
+          </a:extLst>
+        </p:cNvPr>
+        <p:cNvGrpSpPr/>
+        <p:nvPr/>
+      </p:nvGrpSpPr>
+      <p:grpSpPr>
+        <a:xfrm>
+          <a:off x="0" y="0"/>
+          <a:ext cx="0" cy="0"/>
+          <a:chOff x="0" y="0"/>
+          <a:chExt cx="0" cy="0"/>
+        </a:xfrm>
+      </p:grpSpPr>
+      <p:sp>
+        <p:nvSpPr>
+          <p:cNvPr id="2" name="TextBox 1">
+            <a:extLst>
+              <a:ext uri="{FF2B5EF4-FFF2-40B4-BE49-F238E27FC236}">
+                <a16:creationId xmlns:a16="http://schemas.microsoft.com/office/drawing/2014/main" id="{8A84EA29-18AE-DB72-8F28-5CC9ABCB95A3}"/>
+              </a:ext>
+            </a:extLst>
+          </p:cNvPr>
+          <p:cNvSpPr txBox="1"/>
+          <p:nvPr/>
+        </p:nvSpPr>
+        <p:spPr>
+          <a:xfrm>
+            <a:off x="731520" y="822960"/>
+            <a:ext cx="10698480" cy="553998"/>
+          </a:xfrm>
+          <a:prstGeom prst="rect">
+            <a:avLst/>
+          </a:prstGeom>
+          <a:noFill/>
+        </p:spPr>
+        <p:txBody>
+          <a:bodyPr wrap="square">
+            <a:spAutoFit/>
+          </a:bodyPr>
+          <a:lstStyle/>
+          <a:p>
+            <a:pPr algn="l">
+              <a:defRPr sz="3000" b="1">
+                <a:solidFill>
+                  <a:srgbClr val="FFFFFF"/>
+                </a:solidFill>
+                <a:latin typeface="Aptos"/>
+              </a:defRPr>
+            </a:pPr>
+            <a:r>
+              <a:rPr dirty="0">
+                <a:solidFill>
+                  <a:schemeClr val="tx1"/>
+                </a:solidFill>
+              </a:rPr>
+              <a:t>Why Issues matter</a:t>
+            </a:r>
+          </a:p>
+        </p:txBody>
+      </p:sp>
+      <p:sp>
+        <p:nvSpPr>
+          <p:cNvPr id="25" name="TextBox 24">
+            <a:extLst>
+              <a:ext uri="{FF2B5EF4-FFF2-40B4-BE49-F238E27FC236}">
+                <a16:creationId xmlns:a16="http://schemas.microsoft.com/office/drawing/2014/main" id="{ED0D841A-E5BC-5FAD-50B2-62D3B298D7AB}"/>
+              </a:ext>
+            </a:extLst>
+          </p:cNvPr>
+          <p:cNvSpPr txBox="1"/>
+          <p:nvPr/>
+        </p:nvSpPr>
+        <p:spPr>
+          <a:xfrm>
+            <a:off x="731520" y="1554480"/>
+            <a:ext cx="10515600" cy="400110"/>
+          </a:xfrm>
+          <a:prstGeom prst="rect">
+            <a:avLst/>
+          </a:prstGeom>
+          <a:noFill/>
+        </p:spPr>
+        <p:txBody>
+          <a:bodyPr wrap="square">
+            <a:spAutoFit/>
+          </a:bodyPr>
+          <a:lstStyle/>
+          <a:p>
+            <a:pPr algn="l">
+              <a:defRPr sz="2000" b="0">
+                <a:solidFill>
+                  <a:srgbClr val="C9D1D9"/>
+                </a:solidFill>
+                <a:latin typeface="Aptos"/>
+              </a:defRPr>
+            </a:pPr>
+            <a:r>
+              <a:rPr dirty="0">
+                <a:solidFill>
+                  <a:schemeClr val="tx1"/>
+                </a:solidFill>
+              </a:rPr>
+              <a:t>They connect planning, implementation and review into one auditable engineering workflow.</a:t>
+            </a:r>
+          </a:p>
+        </p:txBody>
+      </p:sp>
+      <p:sp>
+        <p:nvSpPr>
+          <p:cNvPr id="27" name="TextBox 26">
+            <a:extLst>
+              <a:ext uri="{FF2B5EF4-FFF2-40B4-BE49-F238E27FC236}">
+                <a16:creationId xmlns:a16="http://schemas.microsoft.com/office/drawing/2014/main" id="{D4CC1B4E-4EFC-5CDF-77A5-33C04006B386}"/>
+              </a:ext>
+            </a:extLst>
+          </p:cNvPr>
+          <p:cNvSpPr txBox="1"/>
+          <p:nvPr/>
+        </p:nvSpPr>
+        <p:spPr>
+          <a:xfrm>
+            <a:off x="987552" y="2715768"/>
+            <a:ext cx="4480560" cy="353943"/>
+          </a:xfrm>
+          <a:prstGeom prst="rect">
+            <a:avLst/>
+          </a:prstGeom>
+          <a:noFill/>
+        </p:spPr>
+        <p:txBody>
+          <a:bodyPr wrap="square">
+            <a:spAutoFit/>
+          </a:bodyPr>
+          <a:lstStyle/>
+          <a:p>
+            <a:pPr algn="l">
+              <a:defRPr sz="1700" b="1">
+                <a:solidFill>
+                  <a:srgbClr val="79C0FF"/>
+                </a:solidFill>
+                <a:latin typeface="Aptos"/>
+              </a:defRPr>
+            </a:pPr>
+            <a:r>
+              <a:rPr>
+                <a:solidFill>
+                  <a:schemeClr val="tx1"/>
+                </a:solidFill>
+              </a:rPr>
+              <a:t>Traceability</a:t>
+            </a:r>
+          </a:p>
+        </p:txBody>
+      </p:sp>
+      <p:sp>
+        <p:nvSpPr>
+          <p:cNvPr id="28" name="TextBox 27">
+            <a:extLst>
+              <a:ext uri="{FF2B5EF4-FFF2-40B4-BE49-F238E27FC236}">
+                <a16:creationId xmlns:a16="http://schemas.microsoft.com/office/drawing/2014/main" id="{432AB6B6-14B7-0123-E49F-878D138375EE}"/>
+              </a:ext>
+            </a:extLst>
+          </p:cNvPr>
+          <p:cNvSpPr txBox="1"/>
+          <p:nvPr/>
+        </p:nvSpPr>
+        <p:spPr>
+          <a:xfrm>
+            <a:off x="987552" y="3118104"/>
+            <a:ext cx="4526280" cy="502920"/>
+          </a:xfrm>
+          <a:prstGeom prst="rect">
+            <a:avLst/>
+          </a:prstGeom>
+          <a:noFill/>
+        </p:spPr>
+        <p:txBody>
+          <a:bodyPr wrap="square">
+            <a:spAutoFit/>
+          </a:bodyPr>
+          <a:lstStyle/>
+          <a:p>
+            <a:pPr algn="l">
+              <a:defRPr sz="1300" b="0">
+                <a:solidFill>
+                  <a:srgbClr val="C9D1D9"/>
+                </a:solidFill>
+                <a:latin typeface="Aptos"/>
+              </a:defRPr>
+            </a:pPr>
+            <a:r>
+              <a:rPr>
+                <a:solidFill>
+                  <a:schemeClr val="tx1"/>
+                </a:solidFill>
+              </a:rPr>
+              <a:t>See why code changed and which task, branch and PR produced it.</a:t>
+            </a:r>
+          </a:p>
+        </p:txBody>
+      </p:sp>
+      <p:sp>
+        <p:nvSpPr>
+          <p:cNvPr id="30" name="TextBox 29">
+            <a:extLst>
+              <a:ext uri="{FF2B5EF4-FFF2-40B4-BE49-F238E27FC236}">
+                <a16:creationId xmlns:a16="http://schemas.microsoft.com/office/drawing/2014/main" id="{08B69D31-3C5C-F4B7-3969-9B9425E58943}"/>
+              </a:ext>
+            </a:extLst>
+          </p:cNvPr>
+          <p:cNvSpPr txBox="1"/>
+          <p:nvPr/>
+        </p:nvSpPr>
+        <p:spPr>
+          <a:xfrm>
+            <a:off x="6473952" y="2715768"/>
+            <a:ext cx="4480560" cy="353943"/>
+          </a:xfrm>
+          <a:prstGeom prst="rect">
+            <a:avLst/>
+          </a:prstGeom>
+          <a:noFill/>
+        </p:spPr>
+        <p:txBody>
+          <a:bodyPr wrap="square">
+            <a:spAutoFit/>
+          </a:bodyPr>
+          <a:lstStyle/>
+          <a:p>
+            <a:pPr algn="l">
+              <a:defRPr sz="1700" b="1">
+                <a:solidFill>
+                  <a:srgbClr val="79C0FF"/>
+                </a:solidFill>
+                <a:latin typeface="Aptos"/>
+              </a:defRPr>
+            </a:pPr>
+            <a:r>
+              <a:rPr>
+                <a:solidFill>
+                  <a:schemeClr val="tx1"/>
+                </a:solidFill>
+              </a:rPr>
+              <a:t>Collaboration</a:t>
+            </a:r>
+          </a:p>
+        </p:txBody>
+      </p:sp>
+      <p:sp>
+        <p:nvSpPr>
+          <p:cNvPr id="31" name="TextBox 30">
+            <a:extLst>
+              <a:ext uri="{FF2B5EF4-FFF2-40B4-BE49-F238E27FC236}">
+                <a16:creationId xmlns:a16="http://schemas.microsoft.com/office/drawing/2014/main" id="{BA0AF3FF-8E5C-54DC-811E-4ABC8D70E351}"/>
+              </a:ext>
+            </a:extLst>
+          </p:cNvPr>
+          <p:cNvSpPr txBox="1"/>
+          <p:nvPr/>
+        </p:nvSpPr>
+        <p:spPr>
+          <a:xfrm>
+            <a:off x="6473952" y="3118104"/>
+            <a:ext cx="4526280" cy="502920"/>
+          </a:xfrm>
+          <a:prstGeom prst="rect">
+            <a:avLst/>
+          </a:prstGeom>
+          <a:noFill/>
+        </p:spPr>
+        <p:txBody>
+          <a:bodyPr wrap="square">
+            <a:spAutoFit/>
+          </a:bodyPr>
+          <a:lstStyle/>
+          <a:p>
+            <a:pPr algn="l">
+              <a:defRPr sz="1300" b="0">
+                <a:solidFill>
+                  <a:srgbClr val="C9D1D9"/>
+                </a:solidFill>
+                <a:latin typeface="Aptos"/>
+              </a:defRPr>
+            </a:pPr>
+            <a:r>
+              <a:rPr>
+                <a:solidFill>
+                  <a:schemeClr val="tx1"/>
+                </a:solidFill>
+              </a:rPr>
+              <a:t>Give developers and reviewers one shared place for ownership and decisions.</a:t>
+            </a:r>
+          </a:p>
+        </p:txBody>
+      </p:sp>
+      <p:sp>
+        <p:nvSpPr>
+          <p:cNvPr id="33" name="TextBox 32">
+            <a:extLst>
+              <a:ext uri="{FF2B5EF4-FFF2-40B4-BE49-F238E27FC236}">
+                <a16:creationId xmlns:a16="http://schemas.microsoft.com/office/drawing/2014/main" id="{C1253823-4146-1B0C-1565-C444C7B88C68}"/>
+              </a:ext>
+            </a:extLst>
+          </p:cNvPr>
+          <p:cNvSpPr txBox="1"/>
+          <p:nvPr/>
+        </p:nvSpPr>
+        <p:spPr>
+          <a:xfrm>
+            <a:off x="987552" y="4453128"/>
+            <a:ext cx="4480560" cy="353943"/>
+          </a:xfrm>
+          <a:prstGeom prst="rect">
+            <a:avLst/>
+          </a:prstGeom>
+          <a:noFill/>
+        </p:spPr>
+        <p:txBody>
+          <a:bodyPr wrap="square">
+            <a:spAutoFit/>
+          </a:bodyPr>
+          <a:lstStyle/>
+          <a:p>
+            <a:pPr algn="l">
+              <a:defRPr sz="1700" b="1">
+                <a:solidFill>
+                  <a:srgbClr val="79C0FF"/>
+                </a:solidFill>
+                <a:latin typeface="Aptos"/>
+              </a:defRPr>
+            </a:pPr>
+            <a:r>
+              <a:rPr>
+                <a:solidFill>
+                  <a:schemeClr val="tx1"/>
+                </a:solidFill>
+              </a:rPr>
+              <a:t>Quality</a:t>
+            </a:r>
+          </a:p>
+        </p:txBody>
+      </p:sp>
+      <p:sp>
+        <p:nvSpPr>
+          <p:cNvPr id="34" name="TextBox 33">
+            <a:extLst>
+              <a:ext uri="{FF2B5EF4-FFF2-40B4-BE49-F238E27FC236}">
+                <a16:creationId xmlns:a16="http://schemas.microsoft.com/office/drawing/2014/main" id="{1047F257-340E-6952-C379-B522B2AB1320}"/>
+              </a:ext>
+            </a:extLst>
+          </p:cNvPr>
+          <p:cNvSpPr txBox="1"/>
+          <p:nvPr/>
+        </p:nvSpPr>
+        <p:spPr>
+          <a:xfrm>
+            <a:off x="987552" y="4855464"/>
+            <a:ext cx="4526280" cy="502920"/>
+          </a:xfrm>
+          <a:prstGeom prst="rect">
+            <a:avLst/>
+          </a:prstGeom>
+          <a:noFill/>
+        </p:spPr>
+        <p:txBody>
+          <a:bodyPr wrap="square">
+            <a:spAutoFit/>
+          </a:bodyPr>
+          <a:lstStyle/>
+          <a:p>
+            <a:pPr algn="l">
+              <a:defRPr sz="1300" b="0">
+                <a:solidFill>
+                  <a:srgbClr val="C9D1D9"/>
+                </a:solidFill>
+                <a:latin typeface="Aptos"/>
+              </a:defRPr>
+            </a:pPr>
+            <a:r>
+              <a:rPr>
+                <a:solidFill>
+                  <a:schemeClr val="tx1"/>
+                </a:solidFill>
+              </a:rPr>
+              <a:t>Use acceptance criteria, reviews and linked tests to make "done" explicit.</a:t>
+            </a:r>
+          </a:p>
+        </p:txBody>
+      </p:sp>
+      <p:sp>
+        <p:nvSpPr>
+          <p:cNvPr id="40" name="TextBox 39">
+            <a:extLst>
+              <a:ext uri="{FF2B5EF4-FFF2-40B4-BE49-F238E27FC236}">
+                <a16:creationId xmlns:a16="http://schemas.microsoft.com/office/drawing/2014/main" id="{828C6E8B-202C-DEA4-C9A8-723B39827793}"/>
+              </a:ext>
+            </a:extLst>
+          </p:cNvPr>
+          <p:cNvSpPr txBox="1"/>
+          <p:nvPr/>
+        </p:nvSpPr>
+        <p:spPr>
+          <a:xfrm>
+            <a:off x="6473952" y="4453128"/>
+            <a:ext cx="4480560" cy="353943"/>
+          </a:xfrm>
+          <a:prstGeom prst="rect">
+            <a:avLst/>
+          </a:prstGeom>
+          <a:noFill/>
+        </p:spPr>
+        <p:txBody>
+          <a:bodyPr wrap="square">
+            <a:spAutoFit/>
+          </a:bodyPr>
+          <a:lstStyle/>
+          <a:p>
+            <a:pPr algn="l">
+              <a:defRPr sz="1700" b="1">
+                <a:solidFill>
+                  <a:srgbClr val="79C0FF"/>
+                </a:solidFill>
+                <a:latin typeface="Aptos"/>
+              </a:defRPr>
+            </a:pPr>
+            <a:r>
+              <a:rPr>
+                <a:solidFill>
+                  <a:schemeClr val="tx1"/>
+                </a:solidFill>
+              </a:rPr>
+              <a:t>Project visibility</a:t>
+            </a:r>
+          </a:p>
+        </p:txBody>
+      </p:sp>
+      <p:sp>
+        <p:nvSpPr>
+          <p:cNvPr id="41" name="TextBox 40">
+            <a:extLst>
+              <a:ext uri="{FF2B5EF4-FFF2-40B4-BE49-F238E27FC236}">
+                <a16:creationId xmlns:a16="http://schemas.microsoft.com/office/drawing/2014/main" id="{87AB09BD-FCDE-8B25-6123-D2BA353B012C}"/>
+              </a:ext>
+            </a:extLst>
+          </p:cNvPr>
+          <p:cNvSpPr txBox="1"/>
+          <p:nvPr/>
+        </p:nvSpPr>
+        <p:spPr>
+          <a:xfrm>
+            <a:off x="6473952" y="4855464"/>
+            <a:ext cx="4526280" cy="502920"/>
+          </a:xfrm>
+          <a:prstGeom prst="rect">
+            <a:avLst/>
+          </a:prstGeom>
+          <a:noFill/>
+        </p:spPr>
+        <p:txBody>
+          <a:bodyPr wrap="square">
+            <a:spAutoFit/>
+          </a:bodyPr>
+          <a:lstStyle/>
+          <a:p>
+            <a:pPr algn="l">
+              <a:defRPr sz="1300" b="0">
+                <a:solidFill>
+                  <a:srgbClr val="C9D1D9"/>
+                </a:solidFill>
+                <a:latin typeface="Aptos"/>
+              </a:defRPr>
+            </a:pPr>
+            <a:r>
+              <a:rPr>
+                <a:solidFill>
+                  <a:schemeClr val="tx1"/>
+                </a:solidFill>
+              </a:rPr>
+              <a:t>Labels, milestones and status make progress and remaining work easier to inspect.</a:t>
+            </a:r>
+          </a:p>
+        </p:txBody>
+      </p:sp>
+      <p:sp>
+        <p:nvSpPr>
+          <p:cNvPr id="3" name="TextBox 2">
+            <a:extLst>
+              <a:ext uri="{FF2B5EF4-FFF2-40B4-BE49-F238E27FC236}">
+                <a16:creationId xmlns:a16="http://schemas.microsoft.com/office/drawing/2014/main" id="{B427857A-CB42-7D15-F6C9-DF98269735D3}"/>
+              </a:ext>
+            </a:extLst>
+          </p:cNvPr>
+          <p:cNvSpPr txBox="1"/>
+          <p:nvPr/>
+        </p:nvSpPr>
+        <p:spPr>
+          <a:xfrm>
+            <a:off x="2020205" y="5779901"/>
+            <a:ext cx="8151590" cy="523220"/>
+          </a:xfrm>
+          <a:prstGeom prst="rect">
+            <a:avLst/>
+          </a:prstGeom>
+          <a:noFill/>
+        </p:spPr>
+        <p:txBody>
+          <a:bodyPr wrap="none" rtlCol="0">
+            <a:spAutoFit/>
+          </a:bodyPr>
+          <a:lstStyle/>
+          <a:p>
+            <a:r>
+              <a:rPr lang="en-US" sz="2800" dirty="0">
+                <a:solidFill>
+                  <a:srgbClr val="FF0000"/>
+                </a:solidFill>
+                <a:latin typeface="+mn-lt"/>
+              </a:rPr>
+              <a:t>Important pieces in a regulatory approval process</a:t>
+            </a:r>
+          </a:p>
+        </p:txBody>
+      </p:sp>
+    </p:spTree>
+    <p:extLst>
+      <p:ext uri="{BB962C8B-B14F-4D97-AF65-F5344CB8AC3E}">
+        <p14:creationId xmlns:p14="http://schemas.microsoft.com/office/powerpoint/2010/main" val="3732117702"/>
+      </p:ext>
+    </p:extLst>
+  </p:cSld>
+  <p:clrMapOvr>
+    <a:masterClrMapping/>
+  </p:clrMapOvr>
+</p:sld>
+</file>
+
+<file path=ppt/slides/slide33.xml><?xml version="1.0" encoding="utf-8"?>
 <p:sld xmlns:a="http://schemas.openxmlformats.org/drawingml/2006/main" xmlns:r="http://schemas.openxmlformats.org/officeDocument/2006/relationships" xmlns:p="http://schemas.openxmlformats.org/presentationml/2006/main">
   <p:cSld>
     <p:bg>
@@ -18558,7 +19179,7 @@
 </p:sld>
 </file>
 
-<file path=ppt/slides/slide32.xml><?xml version="1.0" encoding="utf-8"?>
+<file path=ppt/slides/slide34.xml><?xml version="1.0" encoding="utf-8"?>
 <p:sld xmlns:a="http://schemas.openxmlformats.org/drawingml/2006/main" xmlns:r="http://schemas.openxmlformats.org/officeDocument/2006/relationships" xmlns:p="http://schemas.openxmlformats.org/presentationml/2006/main">
   <p:cSld>
     <p:bg>
@@ -18816,45 +19437,6 @@
       </p:sp>
       <p:sp>
         <p:nvSpPr>
-          <p:cNvPr id="5" name="TextBox 30">
-            <a:extLst>
-              <a:ext uri="{FF2B5EF4-FFF2-40B4-BE49-F238E27FC236}">
-                <a16:creationId xmlns:a16="http://schemas.microsoft.com/office/drawing/2014/main" id="{9E5BBBB1-8B10-138A-961E-D2AB7C1F5D21}"/>
-              </a:ext>
-            </a:extLst>
-          </p:cNvPr>
-          <p:cNvSpPr/>
-          <p:nvPr/>
-        </p:nvSpPr>
-        <p:spPr>
-          <a:xfrm>
-            <a:off x="795528" y="1901952"/>
-            <a:ext cx="640080" cy="347472"/>
-          </a:xfrm>
-          <a:noFill/>
-          <a:ln>
-            <a:noFill/>
-          </a:ln>
-        </p:spPr>
-        <p:txBody>
-          <a:bodyPr lIns="73152" tIns="73152" rIns="73152" bIns="73152" anchor="ctr"/>
-          <a:lstStyle/>
-          <a:p>
-            <a:pPr marL="0" lvl="0" indent="0" algn="l"/>
-            <a:r>
-              <a:rPr lang="en-US" sz="2000" b="1" i="0" dirty="0">
-                <a:solidFill>
-                  <a:srgbClr val="172033"/>
-                </a:solidFill>
-                <a:latin typeface="Aptos"/>
-              </a:rPr>
-              <a:t>01</a:t>
-            </a:r>
-          </a:p>
-        </p:txBody>
-      </p:sp>
-      <p:sp>
-        <p:nvSpPr>
           <p:cNvPr id="6" name="TextBox 40">
             <a:extLst>
               <a:ext uri="{FF2B5EF4-FFF2-40B4-BE49-F238E27FC236}">
@@ -18989,45 +19571,6 @@
       </p:sp>
       <p:sp>
         <p:nvSpPr>
-          <p:cNvPr id="9" name="TextBox 31">
-            <a:extLst>
-              <a:ext uri="{FF2B5EF4-FFF2-40B4-BE49-F238E27FC236}">
-                <a16:creationId xmlns:a16="http://schemas.microsoft.com/office/drawing/2014/main" id="{A64D0E58-F0F0-2A7F-4C85-70AABBAD4392}"/>
-              </a:ext>
-            </a:extLst>
-          </p:cNvPr>
-          <p:cNvSpPr/>
-          <p:nvPr/>
-        </p:nvSpPr>
-        <p:spPr>
-          <a:xfrm>
-            <a:off x="3611880" y="1901952"/>
-            <a:ext cx="640080" cy="347472"/>
-          </a:xfrm>
-          <a:noFill/>
-          <a:ln>
-            <a:noFill/>
-          </a:ln>
-        </p:spPr>
-        <p:txBody>
-          <a:bodyPr lIns="73152" tIns="73152" rIns="73152" bIns="73152" anchor="ctr"/>
-          <a:lstStyle/>
-          <a:p>
-            <a:pPr marL="0" lvl="0" indent="0" algn="l"/>
-            <a:r>
-              <a:rPr lang="en-US" sz="2000" b="1" i="0" dirty="0">
-                <a:solidFill>
-                  <a:srgbClr val="172033"/>
-                </a:solidFill>
-                <a:latin typeface="Aptos"/>
-              </a:rPr>
-              <a:t>02</a:t>
-            </a:r>
-          </a:p>
-        </p:txBody>
-      </p:sp>
-      <p:sp>
-        <p:nvSpPr>
           <p:cNvPr id="10" name="TextBox 41">
             <a:extLst>
               <a:ext uri="{FF2B5EF4-FFF2-40B4-BE49-F238E27FC236}">
@@ -19144,45 +19687,6 @@
       </p:sp>
       <p:sp>
         <p:nvSpPr>
-          <p:cNvPr id="13" name="TextBox 32">
-            <a:extLst>
-              <a:ext uri="{FF2B5EF4-FFF2-40B4-BE49-F238E27FC236}">
-                <a16:creationId xmlns:a16="http://schemas.microsoft.com/office/drawing/2014/main" id="{AA19C419-3211-70FA-D17E-E89792167FAC}"/>
-              </a:ext>
-            </a:extLst>
-          </p:cNvPr>
-          <p:cNvSpPr/>
-          <p:nvPr/>
-        </p:nvSpPr>
-        <p:spPr>
-          <a:xfrm>
-            <a:off x="6428232" y="1901952"/>
-            <a:ext cx="640080" cy="347472"/>
-          </a:xfrm>
-          <a:noFill/>
-          <a:ln>
-            <a:noFill/>
-          </a:ln>
-        </p:spPr>
-        <p:txBody>
-          <a:bodyPr lIns="73152" tIns="73152" rIns="73152" bIns="73152" anchor="ctr"/>
-          <a:lstStyle/>
-          <a:p>
-            <a:pPr marL="0" lvl="0" indent="0" algn="l"/>
-            <a:r>
-              <a:rPr lang="en-US" sz="2000" b="1" i="0" dirty="0">
-                <a:solidFill>
-                  <a:srgbClr val="172033"/>
-                </a:solidFill>
-                <a:latin typeface="Aptos"/>
-              </a:rPr>
-              <a:t>03</a:t>
-            </a:r>
-          </a:p>
-        </p:txBody>
-      </p:sp>
-      <p:sp>
-        <p:nvSpPr>
           <p:cNvPr id="14" name="TextBox 42">
             <a:extLst>
               <a:ext uri="{FF2B5EF4-FFF2-40B4-BE49-F238E27FC236}">
@@ -19299,45 +19803,6 @@
       </p:sp>
       <p:sp>
         <p:nvSpPr>
-          <p:cNvPr id="17" name="TextBox 33">
-            <a:extLst>
-              <a:ext uri="{FF2B5EF4-FFF2-40B4-BE49-F238E27FC236}">
-                <a16:creationId xmlns:a16="http://schemas.microsoft.com/office/drawing/2014/main" id="{B60A8CCE-3B7C-E195-015A-7EBDBA93F347}"/>
-              </a:ext>
-            </a:extLst>
-          </p:cNvPr>
-          <p:cNvSpPr/>
-          <p:nvPr/>
-        </p:nvSpPr>
-        <p:spPr>
-          <a:xfrm>
-            <a:off x="9244584" y="1901952"/>
-            <a:ext cx="640080" cy="347472"/>
-          </a:xfrm>
-          <a:noFill/>
-          <a:ln>
-            <a:noFill/>
-          </a:ln>
-        </p:spPr>
-        <p:txBody>
-          <a:bodyPr lIns="73152" tIns="73152" rIns="73152" bIns="73152" anchor="ctr"/>
-          <a:lstStyle/>
-          <a:p>
-            <a:pPr marL="0" lvl="0" indent="0" algn="l"/>
-            <a:r>
-              <a:rPr lang="en-US" sz="2000" b="1" i="0" dirty="0">
-                <a:solidFill>
-                  <a:srgbClr val="172033"/>
-                </a:solidFill>
-                <a:latin typeface="Aptos"/>
-              </a:rPr>
-              <a:t>04</a:t>
-            </a:r>
-          </a:p>
-        </p:txBody>
-      </p:sp>
-      <p:sp>
-        <p:nvSpPr>
           <p:cNvPr id="18" name="TextBox 43">
             <a:extLst>
               <a:ext uri="{FF2B5EF4-FFF2-40B4-BE49-F238E27FC236}">
@@ -19555,51 +20020,6 @@
           <a:lstStyle/>
           <a:p>
             <a:endParaRPr lang="en-US" dirty="0"/>
-          </a:p>
-        </p:txBody>
-      </p:sp>
-      <p:sp>
-        <p:nvSpPr>
-          <p:cNvPr id="25" name="TextBox 33">
-            <a:extLst>
-              <a:ext uri="{FF2B5EF4-FFF2-40B4-BE49-F238E27FC236}">
-                <a16:creationId xmlns:a16="http://schemas.microsoft.com/office/drawing/2014/main" id="{832E4484-61AD-62CC-CC6C-9D4C8A29B350}"/>
-              </a:ext>
-            </a:extLst>
-          </p:cNvPr>
-          <p:cNvSpPr/>
-          <p:nvPr/>
-        </p:nvSpPr>
-        <p:spPr>
-          <a:xfrm>
-            <a:off x="9628096" y="3557016"/>
-            <a:ext cx="640080" cy="347472"/>
-          </a:xfrm>
-          <a:noFill/>
-          <a:ln>
-            <a:noFill/>
-          </a:ln>
-        </p:spPr>
-        <p:txBody>
-          <a:bodyPr lIns="73152" tIns="73152" rIns="73152" bIns="73152" anchor="ctr"/>
-          <a:lstStyle/>
-          <a:p>
-            <a:pPr marL="0" lvl="0" indent="0" algn="l"/>
-            <a:r>
-              <a:rPr lang="en-US" sz="2000" b="1" dirty="0">
-                <a:solidFill>
-                  <a:srgbClr val="172033"/>
-                </a:solidFill>
-                <a:latin typeface="Aptos"/>
-              </a:rPr>
-              <a:t>+1</a:t>
-            </a:r>
-            <a:endParaRPr lang="en-US" sz="2000" b="1" i="0" dirty="0">
-              <a:solidFill>
-                <a:srgbClr val="172033"/>
-              </a:solidFill>
-              <a:latin typeface="Aptos"/>
-            </a:endParaRPr>
           </a:p>
         </p:txBody>
       </p:sp>
@@ -19903,38 +20323,6 @@
       </p:sp>
       <p:sp>
         <p:nvSpPr>
-          <p:cNvPr id="4" name="Rect 20"/>
-          <p:cNvSpPr/>
-          <p:nvPr/>
-        </p:nvSpPr>
-        <p:spPr>
-          <a:xfrm>
-            <a:off x="594360" y="1554480"/>
-            <a:ext cx="10972800" cy="4160520"/>
-          </a:xfrm>
-          <a:prstGeom prst="roundRect">
-            <a:avLst/>
-          </a:prstGeom>
-          <a:solidFill>
-            <a:srgbClr val="FFFFFF"/>
-          </a:solidFill>
-          <a:ln>
-            <a:solidFill>
-              <a:srgbClr val="D5DDE7"/>
-            </a:solidFill>
-            <a:prstDash val="solid"/>
-          </a:ln>
-        </p:spPr>
-        <p:txBody>
-          <a:bodyPr/>
-          <a:lstStyle/>
-          <a:p>
-            <a:endParaRPr lang="en-US" dirty="0"/>
-          </a:p>
-        </p:txBody>
-      </p:sp>
-      <p:sp>
-        <p:nvSpPr>
           <p:cNvPr id="5" name="Rect 30"/>
           <p:cNvSpPr/>
           <p:nvPr/>
@@ -20565,39 +20953,6 @@
       </p:sp>
       <p:sp>
         <p:nvSpPr>
-          <p:cNvPr id="5" name="TextBox 30"/>
-          <p:cNvSpPr/>
-          <p:nvPr/>
-        </p:nvSpPr>
-        <p:spPr>
-          <a:xfrm>
-            <a:off x="841247" y="2011680"/>
-            <a:ext cx="411480" cy="320040"/>
-          </a:xfrm>
-          <a:noFill/>
-          <a:ln>
-            <a:noFill/>
-          </a:ln>
-        </p:spPr>
-        <p:txBody>
-          <a:bodyPr lIns="73152" tIns="73152" rIns="73152" bIns="73152" anchor="ctr"/>
-          <a:lstStyle/>
-          <a:p>
-            <a:pPr marL="0" lvl="0" indent="0" algn="l"/>
-            <a:r>
-              <a:rPr lang="en-US" sz="2000" b="1" i="0">
-                <a:solidFill>
-                  <a:srgbClr val="172033"/>
-                </a:solidFill>
-                <a:latin typeface="Aptos"/>
-              </a:rPr>
-              <a:t>1</a:t>
-            </a:r>
-          </a:p>
-        </p:txBody>
-      </p:sp>
-      <p:sp>
-        <p:nvSpPr>
           <p:cNvPr id="6" name="TextBox 40"/>
           <p:cNvSpPr/>
           <p:nvPr/>
@@ -20715,20 +21070,20 @@
           <a:bodyPr/>
           <a:lstStyle/>
           <a:p>
-            <a:endParaRPr lang="en-US"/>
-          </a:p>
-        </p:txBody>
-      </p:sp>
-      <p:sp>
-        <p:nvSpPr>
-          <p:cNvPr id="10" name="TextBox 31"/>
-          <p:cNvSpPr/>
-          <p:nvPr/>
-        </p:nvSpPr>
-        <p:spPr>
-          <a:xfrm>
-            <a:off x="3657600" y="2011680"/>
-            <a:ext cx="411480" cy="320040"/>
+            <a:endParaRPr lang="en-US" dirty="0"/>
+          </a:p>
+        </p:txBody>
+      </p:sp>
+      <p:sp>
+        <p:nvSpPr>
+          <p:cNvPr id="11" name="TextBox 41"/>
+          <p:cNvSpPr/>
+          <p:nvPr/>
+        </p:nvSpPr>
+        <p:spPr>
+          <a:xfrm>
+            <a:off x="4153662" y="1965960"/>
+            <a:ext cx="1554480" cy="347472"/>
           </a:xfrm>
           <a:noFill/>
           <a:ln>
@@ -20741,40 +21096,7 @@
           <a:p>
             <a:pPr marL="0" lvl="0" indent="0" algn="l"/>
             <a:r>
-              <a:rPr lang="en-US" sz="2000" b="1" i="0">
-                <a:solidFill>
-                  <a:srgbClr val="172033"/>
-                </a:solidFill>
-                <a:latin typeface="Aptos"/>
-              </a:rPr>
-              <a:t>2</a:t>
-            </a:r>
-          </a:p>
-        </p:txBody>
-      </p:sp>
-      <p:sp>
-        <p:nvSpPr>
-          <p:cNvPr id="11" name="TextBox 41"/>
-          <p:cNvSpPr/>
-          <p:nvPr/>
-        </p:nvSpPr>
-        <p:spPr>
-          <a:xfrm>
-            <a:off x="4142232" y="1993392"/>
-            <a:ext cx="1554480" cy="347472"/>
-          </a:xfrm>
-          <a:noFill/>
-          <a:ln>
-            <a:noFill/>
-          </a:ln>
-        </p:spPr>
-        <p:txBody>
-          <a:bodyPr lIns="73152" tIns="73152" rIns="73152" bIns="73152" anchor="ctr"/>
-          <a:lstStyle/>
-          <a:p>
-            <a:pPr marL="0" lvl="0" indent="0" algn="l"/>
-            <a:r>
-              <a:rPr lang="en-US" sz="2000" b="1" i="0">
+              <a:rPr lang="en-US" sz="2000" b="1" i="0" dirty="0">
                 <a:solidFill>
                   <a:srgbClr val="172033"/>
                 </a:solidFill>
@@ -20877,14 +21199,14 @@
       </p:sp>
       <p:sp>
         <p:nvSpPr>
-          <p:cNvPr id="15" name="TextBox 32"/>
-          <p:cNvSpPr/>
-          <p:nvPr/>
-        </p:nvSpPr>
-        <p:spPr>
-          <a:xfrm>
-            <a:off x="6473952" y="2011680"/>
-            <a:ext cx="411480" cy="320040"/>
+          <p:cNvPr id="16" name="TextBox 42"/>
+          <p:cNvSpPr/>
+          <p:nvPr/>
+        </p:nvSpPr>
+        <p:spPr>
+          <a:xfrm>
+            <a:off x="7141464" y="1965960"/>
+            <a:ext cx="1554480" cy="347472"/>
           </a:xfrm>
           <a:noFill/>
           <a:ln>
@@ -20897,40 +21219,7 @@
           <a:p>
             <a:pPr marL="0" lvl="0" indent="0" algn="l"/>
             <a:r>
-              <a:rPr lang="en-US" sz="2000" b="1" i="0">
-                <a:solidFill>
-                  <a:srgbClr val="172033"/>
-                </a:solidFill>
-                <a:latin typeface="Aptos"/>
-              </a:rPr>
-              <a:t>3</a:t>
-            </a:r>
-          </a:p>
-        </p:txBody>
-      </p:sp>
-      <p:sp>
-        <p:nvSpPr>
-          <p:cNvPr id="16" name="TextBox 42"/>
-          <p:cNvSpPr/>
-          <p:nvPr/>
-        </p:nvSpPr>
-        <p:spPr>
-          <a:xfrm>
-            <a:off x="6958584" y="1993392"/>
-            <a:ext cx="1554480" cy="347472"/>
-          </a:xfrm>
-          <a:noFill/>
-          <a:ln>
-            <a:noFill/>
-          </a:ln>
-        </p:spPr>
-        <p:txBody>
-          <a:bodyPr lIns="73152" tIns="73152" rIns="73152" bIns="73152" anchor="ctr"/>
-          <a:lstStyle/>
-          <a:p>
-            <a:pPr marL="0" lvl="0" indent="0" algn="l"/>
-            <a:r>
-              <a:rPr lang="en-US" sz="2000" b="1" i="0">
+              <a:rPr lang="en-US" sz="2000" b="1" i="0" dirty="0">
                 <a:solidFill>
                   <a:srgbClr val="172033"/>
                 </a:solidFill>
@@ -21033,39 +21322,6 @@
       </p:sp>
       <p:sp>
         <p:nvSpPr>
-          <p:cNvPr id="20" name="TextBox 33"/>
-          <p:cNvSpPr/>
-          <p:nvPr/>
-        </p:nvSpPr>
-        <p:spPr>
-          <a:xfrm>
-            <a:off x="9290304" y="2011680"/>
-            <a:ext cx="411480" cy="320040"/>
-          </a:xfrm>
-          <a:noFill/>
-          <a:ln>
-            <a:noFill/>
-          </a:ln>
-        </p:spPr>
-        <p:txBody>
-          <a:bodyPr lIns="73152" tIns="73152" rIns="73152" bIns="73152" anchor="ctr"/>
-          <a:lstStyle/>
-          <a:p>
-            <a:pPr marL="0" lvl="0" indent="0" algn="l"/>
-            <a:r>
-              <a:rPr lang="en-US" sz="2000" b="1" i="0">
-                <a:solidFill>
-                  <a:srgbClr val="172033"/>
-                </a:solidFill>
-                <a:latin typeface="Aptos"/>
-              </a:rPr>
-              <a:t>4</a:t>
-            </a:r>
-          </a:p>
-        </p:txBody>
-      </p:sp>
-      <p:sp>
-        <p:nvSpPr>
           <p:cNvPr id="21" name="TextBox 43"/>
           <p:cNvSpPr/>
           <p:nvPr/>
@@ -21127,38 +21383,6 @@
               </a:rPr>
               <a:t>Results appear where you can act</a:t>
             </a:r>
-          </a:p>
-        </p:txBody>
-      </p:sp>
-      <p:sp>
-        <p:nvSpPr>
-          <p:cNvPr id="23" name="Rect 70"/>
-          <p:cNvSpPr/>
-          <p:nvPr/>
-        </p:nvSpPr>
-        <p:spPr>
-          <a:xfrm>
-            <a:off x="640080" y="4672584"/>
-            <a:ext cx="10927080" cy="713232"/>
-          </a:xfrm>
-          <a:prstGeom prst="roundRect">
-            <a:avLst/>
-          </a:prstGeom>
-          <a:solidFill>
-            <a:srgbClr val="FFFFFF"/>
-          </a:solidFill>
-          <a:ln>
-            <a:solidFill>
-              <a:srgbClr val="D5DDE7"/>
-            </a:solidFill>
-            <a:prstDash val="solid"/>
-          </a:ln>
-        </p:spPr>
-        <p:txBody>
-          <a:bodyPr/>
-          <a:lstStyle/>
-          <a:p>
-            <a:endParaRPr lang="en-US"/>
           </a:p>
         </p:txBody>
       </p:sp>
@@ -21764,40 +21988,6 @@
       </p:sp>
       <p:sp>
         <p:nvSpPr>
-          <p:cNvPr id="5" name="Rect 30"/>
-          <p:cNvSpPr/>
-          <p:nvPr/>
-        </p:nvSpPr>
-        <p:spPr>
-          <a:xfrm>
-            <a:off x="7543800" y="1554480"/>
-            <a:ext cx="4023360" cy="1234440"/>
-          </a:xfrm>
-          <a:prstGeom prst="roundRect">
-            <a:avLst/>
-          </a:prstGeom>
-          <a:solidFill>
-            <a:srgbClr val="FFFFFF"/>
-          </a:solidFill>
-          <a:ln>
-            <a:solidFill>
-              <a:schemeClr val="bg1">
-                <a:lumMod val="85000"/>
-              </a:schemeClr>
-            </a:solidFill>
-            <a:prstDash val="solid"/>
-          </a:ln>
-        </p:spPr>
-        <p:txBody>
-          <a:bodyPr/>
-          <a:lstStyle/>
-          <a:p>
-            <a:endParaRPr lang="en-US"/>
-          </a:p>
-        </p:txBody>
-      </p:sp>
-      <p:sp>
-        <p:nvSpPr>
           <p:cNvPr id="6" name="TextBox 31"/>
           <p:cNvSpPr/>
           <p:nvPr/>
@@ -21864,38 +22054,6 @@
       </p:sp>
       <p:sp>
         <p:nvSpPr>
-          <p:cNvPr id="8" name="Rect 33"/>
-          <p:cNvSpPr/>
-          <p:nvPr/>
-        </p:nvSpPr>
-        <p:spPr>
-          <a:xfrm>
-            <a:off x="7543800" y="2999232"/>
-            <a:ext cx="4023360" cy="1938528"/>
-          </a:xfrm>
-          <a:prstGeom prst="roundRect">
-            <a:avLst/>
-          </a:prstGeom>
-          <a:solidFill>
-            <a:srgbClr val="FFFFFF"/>
-          </a:solidFill>
-          <a:ln>
-            <a:solidFill>
-              <a:srgbClr val="D5DDE7"/>
-            </a:solidFill>
-            <a:prstDash val="solid"/>
-          </a:ln>
-        </p:spPr>
-        <p:txBody>
-          <a:bodyPr/>
-          <a:lstStyle/>
-          <a:p>
-            <a:endParaRPr lang="en-US"/>
-          </a:p>
-        </p:txBody>
-      </p:sp>
-      <p:sp>
-        <p:nvSpPr>
           <p:cNvPr id="9" name="TextBox 34"/>
           <p:cNvSpPr/>
           <p:nvPr/>
@@ -21916,7 +22074,7 @@
           <a:p>
             <a:pPr marL="0" lvl="0" indent="0" algn="l"/>
             <a:r>
-              <a:rPr lang="en-US" b="1" i="0">
+              <a:rPr lang="en-US" b="1" i="0" dirty="0">
                 <a:solidFill>
                   <a:srgbClr val="172033"/>
                 </a:solidFill>
